--- a/output/wordlabs-port-3day.pptx
+++ b/output/wordlabs-port-3day.pptx
@@ -4240,7 +4240,7 @@
                 <a:ea typeface="Calibri" pitchFamily="34" charset="-122"/>
                 <a:cs typeface="Calibri" pitchFamily="34" charset="-120"/>
               </a:rPr>
-              <a:t>"carry, bring, transport"</a:t>
+              <a:t>"carry, bring, bear"</a:t>
             </a:r>
             <a:endParaRPr lang="en-US" sz="2200" dirty="0"/>
           </a:p>
@@ -5288,7 +5288,7 @@
                 <a:ea typeface="Calibri" pitchFamily="34" charset="-122"/>
                 <a:cs typeface="Calibri" pitchFamily="34" charset="-120"/>
               </a:rPr>
-              <a:t>Word Labs  •  wordlabs.app  •  Root: 'port' = carry, bring, transport</a:t>
+              <a:t>Word Labs  •  wordlabs.app  •  Root: 'port' = carry, bring, bear</a:t>
             </a:r>
             <a:endParaRPr lang="en-US" sz="800" dirty="0"/>
           </a:p>
@@ -5928,7 +5928,7 @@
                 <a:ea typeface="Calibri" pitchFamily="34" charset="-122"/>
                 <a:cs typeface="Calibri" pitchFamily="34" charset="-120"/>
               </a:rPr>
-              <a:t>Word Labs  •  wordlabs.app  •  Root: 'port' = carry, bring, transport</a:t>
+              <a:t>Word Labs  •  wordlabs.app  •  Root: 'port' = carry, bring, bear</a:t>
             </a:r>
             <a:endParaRPr lang="en-US" sz="800" dirty="0"/>
           </a:p>
@@ -6040,7 +6040,7 @@
                 <a:ea typeface="Calibri" pitchFamily="34" charset="-122"/>
                 <a:cs typeface="Calibri" pitchFamily="34" charset="-120"/>
               </a:rPr>
-              <a:t>We need to </a:t>
+              <a:t>We will </a:t>
             </a:r>
             <a:pPr algn="l" indent="0" marL="0">
               <a:buNone/>
@@ -6057,7 +6057,7 @@
                 <a:ea typeface="Calibri" pitchFamily="34" charset="-122"/>
                 <a:cs typeface="Calibri" pitchFamily="34" charset="-120"/>
               </a:rPr>
-              <a:t>transport</a:t>
+              <a:t>import</a:t>
             </a:r>
             <a:pPr algn="l" indent="0" marL="0">
               <a:buNone/>
@@ -6071,7 +6071,7 @@
                 <a:ea typeface="Calibri" pitchFamily="34" charset="-122"/>
                 <a:cs typeface="Calibri" pitchFamily="34" charset="-120"/>
               </a:rPr>
-              <a:t> the supplies carefully, so please write a </a:t>
+              <a:t> fresh fruit from overseas, but we also </a:t>
             </a:r>
             <a:pPr algn="l" indent="0" marL="0">
               <a:buNone/>
@@ -6088,7 +6088,7 @@
                 <a:ea typeface="Calibri" pitchFamily="34" charset="-122"/>
                 <a:cs typeface="Calibri" pitchFamily="34" charset="-120"/>
               </a:rPr>
-              <a:t>report</a:t>
+              <a:t>export</a:t>
             </a:r>
             <a:pPr algn="l" indent="0" marL="0">
               <a:buNone/>
@@ -6102,7 +6102,7 @@
                 <a:ea typeface="Calibri" pitchFamily="34" charset="-122"/>
                 <a:cs typeface="Calibri" pitchFamily="34" charset="-120"/>
               </a:rPr>
-              <a:t> about the best route.</a:t>
+              <a:t> wheat to other countries.</a:t>
             </a:r>
             <a:endParaRPr lang="en-US" sz="1800" dirty="0"/>
           </a:p>
@@ -6257,7 +6257,7 @@
                 <a:ea typeface="Trebuchet MS" pitchFamily="34" charset="-122"/>
                 <a:cs typeface="Trebuchet MS" pitchFamily="34" charset="-120"/>
               </a:rPr>
-              <a:t>transport</a:t>
+              <a:t>import</a:t>
             </a:r>
             <a:endParaRPr lang="en-US" sz="1400" dirty="0"/>
           </a:p>
@@ -6385,7 +6385,7 @@
                 <a:ea typeface="Trebuchet MS" pitchFamily="34" charset="-122"/>
                 <a:cs typeface="Trebuchet MS" pitchFamily="34" charset="-120"/>
               </a:rPr>
-              <a:t>report</a:t>
+              <a:t>export</a:t>
             </a:r>
             <a:endParaRPr lang="en-US" sz="1400" dirty="0"/>
           </a:p>
@@ -6716,7 +6716,7 @@
                 <a:ea typeface="Calibri" pitchFamily="34" charset="-122"/>
                 <a:cs typeface="Calibri" pitchFamily="34" charset="-120"/>
               </a:rPr>
-              <a:t>Word Labs  •  wordlabs.app  •  Root: 'port' = carry, bring, transport</a:t>
+              <a:t>Word Labs  •  wordlabs.app  •  Root: 'port' = carry, bring, bear</a:t>
             </a:r>
             <a:endParaRPr lang="en-US" sz="800" dirty="0"/>
           </a:p>
@@ -6855,7 +6855,7 @@
                 <a:ea typeface="Trebuchet MS" pitchFamily="34" charset="-122"/>
                 <a:cs typeface="Trebuchet MS" pitchFamily="34" charset="-120"/>
               </a:rPr>
-              <a:t>transport</a:t>
+              <a:t>import</a:t>
             </a:r>
             <a:endParaRPr lang="en-US" sz="2800" dirty="0"/>
           </a:p>
@@ -7543,7 +7543,7 @@
                 <a:ea typeface="Calibri" pitchFamily="34" charset="-122"/>
                 <a:cs typeface="Calibri" pitchFamily="34" charset="-120"/>
               </a:rPr>
-              <a:t>Word Labs  •  wordlabs.app  •  Root: 'port' = carry, bring, transport</a:t>
+              <a:t>Word Labs  •  wordlabs.app  •  Root: 'port' = carry, bring, bear</a:t>
             </a:r>
             <a:endParaRPr lang="en-US" sz="800" dirty="0"/>
           </a:p>
@@ -7682,7 +7682,7 @@
                 <a:ea typeface="Trebuchet MS" pitchFamily="34" charset="-122"/>
                 <a:cs typeface="Trebuchet MS" pitchFamily="34" charset="-120"/>
               </a:rPr>
-              <a:t>transport</a:t>
+              <a:t>import</a:t>
             </a:r>
             <a:endParaRPr lang="en-US" sz="2800" dirty="0"/>
           </a:p>
@@ -7821,7 +7821,7 @@
                 <a:ea typeface="Trebuchet MS" pitchFamily="34" charset="-122"/>
                 <a:cs typeface="Trebuchet MS" pitchFamily="34" charset="-120"/>
               </a:rPr>
-              <a:t>trans</a:t>
+              <a:t>im</a:t>
             </a:r>
             <a:endParaRPr lang="en-US" sz="1300" dirty="0"/>
           </a:p>
@@ -7860,7 +7860,7 @@
                 <a:ea typeface="Calibri" pitchFamily="34" charset="-122"/>
                 <a:cs typeface="Calibri" pitchFamily="34" charset="-120"/>
               </a:rPr>
-              <a:t>across, through</a:t>
+              <a:t>into</a:t>
             </a:r>
             <a:endParaRPr lang="en-US" sz="850" dirty="0"/>
           </a:p>
@@ -7868,7 +7868,46 @@
       </p:sp>
       <p:sp>
         <p:nvSpPr>
-          <p:cNvPr id="19" name="Shape 17"/>
+          <p:cNvPr id="19" name="Text 17"/>
+          <p:cNvSpPr/>
+          <p:nvPr/>
+        </p:nvSpPr>
+        <p:spPr>
+          <a:xfrm>
+            <a:off x="2938272" y="2752344"/>
+            <a:ext cx="1828800" cy="182880"/>
+          </a:xfrm>
+          <a:prstGeom prst="rect">
+            <a:avLst/>
+          </a:prstGeom>
+          <a:noFill/>
+          <a:ln/>
+        </p:spPr>
+        <p:txBody>
+          <a:bodyPr wrap="square" lIns="0" tIns="0" rIns="0" bIns="0" rtlCol="0" anchor="t"/>
+          <a:lstStyle/>
+          <a:p>
+            <a:pPr algn="ctr" indent="0" marL="0">
+              <a:buNone/>
+            </a:pPr>
+            <a:r>
+              <a:rPr lang="en-US" sz="700" i="1" dirty="0">
+                <a:solidFill>
+                  <a:srgbClr val="94A3B8"/>
+                </a:solidFill>
+                <a:latin typeface="Calibri" pitchFamily="34" charset="0"/>
+                <a:ea typeface="Calibri" pitchFamily="34" charset="-122"/>
+                <a:cs typeface="Calibri" pitchFamily="34" charset="-120"/>
+              </a:rPr>
+              <a:t>in → im before 'm/p'</a:t>
+            </a:r>
+            <a:endParaRPr lang="en-US" sz="700" dirty="0"/>
+          </a:p>
+        </p:txBody>
+      </p:sp>
+      <p:sp>
+        <p:nvSpPr>
+          <p:cNvPr id="20" name="Shape 18"/>
           <p:cNvSpPr/>
           <p:nvPr/>
         </p:nvSpPr>
@@ -7902,7 +7941,7 @@
       </p:sp>
       <p:sp>
         <p:nvSpPr>
-          <p:cNvPr id="20" name="Text 18"/>
+          <p:cNvPr id="21" name="Text 19"/>
           <p:cNvSpPr/>
           <p:nvPr/>
         </p:nvSpPr>
@@ -7941,7 +7980,7 @@
       </p:sp>
       <p:sp>
         <p:nvSpPr>
-          <p:cNvPr id="21" name="Text 19"/>
+          <p:cNvPr id="22" name="Text 20"/>
           <p:cNvSpPr/>
           <p:nvPr/>
         </p:nvSpPr>
@@ -7980,7 +8019,7 @@
       </p:sp>
       <p:sp>
         <p:nvSpPr>
-          <p:cNvPr id="22" name="Shape 20"/>
+          <p:cNvPr id="23" name="Shape 21"/>
           <p:cNvSpPr/>
           <p:nvPr/>
         </p:nvSpPr>
@@ -8007,7 +8046,7 @@
       </p:sp>
       <p:sp>
         <p:nvSpPr>
-          <p:cNvPr id="23" name="Text 21"/>
+          <p:cNvPr id="24" name="Text 22"/>
           <p:cNvSpPr/>
           <p:nvPr/>
         </p:nvSpPr>
@@ -8046,7 +8085,7 @@
       </p:sp>
       <p:sp>
         <p:nvSpPr>
-          <p:cNvPr id="24" name="Shape 22"/>
+          <p:cNvPr id="25" name="Shape 23"/>
           <p:cNvSpPr/>
           <p:nvPr/>
         </p:nvSpPr>
@@ -8073,7 +8112,7 @@
       </p:sp>
       <p:sp>
         <p:nvSpPr>
-          <p:cNvPr id="25" name="Text 23"/>
+          <p:cNvPr id="26" name="Text 24"/>
           <p:cNvSpPr/>
           <p:nvPr/>
         </p:nvSpPr>
@@ -8112,7 +8151,7 @@
       </p:sp>
       <p:sp>
         <p:nvSpPr>
-          <p:cNvPr id="26" name="Shape 24"/>
+          <p:cNvPr id="27" name="Shape 25"/>
           <p:cNvSpPr/>
           <p:nvPr/>
         </p:nvSpPr>
@@ -8139,7 +8178,7 @@
       </p:sp>
       <p:sp>
         <p:nvSpPr>
-          <p:cNvPr id="27" name="Text 25"/>
+          <p:cNvPr id="28" name="Text 26"/>
           <p:cNvSpPr/>
           <p:nvPr/>
         </p:nvSpPr>
@@ -8178,7 +8217,7 @@
       </p:sp>
       <p:sp>
         <p:nvSpPr>
-          <p:cNvPr id="28" name="Shape 26"/>
+          <p:cNvPr id="29" name="Shape 27"/>
           <p:cNvSpPr/>
           <p:nvPr/>
         </p:nvSpPr>
@@ -8205,7 +8244,7 @@
       </p:sp>
       <p:sp>
         <p:nvSpPr>
-          <p:cNvPr id="29" name="Text 27"/>
+          <p:cNvPr id="30" name="Text 28"/>
           <p:cNvSpPr/>
           <p:nvPr/>
         </p:nvSpPr>
@@ -8528,7 +8567,7 @@
                 <a:ea typeface="Calibri" pitchFamily="34" charset="-122"/>
                 <a:cs typeface="Calibri" pitchFamily="34" charset="-120"/>
               </a:rPr>
-              <a:t>Word Labs  •  wordlabs.app  •  Root: 'port' = carry, bring, transport</a:t>
+              <a:t>Word Labs  •  wordlabs.app  •  Root: 'port' = carry, bring, bear</a:t>
             </a:r>
             <a:endParaRPr lang="en-US" sz="800" dirty="0"/>
           </a:p>
@@ -8667,7 +8706,7 @@
                 <a:ea typeface="Trebuchet MS" pitchFamily="34" charset="-122"/>
                 <a:cs typeface="Trebuchet MS" pitchFamily="34" charset="-120"/>
               </a:rPr>
-              <a:t>transport</a:t>
+              <a:t>import</a:t>
             </a:r>
             <a:endParaRPr lang="en-US" sz="2800" dirty="0"/>
           </a:p>
@@ -8806,7 +8845,7 @@
                 <a:ea typeface="Trebuchet MS" pitchFamily="34" charset="-122"/>
                 <a:cs typeface="Trebuchet MS" pitchFamily="34" charset="-120"/>
               </a:rPr>
-              <a:t>trans</a:t>
+              <a:t>im</a:t>
             </a:r>
             <a:endParaRPr lang="en-US" sz="1300" dirty="0"/>
           </a:p>
@@ -8845,7 +8884,7 @@
                 <a:ea typeface="Calibri" pitchFamily="34" charset="-122"/>
                 <a:cs typeface="Calibri" pitchFamily="34" charset="-120"/>
               </a:rPr>
-              <a:t>across, through</a:t>
+              <a:t>into</a:t>
             </a:r>
             <a:endParaRPr lang="en-US" sz="850" dirty="0"/>
           </a:p>
@@ -8853,7 +8892,46 @@
       </p:sp>
       <p:sp>
         <p:nvSpPr>
-          <p:cNvPr id="19" name="Shape 17"/>
+          <p:cNvPr id="19" name="Text 17"/>
+          <p:cNvSpPr/>
+          <p:nvPr/>
+        </p:nvSpPr>
+        <p:spPr>
+          <a:xfrm>
+            <a:off x="2938272" y="2752344"/>
+            <a:ext cx="1828800" cy="182880"/>
+          </a:xfrm>
+          <a:prstGeom prst="rect">
+            <a:avLst/>
+          </a:prstGeom>
+          <a:noFill/>
+          <a:ln/>
+        </p:spPr>
+        <p:txBody>
+          <a:bodyPr wrap="square" lIns="0" tIns="0" rIns="0" bIns="0" rtlCol="0" anchor="t"/>
+          <a:lstStyle/>
+          <a:p>
+            <a:pPr algn="ctr" indent="0" marL="0">
+              <a:buNone/>
+            </a:pPr>
+            <a:r>
+              <a:rPr lang="en-US" sz="700" i="1" dirty="0">
+                <a:solidFill>
+                  <a:srgbClr val="94A3B8"/>
+                </a:solidFill>
+                <a:latin typeface="Calibri" pitchFamily="34" charset="0"/>
+                <a:ea typeface="Calibri" pitchFamily="34" charset="-122"/>
+                <a:cs typeface="Calibri" pitchFamily="34" charset="-120"/>
+              </a:rPr>
+              <a:t>in → im before 'm/p'</a:t>
+            </a:r>
+            <a:endParaRPr lang="en-US" sz="700" dirty="0"/>
+          </a:p>
+        </p:txBody>
+      </p:sp>
+      <p:sp>
+        <p:nvSpPr>
+          <p:cNvPr id="20" name="Shape 18"/>
           <p:cNvSpPr/>
           <p:nvPr/>
         </p:nvSpPr>
@@ -8887,7 +8965,7 @@
       </p:sp>
       <p:sp>
         <p:nvSpPr>
-          <p:cNvPr id="20" name="Text 18"/>
+          <p:cNvPr id="21" name="Text 19"/>
           <p:cNvSpPr/>
           <p:nvPr/>
         </p:nvSpPr>
@@ -8926,7 +9004,7 @@
       </p:sp>
       <p:sp>
         <p:nvSpPr>
-          <p:cNvPr id="21" name="Text 19"/>
+          <p:cNvPr id="22" name="Text 20"/>
           <p:cNvSpPr/>
           <p:nvPr/>
         </p:nvSpPr>
@@ -8965,7 +9043,7 @@
       </p:sp>
       <p:sp>
         <p:nvSpPr>
-          <p:cNvPr id="22" name="Shape 20"/>
+          <p:cNvPr id="23" name="Shape 21"/>
           <p:cNvSpPr/>
           <p:nvPr/>
         </p:nvSpPr>
@@ -8992,7 +9070,7 @@
       </p:sp>
       <p:sp>
         <p:nvSpPr>
-          <p:cNvPr id="23" name="Text 21"/>
+          <p:cNvPr id="24" name="Text 22"/>
           <p:cNvSpPr/>
           <p:nvPr/>
         </p:nvSpPr>
@@ -9031,7 +9109,7 @@
       </p:sp>
       <p:sp>
         <p:nvSpPr>
-          <p:cNvPr id="24" name="Shape 22"/>
+          <p:cNvPr id="25" name="Shape 23"/>
           <p:cNvSpPr/>
           <p:nvPr/>
         </p:nvSpPr>
@@ -9058,7 +9136,7 @@
       </p:sp>
       <p:sp>
         <p:nvSpPr>
-          <p:cNvPr id="25" name="Shape 23"/>
+          <p:cNvPr id="26" name="Shape 24"/>
           <p:cNvSpPr/>
           <p:nvPr/>
         </p:nvSpPr>
@@ -9085,7 +9163,7 @@
       </p:sp>
       <p:sp>
         <p:nvSpPr>
-          <p:cNvPr id="26" name="Text 24"/>
+          <p:cNvPr id="27" name="Text 25"/>
           <p:cNvSpPr/>
           <p:nvPr/>
         </p:nvSpPr>
@@ -9116,7 +9194,7 @@
                 <a:ea typeface="Trebuchet MS" pitchFamily="34" charset="-122"/>
                 <a:cs typeface="Trebuchet MS" pitchFamily="34" charset="-120"/>
               </a:rPr>
-              <a:t>trans</a:t>
+              <a:t>im</a:t>
             </a:r>
             <a:endParaRPr lang="en-US" sz="1400" dirty="0"/>
           </a:p>
@@ -9124,7 +9202,7 @@
       </p:sp>
       <p:sp>
         <p:nvSpPr>
-          <p:cNvPr id="27" name="Text 25"/>
+          <p:cNvPr id="28" name="Text 26"/>
           <p:cNvSpPr/>
           <p:nvPr/>
         </p:nvSpPr>
@@ -9163,7 +9241,7 @@
       </p:sp>
       <p:sp>
         <p:nvSpPr>
-          <p:cNvPr id="28" name="Shape 26"/>
+          <p:cNvPr id="29" name="Shape 27"/>
           <p:cNvSpPr/>
           <p:nvPr/>
         </p:nvSpPr>
@@ -9190,7 +9268,7 @@
       </p:sp>
       <p:sp>
         <p:nvSpPr>
-          <p:cNvPr id="29" name="Text 27"/>
+          <p:cNvPr id="30" name="Text 28"/>
           <p:cNvSpPr/>
           <p:nvPr/>
         </p:nvSpPr>
@@ -9229,7 +9307,7 @@
       </p:sp>
       <p:sp>
         <p:nvSpPr>
-          <p:cNvPr id="30" name="Shape 28"/>
+          <p:cNvPr id="31" name="Shape 29"/>
           <p:cNvSpPr/>
           <p:nvPr/>
         </p:nvSpPr>
@@ -9256,7 +9334,7 @@
       </p:sp>
       <p:sp>
         <p:nvSpPr>
-          <p:cNvPr id="31" name="Text 29"/>
+          <p:cNvPr id="32" name="Text 30"/>
           <p:cNvSpPr/>
           <p:nvPr/>
         </p:nvSpPr>
@@ -9295,7 +9373,7 @@
       </p:sp>
       <p:sp>
         <p:nvSpPr>
-          <p:cNvPr id="32" name="Shape 30"/>
+          <p:cNvPr id="33" name="Shape 31"/>
           <p:cNvSpPr/>
           <p:nvPr/>
         </p:nvSpPr>
@@ -9322,7 +9400,7 @@
       </p:sp>
       <p:sp>
         <p:nvSpPr>
-          <p:cNvPr id="33" name="Text 31"/>
+          <p:cNvPr id="34" name="Text 32"/>
           <p:cNvSpPr/>
           <p:nvPr/>
         </p:nvSpPr>
@@ -9645,7 +9723,7 @@
                 <a:ea typeface="Calibri" pitchFamily="34" charset="-122"/>
                 <a:cs typeface="Calibri" pitchFamily="34" charset="-120"/>
               </a:rPr>
-              <a:t>Word Labs  •  wordlabs.app  •  Root: 'port' = carry, bring, transport</a:t>
+              <a:t>Word Labs  •  wordlabs.app  •  Root: 'port' = carry, bring, bear</a:t>
             </a:r>
             <a:endParaRPr lang="en-US" sz="800" dirty="0"/>
           </a:p>
@@ -9784,7 +9862,7 @@
                 <a:ea typeface="Trebuchet MS" pitchFamily="34" charset="-122"/>
                 <a:cs typeface="Trebuchet MS" pitchFamily="34" charset="-120"/>
               </a:rPr>
-              <a:t>transport</a:t>
+              <a:t>import</a:t>
             </a:r>
             <a:endParaRPr lang="en-US" sz="2800" dirty="0"/>
           </a:p>
@@ -9923,7 +10001,7 @@
                 <a:ea typeface="Trebuchet MS" pitchFamily="34" charset="-122"/>
                 <a:cs typeface="Trebuchet MS" pitchFamily="34" charset="-120"/>
               </a:rPr>
-              <a:t>trans</a:t>
+              <a:t>im</a:t>
             </a:r>
             <a:endParaRPr lang="en-US" sz="1300" dirty="0"/>
           </a:p>
@@ -9962,7 +10040,7 @@
                 <a:ea typeface="Calibri" pitchFamily="34" charset="-122"/>
                 <a:cs typeface="Calibri" pitchFamily="34" charset="-120"/>
               </a:rPr>
-              <a:t>across, through</a:t>
+              <a:t>into</a:t>
             </a:r>
             <a:endParaRPr lang="en-US" sz="850" dirty="0"/>
           </a:p>
@@ -9970,7 +10048,46 @@
       </p:sp>
       <p:sp>
         <p:nvSpPr>
-          <p:cNvPr id="19" name="Shape 17"/>
+          <p:cNvPr id="19" name="Text 17"/>
+          <p:cNvSpPr/>
+          <p:nvPr/>
+        </p:nvSpPr>
+        <p:spPr>
+          <a:xfrm>
+            <a:off x="2938272" y="2752344"/>
+            <a:ext cx="1828800" cy="182880"/>
+          </a:xfrm>
+          <a:prstGeom prst="rect">
+            <a:avLst/>
+          </a:prstGeom>
+          <a:noFill/>
+          <a:ln/>
+        </p:spPr>
+        <p:txBody>
+          <a:bodyPr wrap="square" lIns="0" tIns="0" rIns="0" bIns="0" rtlCol="0" anchor="t"/>
+          <a:lstStyle/>
+          <a:p>
+            <a:pPr algn="ctr" indent="0" marL="0">
+              <a:buNone/>
+            </a:pPr>
+            <a:r>
+              <a:rPr lang="en-US" sz="700" i="1" dirty="0">
+                <a:solidFill>
+                  <a:srgbClr val="94A3B8"/>
+                </a:solidFill>
+                <a:latin typeface="Calibri" pitchFamily="34" charset="0"/>
+                <a:ea typeface="Calibri" pitchFamily="34" charset="-122"/>
+                <a:cs typeface="Calibri" pitchFamily="34" charset="-120"/>
+              </a:rPr>
+              <a:t>in → im before 'm/p'</a:t>
+            </a:r>
+            <a:endParaRPr lang="en-US" sz="700" dirty="0"/>
+          </a:p>
+        </p:txBody>
+      </p:sp>
+      <p:sp>
+        <p:nvSpPr>
+          <p:cNvPr id="20" name="Shape 18"/>
           <p:cNvSpPr/>
           <p:nvPr/>
         </p:nvSpPr>
@@ -10004,7 +10121,7 @@
       </p:sp>
       <p:sp>
         <p:nvSpPr>
-          <p:cNvPr id="20" name="Text 18"/>
+          <p:cNvPr id="21" name="Text 19"/>
           <p:cNvSpPr/>
           <p:nvPr/>
         </p:nvSpPr>
@@ -10043,7 +10160,7 @@
       </p:sp>
       <p:sp>
         <p:nvSpPr>
-          <p:cNvPr id="21" name="Text 19"/>
+          <p:cNvPr id="22" name="Text 20"/>
           <p:cNvSpPr/>
           <p:nvPr/>
         </p:nvSpPr>
@@ -10082,7 +10199,7 @@
       </p:sp>
       <p:sp>
         <p:nvSpPr>
-          <p:cNvPr id="22" name="Shape 20"/>
+          <p:cNvPr id="23" name="Shape 21"/>
           <p:cNvSpPr/>
           <p:nvPr/>
         </p:nvSpPr>
@@ -10109,7 +10226,7 @@
       </p:sp>
       <p:sp>
         <p:nvSpPr>
-          <p:cNvPr id="23" name="Text 21"/>
+          <p:cNvPr id="24" name="Text 22"/>
           <p:cNvSpPr/>
           <p:nvPr/>
         </p:nvSpPr>
@@ -10148,7 +10265,7 @@
       </p:sp>
       <p:sp>
         <p:nvSpPr>
-          <p:cNvPr id="24" name="Shape 22"/>
+          <p:cNvPr id="25" name="Shape 23"/>
           <p:cNvSpPr/>
           <p:nvPr/>
         </p:nvSpPr>
@@ -10175,7 +10292,7 @@
       </p:sp>
       <p:sp>
         <p:nvSpPr>
-          <p:cNvPr id="25" name="Shape 23"/>
+          <p:cNvPr id="26" name="Shape 24"/>
           <p:cNvSpPr/>
           <p:nvPr/>
         </p:nvSpPr>
@@ -10202,7 +10319,7 @@
       </p:sp>
       <p:sp>
         <p:nvSpPr>
-          <p:cNvPr id="26" name="Text 24"/>
+          <p:cNvPr id="27" name="Text 25"/>
           <p:cNvSpPr/>
           <p:nvPr/>
         </p:nvSpPr>
@@ -10233,7 +10350,7 @@
                 <a:ea typeface="Trebuchet MS" pitchFamily="34" charset="-122"/>
                 <a:cs typeface="Trebuchet MS" pitchFamily="34" charset="-120"/>
               </a:rPr>
-              <a:t>trans</a:t>
+              <a:t>im</a:t>
             </a:r>
             <a:endParaRPr lang="en-US" sz="1400" dirty="0"/>
           </a:p>
@@ -10241,7 +10358,7 @@
       </p:sp>
       <p:sp>
         <p:nvSpPr>
-          <p:cNvPr id="27" name="Text 25"/>
+          <p:cNvPr id="28" name="Text 26"/>
           <p:cNvSpPr/>
           <p:nvPr/>
         </p:nvSpPr>
@@ -10280,7 +10397,7 @@
       </p:sp>
       <p:sp>
         <p:nvSpPr>
-          <p:cNvPr id="28" name="Shape 26"/>
+          <p:cNvPr id="29" name="Shape 27"/>
           <p:cNvSpPr/>
           <p:nvPr/>
         </p:nvSpPr>
@@ -10307,7 +10424,7 @@
       </p:sp>
       <p:sp>
         <p:nvSpPr>
-          <p:cNvPr id="29" name="Text 27"/>
+          <p:cNvPr id="30" name="Text 28"/>
           <p:cNvSpPr/>
           <p:nvPr/>
         </p:nvSpPr>
@@ -10346,7 +10463,7 @@
       </p:sp>
       <p:sp>
         <p:nvSpPr>
-          <p:cNvPr id="30" name="Shape 28"/>
+          <p:cNvPr id="31" name="Shape 29"/>
           <p:cNvSpPr/>
           <p:nvPr/>
         </p:nvSpPr>
@@ -10373,7 +10490,7 @@
       </p:sp>
       <p:sp>
         <p:nvSpPr>
-          <p:cNvPr id="31" name="Text 29"/>
+          <p:cNvPr id="32" name="Text 30"/>
           <p:cNvSpPr/>
           <p:nvPr/>
         </p:nvSpPr>
@@ -10412,7 +10529,7 @@
       </p:sp>
       <p:sp>
         <p:nvSpPr>
-          <p:cNvPr id="32" name="Shape 30"/>
+          <p:cNvPr id="33" name="Shape 31"/>
           <p:cNvSpPr/>
           <p:nvPr/>
         </p:nvSpPr>
@@ -10439,13 +10556,13 @@
       </p:sp>
       <p:sp>
         <p:nvSpPr>
-          <p:cNvPr id="33" name="Shape 31"/>
-          <p:cNvSpPr/>
-          <p:nvPr/>
-        </p:nvSpPr>
-        <p:spPr>
-          <a:xfrm>
-            <a:off x="2023872" y="4169664"/>
+          <p:cNvPr id="34" name="Shape 32"/>
+          <p:cNvSpPr/>
+          <p:nvPr/>
+        </p:nvSpPr>
+        <p:spPr>
+          <a:xfrm>
+            <a:off x="2427732" y="4169664"/>
             <a:ext cx="685800" cy="475488"/>
           </a:xfrm>
           <a:prstGeom prst="rect">
@@ -10466,13 +10583,13 @@
       </p:sp>
       <p:sp>
         <p:nvSpPr>
-          <p:cNvPr id="34" name="Text 32"/>
-          <p:cNvSpPr/>
-          <p:nvPr/>
-        </p:nvSpPr>
-        <p:spPr>
-          <a:xfrm>
-            <a:off x="2023872" y="4169664"/>
+          <p:cNvPr id="35" name="Text 33"/>
+          <p:cNvSpPr/>
+          <p:nvPr/>
+        </p:nvSpPr>
+        <p:spPr>
+          <a:xfrm>
+            <a:off x="2427732" y="4169664"/>
             <a:ext cx="685800" cy="475488"/>
           </a:xfrm>
           <a:prstGeom prst="rect">
@@ -10497,7 +10614,7 @@
                 <a:ea typeface="Trebuchet MS" pitchFamily="34" charset="-122"/>
                 <a:cs typeface="Trebuchet MS" pitchFamily="34" charset="-120"/>
               </a:rPr>
-              <a:t>t</a:t>
+              <a:t>i</a:t>
             </a:r>
             <a:endParaRPr lang="en-US" sz="900" dirty="0"/>
           </a:p>
@@ -10505,13 +10622,13 @@
       </p:sp>
       <p:sp>
         <p:nvSpPr>
-          <p:cNvPr id="35" name="Shape 33"/>
-          <p:cNvSpPr/>
-          <p:nvPr/>
-        </p:nvSpPr>
-        <p:spPr>
-          <a:xfrm>
-            <a:off x="2831592" y="4169664"/>
+          <p:cNvPr id="36" name="Shape 34"/>
+          <p:cNvSpPr/>
+          <p:nvPr/>
+        </p:nvSpPr>
+        <p:spPr>
+          <a:xfrm>
+            <a:off x="3639312" y="4169664"/>
             <a:ext cx="685800" cy="475488"/>
           </a:xfrm>
           <a:prstGeom prst="rect">
@@ -10532,13 +10649,13 @@
       </p:sp>
       <p:sp>
         <p:nvSpPr>
-          <p:cNvPr id="36" name="Text 34"/>
-          <p:cNvSpPr/>
-          <p:nvPr/>
-        </p:nvSpPr>
-        <p:spPr>
-          <a:xfrm>
-            <a:off x="2831592" y="4169664"/>
+          <p:cNvPr id="37" name="Text 35"/>
+          <p:cNvSpPr/>
+          <p:nvPr/>
+        </p:nvSpPr>
+        <p:spPr>
+          <a:xfrm>
+            <a:off x="3639312" y="4169664"/>
             <a:ext cx="685800" cy="475488"/>
           </a:xfrm>
           <a:prstGeom prst="rect">
@@ -10563,7 +10680,7 @@
                 <a:ea typeface="Trebuchet MS" pitchFamily="34" charset="-122"/>
                 <a:cs typeface="Trebuchet MS" pitchFamily="34" charset="-120"/>
               </a:rPr>
-              <a:t>r</a:t>
+              <a:t>m</a:t>
             </a:r>
             <a:endParaRPr lang="en-US" sz="900" dirty="0"/>
           </a:p>
@@ -10571,13 +10688,13 @@
       </p:sp>
       <p:sp>
         <p:nvSpPr>
-          <p:cNvPr id="37" name="Shape 35"/>
-          <p:cNvSpPr/>
-          <p:nvPr/>
-        </p:nvSpPr>
-        <p:spPr>
-          <a:xfrm>
-            <a:off x="3639312" y="4169664"/>
+          <p:cNvPr id="38" name="Shape 36"/>
+          <p:cNvSpPr/>
+          <p:nvPr/>
+        </p:nvSpPr>
+        <p:spPr>
+          <a:xfrm>
+            <a:off x="4850892" y="4169664"/>
             <a:ext cx="685800" cy="475488"/>
           </a:xfrm>
           <a:prstGeom prst="rect">
@@ -10598,13 +10715,13 @@
       </p:sp>
       <p:sp>
         <p:nvSpPr>
-          <p:cNvPr id="38" name="Text 36"/>
-          <p:cNvSpPr/>
-          <p:nvPr/>
-        </p:nvSpPr>
-        <p:spPr>
-          <a:xfrm>
-            <a:off x="3639312" y="4169664"/>
+          <p:cNvPr id="39" name="Text 37"/>
+          <p:cNvSpPr/>
+          <p:nvPr/>
+        </p:nvSpPr>
+        <p:spPr>
+          <a:xfrm>
+            <a:off x="4850892" y="4169664"/>
             <a:ext cx="685800" cy="475488"/>
           </a:xfrm>
           <a:prstGeom prst="rect">
@@ -10629,7 +10746,7 @@
                 <a:ea typeface="Trebuchet MS" pitchFamily="34" charset="-122"/>
                 <a:cs typeface="Trebuchet MS" pitchFamily="34" charset="-120"/>
               </a:rPr>
-              <a:t>a</a:t>
+              <a:t>p</a:t>
             </a:r>
             <a:endParaRPr lang="en-US" sz="900" dirty="0"/>
           </a:p>
@@ -10637,13 +10754,13 @@
       </p:sp>
       <p:sp>
         <p:nvSpPr>
-          <p:cNvPr id="39" name="Shape 37"/>
-          <p:cNvSpPr/>
-          <p:nvPr/>
-        </p:nvSpPr>
-        <p:spPr>
-          <a:xfrm>
-            <a:off x="4447032" y="4169664"/>
+          <p:cNvPr id="40" name="Shape 38"/>
+          <p:cNvSpPr/>
+          <p:nvPr/>
+        </p:nvSpPr>
+        <p:spPr>
+          <a:xfrm>
+            <a:off x="6062472" y="4169664"/>
             <a:ext cx="685800" cy="475488"/>
           </a:xfrm>
           <a:prstGeom prst="rect">
@@ -10664,13 +10781,13 @@
       </p:sp>
       <p:sp>
         <p:nvSpPr>
-          <p:cNvPr id="40" name="Text 38"/>
-          <p:cNvSpPr/>
-          <p:nvPr/>
-        </p:nvSpPr>
-        <p:spPr>
-          <a:xfrm>
-            <a:off x="4447032" y="4169664"/>
+          <p:cNvPr id="41" name="Text 39"/>
+          <p:cNvSpPr/>
+          <p:nvPr/>
+        </p:nvSpPr>
+        <p:spPr>
+          <a:xfrm>
+            <a:off x="6062472" y="4169664"/>
             <a:ext cx="685800" cy="475488"/>
           </a:xfrm>
           <a:prstGeom prst="rect">
@@ -10695,7 +10812,7 @@
                 <a:ea typeface="Trebuchet MS" pitchFamily="34" charset="-122"/>
                 <a:cs typeface="Trebuchet MS" pitchFamily="34" charset="-120"/>
               </a:rPr>
-              <a:t>n</a:t>
+              <a:t>or</a:t>
             </a:r>
             <a:endParaRPr lang="en-US" sz="900" dirty="0"/>
           </a:p>
@@ -10703,13 +10820,13 @@
       </p:sp>
       <p:sp>
         <p:nvSpPr>
-          <p:cNvPr id="41" name="Shape 39"/>
-          <p:cNvSpPr/>
-          <p:nvPr/>
-        </p:nvSpPr>
-        <p:spPr>
-          <a:xfrm>
-            <a:off x="5254752" y="4169664"/>
+          <p:cNvPr id="42" name="Shape 40"/>
+          <p:cNvSpPr/>
+          <p:nvPr/>
+        </p:nvSpPr>
+        <p:spPr>
+          <a:xfrm>
+            <a:off x="7274052" y="4169664"/>
             <a:ext cx="685800" cy="475488"/>
           </a:xfrm>
           <a:prstGeom prst="rect">
@@ -10730,211 +10847,13 @@
       </p:sp>
       <p:sp>
         <p:nvSpPr>
-          <p:cNvPr id="42" name="Text 40"/>
-          <p:cNvSpPr/>
-          <p:nvPr/>
-        </p:nvSpPr>
-        <p:spPr>
-          <a:xfrm>
-            <a:off x="5254752" y="4169664"/>
-            <a:ext cx="685800" cy="475488"/>
-          </a:xfrm>
-          <a:prstGeom prst="rect">
-            <a:avLst/>
-          </a:prstGeom>
-          <a:noFill/>
-          <a:ln/>
-        </p:spPr>
-        <p:txBody>
-          <a:bodyPr wrap="square" lIns="0" tIns="0" rIns="0" bIns="0" rtlCol="0" anchor="ctr"/>
-          <a:lstStyle/>
-          <a:p>
-            <a:pPr algn="ctr" indent="0" marL="0">
-              <a:buNone/>
-            </a:pPr>
-            <a:r>
-              <a:rPr lang="en-US" sz="900" b="1" dirty="0">
-                <a:solidFill>
-                  <a:srgbClr val="9D174D"/>
-                </a:solidFill>
-                <a:latin typeface="Trebuchet MS" pitchFamily="34" charset="0"/>
-                <a:ea typeface="Trebuchet MS" pitchFamily="34" charset="-122"/>
-                <a:cs typeface="Trebuchet MS" pitchFamily="34" charset="-120"/>
-              </a:rPr>
-              <a:t>s</a:t>
-            </a:r>
-            <a:endParaRPr lang="en-US" sz="900" dirty="0"/>
-          </a:p>
-        </p:txBody>
-      </p:sp>
-      <p:sp>
-        <p:nvSpPr>
-          <p:cNvPr id="43" name="Shape 41"/>
-          <p:cNvSpPr/>
-          <p:nvPr/>
-        </p:nvSpPr>
-        <p:spPr>
-          <a:xfrm>
-            <a:off x="6062472" y="4169664"/>
-            <a:ext cx="685800" cy="475488"/>
-          </a:xfrm>
-          <a:prstGeom prst="rect">
-            <a:avLst>
-              <a:gd name="adj" fmla="val 7692"/>
-            </a:avLst>
-          </a:prstGeom>
-          <a:solidFill>
-            <a:srgbClr val="FFFFFF"/>
-          </a:solidFill>
-          <a:ln w="12700">
-            <a:solidFill>
-              <a:srgbClr val="DB2777"/>
-            </a:solidFill>
-            <a:prstDash val="solid"/>
-          </a:ln>
-        </p:spPr>
-      </p:sp>
-      <p:sp>
-        <p:nvSpPr>
-          <p:cNvPr id="44" name="Text 42"/>
-          <p:cNvSpPr/>
-          <p:nvPr/>
-        </p:nvSpPr>
-        <p:spPr>
-          <a:xfrm>
-            <a:off x="6062472" y="4169664"/>
-            <a:ext cx="685800" cy="475488"/>
-          </a:xfrm>
-          <a:prstGeom prst="rect">
-            <a:avLst/>
-          </a:prstGeom>
-          <a:noFill/>
-          <a:ln/>
-        </p:spPr>
-        <p:txBody>
-          <a:bodyPr wrap="square" lIns="0" tIns="0" rIns="0" bIns="0" rtlCol="0" anchor="ctr"/>
-          <a:lstStyle/>
-          <a:p>
-            <a:pPr algn="ctr" indent="0" marL="0">
-              <a:buNone/>
-            </a:pPr>
-            <a:r>
-              <a:rPr lang="en-US" sz="900" b="1" dirty="0">
-                <a:solidFill>
-                  <a:srgbClr val="9D174D"/>
-                </a:solidFill>
-                <a:latin typeface="Trebuchet MS" pitchFamily="34" charset="0"/>
-                <a:ea typeface="Trebuchet MS" pitchFamily="34" charset="-122"/>
-                <a:cs typeface="Trebuchet MS" pitchFamily="34" charset="-120"/>
-              </a:rPr>
-              <a:t>p</a:t>
-            </a:r>
-            <a:endParaRPr lang="en-US" sz="900" dirty="0"/>
-          </a:p>
-        </p:txBody>
-      </p:sp>
-      <p:sp>
-        <p:nvSpPr>
-          <p:cNvPr id="45" name="Shape 43"/>
-          <p:cNvSpPr/>
-          <p:nvPr/>
-        </p:nvSpPr>
-        <p:spPr>
-          <a:xfrm>
-            <a:off x="6870192" y="4169664"/>
-            <a:ext cx="685800" cy="475488"/>
-          </a:xfrm>
-          <a:prstGeom prst="rect">
-            <a:avLst>
-              <a:gd name="adj" fmla="val 7692"/>
-            </a:avLst>
-          </a:prstGeom>
-          <a:solidFill>
-            <a:srgbClr val="FFFFFF"/>
-          </a:solidFill>
-          <a:ln w="12700">
-            <a:solidFill>
-              <a:srgbClr val="DB2777"/>
-            </a:solidFill>
-            <a:prstDash val="solid"/>
-          </a:ln>
-        </p:spPr>
-      </p:sp>
-      <p:sp>
-        <p:nvSpPr>
-          <p:cNvPr id="46" name="Text 44"/>
-          <p:cNvSpPr/>
-          <p:nvPr/>
-        </p:nvSpPr>
-        <p:spPr>
-          <a:xfrm>
-            <a:off x="6870192" y="4169664"/>
-            <a:ext cx="685800" cy="475488"/>
-          </a:xfrm>
-          <a:prstGeom prst="rect">
-            <a:avLst/>
-          </a:prstGeom>
-          <a:noFill/>
-          <a:ln/>
-        </p:spPr>
-        <p:txBody>
-          <a:bodyPr wrap="square" lIns="0" tIns="0" rIns="0" bIns="0" rtlCol="0" anchor="ctr"/>
-          <a:lstStyle/>
-          <a:p>
-            <a:pPr algn="ctr" indent="0" marL="0">
-              <a:buNone/>
-            </a:pPr>
-            <a:r>
-              <a:rPr lang="en-US" sz="900" b="1" dirty="0">
-                <a:solidFill>
-                  <a:srgbClr val="9D174D"/>
-                </a:solidFill>
-                <a:latin typeface="Trebuchet MS" pitchFamily="34" charset="0"/>
-                <a:ea typeface="Trebuchet MS" pitchFamily="34" charset="-122"/>
-                <a:cs typeface="Trebuchet MS" pitchFamily="34" charset="-120"/>
-              </a:rPr>
-              <a:t>or</a:t>
-            </a:r>
-            <a:endParaRPr lang="en-US" sz="900" dirty="0"/>
-          </a:p>
-        </p:txBody>
-      </p:sp>
-      <p:sp>
-        <p:nvSpPr>
-          <p:cNvPr id="47" name="Shape 45"/>
-          <p:cNvSpPr/>
-          <p:nvPr/>
-        </p:nvSpPr>
-        <p:spPr>
-          <a:xfrm>
-            <a:off x="7677912" y="4169664"/>
-            <a:ext cx="685800" cy="475488"/>
-          </a:xfrm>
-          <a:prstGeom prst="rect">
-            <a:avLst>
-              <a:gd name="adj" fmla="val 7692"/>
-            </a:avLst>
-          </a:prstGeom>
-          <a:solidFill>
-            <a:srgbClr val="FFFFFF"/>
-          </a:solidFill>
-          <a:ln w="12700">
-            <a:solidFill>
-              <a:srgbClr val="DB2777"/>
-            </a:solidFill>
-            <a:prstDash val="solid"/>
-          </a:ln>
-        </p:spPr>
-      </p:sp>
-      <p:sp>
-        <p:nvSpPr>
-          <p:cNvPr id="48" name="Text 46"/>
-          <p:cNvSpPr/>
-          <p:nvPr/>
-        </p:nvSpPr>
-        <p:spPr>
-          <a:xfrm>
-            <a:off x="7677912" y="4169664"/>
+          <p:cNvPr id="43" name="Text 41"/>
+          <p:cNvSpPr/>
+          <p:nvPr/>
+        </p:nvSpPr>
+        <p:spPr>
+          <a:xfrm>
+            <a:off x="7274052" y="4169664"/>
             <a:ext cx="685800" cy="475488"/>
           </a:xfrm>
           <a:prstGeom prst="rect">
@@ -11251,7 +11170,7 @@
                 <a:ea typeface="Calibri" pitchFamily="34" charset="-122"/>
                 <a:cs typeface="Calibri" pitchFamily="34" charset="-120"/>
               </a:rPr>
-              <a:t>Word Labs  •  wordlabs.app  •  Root: 'port' = carry, bring, transport</a:t>
+              <a:t>Word Labs  •  wordlabs.app  •  Root: 'port' = carry, bring, bear</a:t>
             </a:r>
             <a:endParaRPr lang="en-US" sz="800" dirty="0"/>
           </a:p>
@@ -11390,7 +11309,7 @@
                 <a:ea typeface="Trebuchet MS" pitchFamily="34" charset="-122"/>
                 <a:cs typeface="Trebuchet MS" pitchFamily="34" charset="-120"/>
               </a:rPr>
-              <a:t>report</a:t>
+              <a:t>export</a:t>
             </a:r>
             <a:endParaRPr lang="en-US" sz="2800" dirty="0"/>
           </a:p>
@@ -12078,7 +11997,7 @@
                 <a:ea typeface="Calibri" pitchFamily="34" charset="-122"/>
                 <a:cs typeface="Calibri" pitchFamily="34" charset="-120"/>
               </a:rPr>
-              <a:t>Word Labs  •  wordlabs.app  •  Root: 'port' = carry, bring, transport</a:t>
+              <a:t>Word Labs  •  wordlabs.app  •  Root: 'port' = carry, bring, bear</a:t>
             </a:r>
             <a:endParaRPr lang="en-US" sz="800" dirty="0"/>
           </a:p>
@@ -12217,7 +12136,7 @@
                 <a:ea typeface="Trebuchet MS" pitchFamily="34" charset="-122"/>
                 <a:cs typeface="Trebuchet MS" pitchFamily="34" charset="-120"/>
               </a:rPr>
-              <a:t>report</a:t>
+              <a:t>export</a:t>
             </a:r>
             <a:endParaRPr lang="en-US" sz="2800" dirty="0"/>
           </a:p>
@@ -12356,7 +12275,7 @@
                 <a:ea typeface="Trebuchet MS" pitchFamily="34" charset="-122"/>
                 <a:cs typeface="Trebuchet MS" pitchFamily="34" charset="-120"/>
               </a:rPr>
-              <a:t>re</a:t>
+              <a:t>ex</a:t>
             </a:r>
             <a:endParaRPr lang="en-US" sz="1300" dirty="0"/>
           </a:p>
@@ -12395,7 +12314,7 @@
                 <a:ea typeface="Calibri" pitchFamily="34" charset="-122"/>
                 <a:cs typeface="Calibri" pitchFamily="34" charset="-120"/>
               </a:rPr>
-              <a:t>back, again</a:t>
+              <a:t>out of</a:t>
             </a:r>
             <a:endParaRPr lang="en-US" sz="850" dirty="0"/>
           </a:p>
@@ -13063,7 +12982,7 @@
                 <a:ea typeface="Calibri" pitchFamily="34" charset="-122"/>
                 <a:cs typeface="Calibri" pitchFamily="34" charset="-120"/>
               </a:rPr>
-              <a:t>Word Labs  •  wordlabs.app  •  Root: 'port' = carry, bring, transport</a:t>
+              <a:t>Word Labs  •  wordlabs.app  •  Root: 'port' = carry, bring, bear</a:t>
             </a:r>
             <a:endParaRPr lang="en-US" sz="800" dirty="0"/>
           </a:p>
@@ -13202,7 +13121,7 @@
                 <a:ea typeface="Trebuchet MS" pitchFamily="34" charset="-122"/>
                 <a:cs typeface="Trebuchet MS" pitchFamily="34" charset="-120"/>
               </a:rPr>
-              <a:t>report</a:t>
+              <a:t>export</a:t>
             </a:r>
             <a:endParaRPr lang="en-US" sz="2800" dirty="0"/>
           </a:p>
@@ -13341,7 +13260,7 @@
                 <a:ea typeface="Trebuchet MS" pitchFamily="34" charset="-122"/>
                 <a:cs typeface="Trebuchet MS" pitchFamily="34" charset="-120"/>
               </a:rPr>
-              <a:t>re</a:t>
+              <a:t>ex</a:t>
             </a:r>
             <a:endParaRPr lang="en-US" sz="1300" dirty="0"/>
           </a:p>
@@ -13380,7 +13299,7 @@
                 <a:ea typeface="Calibri" pitchFamily="34" charset="-122"/>
                 <a:cs typeface="Calibri" pitchFamily="34" charset="-120"/>
               </a:rPr>
-              <a:t>back, again</a:t>
+              <a:t>out of</a:t>
             </a:r>
             <a:endParaRPr lang="en-US" sz="850" dirty="0"/>
           </a:p>
@@ -13651,7 +13570,7 @@
                 <a:ea typeface="Trebuchet MS" pitchFamily="34" charset="-122"/>
                 <a:cs typeface="Trebuchet MS" pitchFamily="34" charset="-120"/>
               </a:rPr>
-              <a:t>re</a:t>
+              <a:t>ex</a:t>
             </a:r>
             <a:endParaRPr lang="en-US" sz="1400" dirty="0"/>
           </a:p>
@@ -14089,7 +14008,7 @@
                 <a:ea typeface="Calibri" pitchFamily="34" charset="-122"/>
                 <a:cs typeface="Calibri" pitchFamily="34" charset="-120"/>
               </a:rPr>
-              <a:t>Root 'port' — carry, bring, transport</a:t>
+              <a:t>Root 'port' — carry, bring, bear</a:t>
             </a:r>
             <a:endParaRPr lang="en-US" sz="1600" dirty="0"/>
           </a:p>
@@ -14445,7 +14364,7 @@
                 <a:ea typeface="Calibri" pitchFamily="34" charset="-122"/>
                 <a:cs typeface="Calibri" pitchFamily="34" charset="-120"/>
               </a:rPr>
-              <a:t>Word Labs  •  wordlabs.app  •  Root: 'port' = carry, bring, transport</a:t>
+              <a:t>Word Labs  •  wordlabs.app  •  Root: 'port' = carry, bring, bear</a:t>
             </a:r>
             <a:endParaRPr lang="en-US" sz="800" dirty="0"/>
           </a:p>
@@ -14584,7 +14503,7 @@
                 <a:ea typeface="Trebuchet MS" pitchFamily="34" charset="-122"/>
                 <a:cs typeface="Trebuchet MS" pitchFamily="34" charset="-120"/>
               </a:rPr>
-              <a:t>report</a:t>
+              <a:t>export</a:t>
             </a:r>
             <a:endParaRPr lang="en-US" sz="2800" dirty="0"/>
           </a:p>
@@ -14723,7 +14642,7 @@
                 <a:ea typeface="Trebuchet MS" pitchFamily="34" charset="-122"/>
                 <a:cs typeface="Trebuchet MS" pitchFamily="34" charset="-120"/>
               </a:rPr>
-              <a:t>re</a:t>
+              <a:t>ex</a:t>
             </a:r>
             <a:endParaRPr lang="en-US" sz="1300" dirty="0"/>
           </a:p>
@@ -14762,7 +14681,7 @@
                 <a:ea typeface="Calibri" pitchFamily="34" charset="-122"/>
                 <a:cs typeface="Calibri" pitchFamily="34" charset="-120"/>
               </a:rPr>
-              <a:t>back, again</a:t>
+              <a:t>out of</a:t>
             </a:r>
             <a:endParaRPr lang="en-US" sz="850" dirty="0"/>
           </a:p>
@@ -15033,7 +14952,7 @@
                 <a:ea typeface="Trebuchet MS" pitchFamily="34" charset="-122"/>
                 <a:cs typeface="Trebuchet MS" pitchFamily="34" charset="-120"/>
               </a:rPr>
-              <a:t>re</a:t>
+              <a:t>ex</a:t>
             </a:r>
             <a:endParaRPr lang="en-US" sz="1400" dirty="0"/>
           </a:p>
@@ -15219,11 +15138,11 @@
         <p:spPr>
           <a:xfrm>
             <a:off x="1874520" y="4096512"/>
-            <a:ext cx="6903720" cy="658368"/>
+            <a:ext cx="6903720" cy="804672"/>
           </a:xfrm>
           <a:prstGeom prst="rect">
             <a:avLst>
-              <a:gd name="adj" fmla="val 8333"/>
+              <a:gd name="adj" fmla="val 6818"/>
             </a:avLst>
           </a:prstGeom>
           <a:solidFill>
@@ -15246,11 +15165,11 @@
         <p:spPr>
           <a:xfrm>
             <a:off x="2427732" y="4169664"/>
-            <a:ext cx="685800" cy="475488"/>
+            <a:ext cx="685800" cy="384048"/>
           </a:xfrm>
           <a:prstGeom prst="rect">
             <a:avLst>
-              <a:gd name="adj" fmla="val 7692"/>
+              <a:gd name="adj" fmla="val 9524"/>
             </a:avLst>
           </a:prstGeom>
           <a:solidFill>
@@ -15273,7 +15192,7 @@
         <p:spPr>
           <a:xfrm>
             <a:off x="2427732" y="4169664"/>
-            <a:ext cx="685800" cy="475488"/>
+            <a:ext cx="685800" cy="384048"/>
           </a:xfrm>
           <a:prstGeom prst="rect">
             <a:avLst/>
@@ -15297,7 +15216,7 @@
                 <a:ea typeface="Trebuchet MS" pitchFamily="34" charset="-122"/>
                 <a:cs typeface="Trebuchet MS" pitchFamily="34" charset="-120"/>
               </a:rPr>
-              <a:t>r</a:t>
+              <a:t>e</a:t>
             </a:r>
             <a:endParaRPr lang="en-US" sz="900" dirty="0"/>
           </a:p>
@@ -15312,11 +15231,11 @@
         <p:spPr>
           <a:xfrm>
             <a:off x="3639312" y="4169664"/>
-            <a:ext cx="685800" cy="475488"/>
+            <a:ext cx="685800" cy="384048"/>
           </a:xfrm>
           <a:prstGeom prst="rect">
             <a:avLst>
-              <a:gd name="adj" fmla="val 7692"/>
+              <a:gd name="adj" fmla="val 9524"/>
             </a:avLst>
           </a:prstGeom>
           <a:solidFill>
@@ -15339,7 +15258,7 @@
         <p:spPr>
           <a:xfrm>
             <a:off x="3639312" y="4169664"/>
-            <a:ext cx="685800" cy="475488"/>
+            <a:ext cx="685800" cy="384048"/>
           </a:xfrm>
           <a:prstGeom prst="rect">
             <a:avLst/>
@@ -15363,7 +15282,7 @@
                 <a:ea typeface="Trebuchet MS" pitchFamily="34" charset="-122"/>
                 <a:cs typeface="Trebuchet MS" pitchFamily="34" charset="-120"/>
               </a:rPr>
-              <a:t>e</a:t>
+              <a:t>x</a:t>
             </a:r>
             <a:endParaRPr lang="en-US" sz="900" dirty="0"/>
           </a:p>
@@ -15371,18 +15290,57 @@
       </p:sp>
       <p:sp>
         <p:nvSpPr>
-          <p:cNvPr id="37" name="Shape 35"/>
+          <p:cNvPr id="37" name="Text 35"/>
+          <p:cNvSpPr/>
+          <p:nvPr/>
+        </p:nvSpPr>
+        <p:spPr>
+          <a:xfrm>
+            <a:off x="3639312" y="4572000"/>
+            <a:ext cx="685800" cy="219456"/>
+          </a:xfrm>
+          <a:prstGeom prst="rect">
+            <a:avLst/>
+          </a:prstGeom>
+          <a:noFill/>
+          <a:ln/>
+        </p:spPr>
+        <p:txBody>
+          <a:bodyPr wrap="square" lIns="0" tIns="0" rIns="0" bIns="0" rtlCol="0" anchor="t"/>
+          <a:lstStyle/>
+          <a:p>
+            <a:pPr algn="ctr" indent="0" marL="0">
+              <a:buNone/>
+            </a:pPr>
+            <a:r>
+              <a:rPr lang="en-US" sz="750" i="1" dirty="0">
+                <a:solidFill>
+                  <a:srgbClr val="94A3B8"/>
+                </a:solidFill>
+                <a:latin typeface="Calibri" pitchFamily="34" charset="0"/>
+                <a:ea typeface="Calibri" pitchFamily="34" charset="-122"/>
+                <a:cs typeface="Calibri" pitchFamily="34" charset="-120"/>
+              </a:rPr>
+              <a:t>/ks/</a:t>
+            </a:r>
+            <a:endParaRPr lang="en-US" sz="750" dirty="0"/>
+          </a:p>
+        </p:txBody>
+      </p:sp>
+      <p:sp>
+        <p:nvSpPr>
+          <p:cNvPr id="38" name="Shape 36"/>
           <p:cNvSpPr/>
           <p:nvPr/>
         </p:nvSpPr>
         <p:spPr>
           <a:xfrm>
             <a:off x="4850892" y="4169664"/>
-            <a:ext cx="685800" cy="475488"/>
+            <a:ext cx="685800" cy="384048"/>
           </a:xfrm>
           <a:prstGeom prst="rect">
             <a:avLst>
-              <a:gd name="adj" fmla="val 7692"/>
+              <a:gd name="adj" fmla="val 9524"/>
             </a:avLst>
           </a:prstGeom>
           <a:solidFill>
@@ -15398,14 +15356,14 @@
       </p:sp>
       <p:sp>
         <p:nvSpPr>
-          <p:cNvPr id="38" name="Text 36"/>
+          <p:cNvPr id="39" name="Text 37"/>
           <p:cNvSpPr/>
           <p:nvPr/>
         </p:nvSpPr>
         <p:spPr>
           <a:xfrm>
             <a:off x="4850892" y="4169664"/>
-            <a:ext cx="685800" cy="475488"/>
+            <a:ext cx="685800" cy="384048"/>
           </a:xfrm>
           <a:prstGeom prst="rect">
             <a:avLst/>
@@ -15437,18 +15395,18 @@
       </p:sp>
       <p:sp>
         <p:nvSpPr>
-          <p:cNvPr id="39" name="Shape 37"/>
+          <p:cNvPr id="40" name="Shape 38"/>
           <p:cNvSpPr/>
           <p:nvPr/>
         </p:nvSpPr>
         <p:spPr>
           <a:xfrm>
             <a:off x="6062472" y="4169664"/>
-            <a:ext cx="685800" cy="475488"/>
+            <a:ext cx="685800" cy="384048"/>
           </a:xfrm>
           <a:prstGeom prst="rect">
             <a:avLst>
-              <a:gd name="adj" fmla="val 7692"/>
+              <a:gd name="adj" fmla="val 9524"/>
             </a:avLst>
           </a:prstGeom>
           <a:solidFill>
@@ -15464,14 +15422,14 @@
       </p:sp>
       <p:sp>
         <p:nvSpPr>
-          <p:cNvPr id="40" name="Text 38"/>
+          <p:cNvPr id="41" name="Text 39"/>
           <p:cNvSpPr/>
           <p:nvPr/>
         </p:nvSpPr>
         <p:spPr>
           <a:xfrm>
             <a:off x="6062472" y="4169664"/>
-            <a:ext cx="685800" cy="475488"/>
+            <a:ext cx="685800" cy="384048"/>
           </a:xfrm>
           <a:prstGeom prst="rect">
             <a:avLst/>
@@ -15503,18 +15461,18 @@
       </p:sp>
       <p:sp>
         <p:nvSpPr>
-          <p:cNvPr id="41" name="Shape 39"/>
+          <p:cNvPr id="42" name="Shape 40"/>
           <p:cNvSpPr/>
           <p:nvPr/>
         </p:nvSpPr>
         <p:spPr>
           <a:xfrm>
             <a:off x="7274052" y="4169664"/>
-            <a:ext cx="685800" cy="475488"/>
+            <a:ext cx="685800" cy="384048"/>
           </a:xfrm>
           <a:prstGeom prst="rect">
             <a:avLst>
-              <a:gd name="adj" fmla="val 7692"/>
+              <a:gd name="adj" fmla="val 9524"/>
             </a:avLst>
           </a:prstGeom>
           <a:solidFill>
@@ -15530,14 +15488,14 @@
       </p:sp>
       <p:sp>
         <p:nvSpPr>
-          <p:cNvPr id="42" name="Text 40"/>
+          <p:cNvPr id="43" name="Text 41"/>
           <p:cNvSpPr/>
           <p:nvPr/>
         </p:nvSpPr>
         <p:spPr>
           <a:xfrm>
             <a:off x="7274052" y="4169664"/>
-            <a:ext cx="685800" cy="475488"/>
+            <a:ext cx="685800" cy="384048"/>
           </a:xfrm>
           <a:prstGeom prst="rect">
             <a:avLst/>
@@ -16135,7 +16093,7 @@
                 <a:ea typeface="Calibri" pitchFamily="34" charset="-122"/>
                 <a:cs typeface="Calibri" pitchFamily="34" charset="-120"/>
               </a:rPr>
-              <a:t>Word Labs  •  wordlabs.app  •  Root: 'port' = carry, bring, transport</a:t>
+              <a:t>Word Labs  •  wordlabs.app  •  Root: 'port' = carry, bring, bear</a:t>
             </a:r>
             <a:endParaRPr lang="en-US" sz="800" dirty="0"/>
           </a:p>
@@ -16775,7 +16733,7 @@
                 <a:ea typeface="Calibri" pitchFamily="34" charset="-122"/>
                 <a:cs typeface="Calibri" pitchFamily="34" charset="-120"/>
               </a:rPr>
-              <a:t>Word Labs  •  wordlabs.app  •  Root: 'port' = carry, bring, transport</a:t>
+              <a:t>Word Labs  •  wordlabs.app  •  Root: 'port' = carry, bring, bear</a:t>
             </a:r>
             <a:endParaRPr lang="en-US" sz="800" dirty="0"/>
           </a:p>
@@ -16918,7 +16876,7 @@
                 <a:ea typeface="Calibri" pitchFamily="34" charset="-122"/>
                 <a:cs typeface="Calibri" pitchFamily="34" charset="-120"/>
               </a:rPr>
-              <a:t> helped to </a:t>
+              <a:t> helped with </a:t>
             </a:r>
             <a:pPr algn="l" indent="0" marL="0">
               <a:buNone/>
@@ -16935,7 +16893,7 @@
                 <a:ea typeface="Calibri" pitchFamily="34" charset="-122"/>
                 <a:cs typeface="Calibri" pitchFamily="34" charset="-120"/>
               </a:rPr>
-              <a:t>transport</a:t>
+              <a:t>transportation</a:t>
             </a:r>
             <a:pPr algn="l" indent="0" marL="0">
               <a:buNone/>
@@ -16949,7 +16907,7 @@
                 <a:ea typeface="Calibri" pitchFamily="34" charset="-122"/>
                 <a:cs typeface="Calibri" pitchFamily="34" charset="-120"/>
               </a:rPr>
-              <a:t> the luggage, and we were asked to support the new </a:t>
+              <a:t> of our bags, and the </a:t>
             </a:r>
             <a:pPr algn="l" indent="0" marL="0">
               <a:buNone/>
@@ -16966,7 +16924,7 @@
                 <a:ea typeface="Calibri" pitchFamily="34" charset="-122"/>
                 <a:cs typeface="Calibri" pitchFamily="34" charset="-120"/>
               </a:rPr>
-              <a:t>importation</a:t>
+              <a:t>support</a:t>
             </a:r>
             <a:pPr algn="l" indent="0" marL="0">
               <a:buNone/>
@@ -16980,7 +16938,7 @@
                 <a:ea typeface="Calibri" pitchFamily="34" charset="-122"/>
                 <a:cs typeface="Calibri" pitchFamily="34" charset="-120"/>
               </a:rPr>
-              <a:t> rules.</a:t>
+              <a:t> from the staff was wonderful!</a:t>
             </a:r>
             <a:endParaRPr lang="en-US" sz="1800" dirty="0"/>
           </a:p>
@@ -17263,7 +17221,7 @@
                 <a:ea typeface="Trebuchet MS" pitchFamily="34" charset="-122"/>
                 <a:cs typeface="Trebuchet MS" pitchFamily="34" charset="-120"/>
               </a:rPr>
-              <a:t>transport</a:t>
+              <a:t>transportation</a:t>
             </a:r>
             <a:endParaRPr lang="en-US" sz="1400" dirty="0"/>
           </a:p>
@@ -17391,7 +17349,7 @@
                 <a:ea typeface="Trebuchet MS" pitchFamily="34" charset="-122"/>
                 <a:cs typeface="Trebuchet MS" pitchFamily="34" charset="-120"/>
               </a:rPr>
-              <a:t>importation</a:t>
+              <a:t>support</a:t>
             </a:r>
             <a:endParaRPr lang="en-US" sz="1400" dirty="0"/>
           </a:p>
@@ -17722,7 +17680,7 @@
                 <a:ea typeface="Calibri" pitchFamily="34" charset="-122"/>
                 <a:cs typeface="Calibri" pitchFamily="34" charset="-120"/>
               </a:rPr>
-              <a:t>Word Labs  •  wordlabs.app  •  Root: 'port' = carry, bring, transport</a:t>
+              <a:t>Word Labs  •  wordlabs.app  •  Root: 'port' = carry, bring, bear</a:t>
             </a:r>
             <a:endParaRPr lang="en-US" sz="800" dirty="0"/>
           </a:p>
@@ -18549,7 +18507,7 @@
                 <a:ea typeface="Calibri" pitchFamily="34" charset="-122"/>
                 <a:cs typeface="Calibri" pitchFamily="34" charset="-120"/>
               </a:rPr>
-              <a:t>Word Labs  •  wordlabs.app  •  Root: 'port' = carry, bring, transport</a:t>
+              <a:t>Word Labs  •  wordlabs.app  •  Root: 'port' = carry, bring, bear</a:t>
             </a:r>
             <a:endParaRPr lang="en-US" sz="800" dirty="0"/>
           </a:p>
@@ -19534,7 +19492,7 @@
                 <a:ea typeface="Calibri" pitchFamily="34" charset="-122"/>
                 <a:cs typeface="Calibri" pitchFamily="34" charset="-120"/>
               </a:rPr>
-              <a:t>Word Labs  •  wordlabs.app  •  Root: 'port' = carry, bring, transport</a:t>
+              <a:t>Word Labs  •  wordlabs.app  •  Root: 'port' = carry, bring, bear</a:t>
             </a:r>
             <a:endParaRPr lang="en-US" sz="800" dirty="0"/>
           </a:p>
@@ -20651,7 +20609,7 @@
                 <a:ea typeface="Calibri" pitchFamily="34" charset="-122"/>
                 <a:cs typeface="Calibri" pitchFamily="34" charset="-120"/>
               </a:rPr>
-              <a:t>Word Labs  •  wordlabs.app  •  Root: 'port' = carry, bring, transport</a:t>
+              <a:t>Word Labs  •  wordlabs.app  •  Root: 'port' = carry, bring, bear</a:t>
             </a:r>
             <a:endParaRPr lang="en-US" sz="800" dirty="0"/>
           </a:p>
@@ -21993,7 +21951,7 @@
                 <a:ea typeface="Calibri" pitchFamily="34" charset="-122"/>
                 <a:cs typeface="Calibri" pitchFamily="34" charset="-120"/>
               </a:rPr>
-              <a:t>Word Labs  •  wordlabs.app  •  Root: 'port' = carry, bring, transport</a:t>
+              <a:t>Word Labs  •  wordlabs.app  •  Root: 'port' = carry, bring, bear</a:t>
             </a:r>
             <a:endParaRPr lang="en-US" sz="800" dirty="0"/>
           </a:p>
@@ -22132,7 +22090,7 @@
                 <a:ea typeface="Trebuchet MS" pitchFamily="34" charset="-122"/>
                 <a:cs typeface="Trebuchet MS" pitchFamily="34" charset="-120"/>
               </a:rPr>
-              <a:t>transport</a:t>
+              <a:t>transportation</a:t>
             </a:r>
             <a:endParaRPr lang="en-US" sz="2800" dirty="0"/>
           </a:p>
@@ -22820,7 +22778,7 @@
                 <a:ea typeface="Calibri" pitchFamily="34" charset="-122"/>
                 <a:cs typeface="Calibri" pitchFamily="34" charset="-120"/>
               </a:rPr>
-              <a:t>Word Labs  •  wordlabs.app  •  Root: 'port' = carry, bring, transport</a:t>
+              <a:t>Word Labs  •  wordlabs.app  •  Root: 'port' = carry, bring, bear</a:t>
             </a:r>
             <a:endParaRPr lang="en-US" sz="800" dirty="0"/>
           </a:p>
@@ -22959,7 +22917,7 @@
                 <a:ea typeface="Trebuchet MS" pitchFamily="34" charset="-122"/>
                 <a:cs typeface="Trebuchet MS" pitchFamily="34" charset="-120"/>
               </a:rPr>
-              <a:t>transport</a:t>
+              <a:t>transportation</a:t>
             </a:r>
             <a:endParaRPr lang="en-US" sz="2800" dirty="0"/>
           </a:p>
@@ -23039,8 +22997,8 @@
         </p:nvSpPr>
         <p:spPr>
           <a:xfrm>
-            <a:off x="2938272" y="2258568"/>
-            <a:ext cx="1828800" cy="292608"/>
+            <a:off x="1989734" y="2258568"/>
+            <a:ext cx="1581912" cy="292608"/>
           </a:xfrm>
           <a:prstGeom prst="rect">
             <a:avLst>
@@ -23073,8 +23031,8 @@
         </p:nvSpPr>
         <p:spPr>
           <a:xfrm>
-            <a:off x="2938272" y="2258568"/>
-            <a:ext cx="1828800" cy="292608"/>
+            <a:off x="1989734" y="2258568"/>
+            <a:ext cx="1581912" cy="292608"/>
           </a:xfrm>
           <a:prstGeom prst="rect">
             <a:avLst/>
@@ -23112,8 +23070,8 @@
         </p:nvSpPr>
         <p:spPr>
           <a:xfrm>
-            <a:off x="2938272" y="2569464"/>
-            <a:ext cx="1828800" cy="201168"/>
+            <a:off x="1989734" y="2569464"/>
+            <a:ext cx="1581912" cy="201168"/>
           </a:xfrm>
           <a:prstGeom prst="rect">
             <a:avLst/>
@@ -23137,7 +23095,7 @@
                 <a:ea typeface="Calibri" pitchFamily="34" charset="-122"/>
                 <a:cs typeface="Calibri" pitchFamily="34" charset="-120"/>
               </a:rPr>
-              <a:t>across, through</a:t>
+              <a:t>across</a:t>
             </a:r>
             <a:endParaRPr lang="en-US" sz="850" dirty="0"/>
           </a:p>
@@ -23151,8 +23109,8 @@
         </p:nvSpPr>
         <p:spPr>
           <a:xfrm>
-            <a:off x="5803392" y="2258568"/>
-            <a:ext cx="1828800" cy="292608"/>
+            <a:off x="3659429" y="2258568"/>
+            <a:ext cx="1581912" cy="292608"/>
           </a:xfrm>
           <a:prstGeom prst="rect">
             <a:avLst>
@@ -23185,8 +23143,8 @@
         </p:nvSpPr>
         <p:spPr>
           <a:xfrm>
-            <a:off x="5803392" y="2258568"/>
-            <a:ext cx="1828800" cy="292608"/>
+            <a:off x="3659429" y="2258568"/>
+            <a:ext cx="1581912" cy="292608"/>
           </a:xfrm>
           <a:prstGeom prst="rect">
             <a:avLst/>
@@ -23224,8 +23182,8 @@
         </p:nvSpPr>
         <p:spPr>
           <a:xfrm>
-            <a:off x="5803392" y="2569464"/>
-            <a:ext cx="1828800" cy="201168"/>
+            <a:off x="3659429" y="2569464"/>
+            <a:ext cx="1581912" cy="201168"/>
           </a:xfrm>
           <a:prstGeom prst="rect">
             <a:avLst/>
@@ -23263,6 +23221,308 @@
         </p:nvSpPr>
         <p:spPr>
           <a:xfrm>
+            <a:off x="5329123" y="2258568"/>
+            <a:ext cx="1581912" cy="292608"/>
+          </a:xfrm>
+          <a:prstGeom prst="rect">
+            <a:avLst>
+              <a:gd name="adj" fmla="val 25000"/>
+            </a:avLst>
+          </a:prstGeom>
+          <a:solidFill>
+            <a:srgbClr val="FCE7F3"/>
+          </a:solidFill>
+          <a:ln w="19050">
+            <a:solidFill>
+              <a:srgbClr val="DB2777"/>
+            </a:solidFill>
+            <a:prstDash val="solid"/>
+          </a:ln>
+          <a:effectLst>
+            <a:outerShdw sx="100000" sy="100000" kx="0" ky="0" algn="bl" rotWithShape="0" blurRad="101600" dist="38100" dir="8100000">
+              <a:srgbClr val="000000">
+                <a:alpha val="12000"/>
+              </a:srgbClr>
+            </a:outerShdw>
+          </a:effectLst>
+        </p:spPr>
+      </p:sp>
+      <p:sp>
+        <p:nvSpPr>
+          <p:cNvPr id="23" name="Text 21"/>
+          <p:cNvSpPr/>
+          <p:nvPr/>
+        </p:nvSpPr>
+        <p:spPr>
+          <a:xfrm>
+            <a:off x="5329123" y="2258568"/>
+            <a:ext cx="1581912" cy="292608"/>
+          </a:xfrm>
+          <a:prstGeom prst="rect">
+            <a:avLst/>
+          </a:prstGeom>
+          <a:noFill/>
+          <a:ln/>
+        </p:spPr>
+        <p:txBody>
+          <a:bodyPr wrap="square" lIns="0" tIns="0" rIns="0" bIns="0" rtlCol="0" anchor="ctr"/>
+          <a:lstStyle/>
+          <a:p>
+            <a:pPr algn="ctr" indent="0" marL="0">
+              <a:buNone/>
+            </a:pPr>
+            <a:r>
+              <a:rPr lang="en-US" sz="1300" b="1" dirty="0">
+                <a:solidFill>
+                  <a:srgbClr val="9D174D"/>
+                </a:solidFill>
+                <a:latin typeface="Trebuchet MS" pitchFamily="34" charset="0"/>
+                <a:ea typeface="Trebuchet MS" pitchFamily="34" charset="-122"/>
+                <a:cs typeface="Trebuchet MS" pitchFamily="34" charset="-120"/>
+              </a:rPr>
+              <a:t>a</a:t>
+            </a:r>
+            <a:endParaRPr lang="en-US" sz="1300" dirty="0"/>
+          </a:p>
+        </p:txBody>
+      </p:sp>
+      <p:sp>
+        <p:nvSpPr>
+          <p:cNvPr id="24" name="Text 22"/>
+          <p:cNvSpPr/>
+          <p:nvPr/>
+        </p:nvSpPr>
+        <p:spPr>
+          <a:xfrm>
+            <a:off x="5329123" y="2569464"/>
+            <a:ext cx="1581912" cy="201168"/>
+          </a:xfrm>
+          <a:prstGeom prst="rect">
+            <a:avLst/>
+          </a:prstGeom>
+          <a:noFill/>
+          <a:ln/>
+        </p:spPr>
+        <p:txBody>
+          <a:bodyPr wrap="square" lIns="0" tIns="0" rIns="0" bIns="0" rtlCol="0" anchor="t"/>
+          <a:lstStyle/>
+          <a:p>
+            <a:pPr algn="ctr" indent="0" marL="0">
+              <a:buNone/>
+            </a:pPr>
+            <a:r>
+              <a:rPr lang="en-US" sz="850" dirty="0">
+                <a:solidFill>
+                  <a:srgbClr val="475569"/>
+                </a:solidFill>
+                <a:latin typeface="Calibri" pitchFamily="34" charset="0"/>
+                <a:ea typeface="Calibri" pitchFamily="34" charset="-122"/>
+                <a:cs typeface="Calibri" pitchFamily="34" charset="-120"/>
+              </a:rPr>
+              <a:t>connecting vowel</a:t>
+            </a:r>
+            <a:endParaRPr lang="en-US" sz="850" dirty="0"/>
+          </a:p>
+        </p:txBody>
+      </p:sp>
+      <p:sp>
+        <p:nvSpPr>
+          <p:cNvPr id="25" name="Text 23"/>
+          <p:cNvSpPr/>
+          <p:nvPr/>
+        </p:nvSpPr>
+        <p:spPr>
+          <a:xfrm>
+            <a:off x="5329123" y="2752344"/>
+            <a:ext cx="1581912" cy="182880"/>
+          </a:xfrm>
+          <a:prstGeom prst="rect">
+            <a:avLst/>
+          </a:prstGeom>
+          <a:noFill/>
+          <a:ln/>
+        </p:spPr>
+        <p:txBody>
+          <a:bodyPr wrap="square" lIns="0" tIns="0" rIns="0" bIns="0" rtlCol="0" anchor="t"/>
+          <a:lstStyle/>
+          <a:p>
+            <a:pPr algn="ctr" indent="0" marL="0">
+              <a:buNone/>
+            </a:pPr>
+            <a:r>
+              <a:rPr lang="en-US" sz="700" i="1" dirty="0">
+                <a:solidFill>
+                  <a:srgbClr val="94A3B8"/>
+                </a:solidFill>
+                <a:latin typeface="Calibri" pitchFamily="34" charset="0"/>
+                <a:ea typeface="Calibri" pitchFamily="34" charset="-122"/>
+                <a:cs typeface="Calibri" pitchFamily="34" charset="-120"/>
+              </a:rPr>
+              <a:t>links base to suffix</a:t>
+            </a:r>
+            <a:endParaRPr lang="en-US" sz="700" dirty="0"/>
+          </a:p>
+        </p:txBody>
+      </p:sp>
+      <p:sp>
+        <p:nvSpPr>
+          <p:cNvPr id="26" name="Shape 24"/>
+          <p:cNvSpPr/>
+          <p:nvPr/>
+        </p:nvSpPr>
+        <p:spPr>
+          <a:xfrm>
+            <a:off x="6998818" y="2258568"/>
+            <a:ext cx="1581912" cy="292608"/>
+          </a:xfrm>
+          <a:prstGeom prst="rect">
+            <a:avLst>
+              <a:gd name="adj" fmla="val 25000"/>
+            </a:avLst>
+          </a:prstGeom>
+          <a:solidFill>
+            <a:srgbClr val="FCE7F3"/>
+          </a:solidFill>
+          <a:ln w="19050">
+            <a:solidFill>
+              <a:srgbClr val="DB2777"/>
+            </a:solidFill>
+            <a:prstDash val="solid"/>
+          </a:ln>
+          <a:effectLst>
+            <a:outerShdw sx="100000" sy="100000" kx="0" ky="0" algn="bl" rotWithShape="0" blurRad="101600" dist="38100" dir="8100000">
+              <a:srgbClr val="000000">
+                <a:alpha val="12000"/>
+              </a:srgbClr>
+            </a:outerShdw>
+          </a:effectLst>
+        </p:spPr>
+      </p:sp>
+      <p:sp>
+        <p:nvSpPr>
+          <p:cNvPr id="27" name="Text 25"/>
+          <p:cNvSpPr/>
+          <p:nvPr/>
+        </p:nvSpPr>
+        <p:spPr>
+          <a:xfrm>
+            <a:off x="6998818" y="2258568"/>
+            <a:ext cx="1581912" cy="292608"/>
+          </a:xfrm>
+          <a:prstGeom prst="rect">
+            <a:avLst/>
+          </a:prstGeom>
+          <a:noFill/>
+          <a:ln/>
+        </p:spPr>
+        <p:txBody>
+          <a:bodyPr wrap="square" lIns="0" tIns="0" rIns="0" bIns="0" rtlCol="0" anchor="ctr"/>
+          <a:lstStyle/>
+          <a:p>
+            <a:pPr algn="ctr" indent="0" marL="0">
+              <a:buNone/>
+            </a:pPr>
+            <a:r>
+              <a:rPr lang="en-US" sz="1300" b="1" dirty="0">
+                <a:solidFill>
+                  <a:srgbClr val="9D174D"/>
+                </a:solidFill>
+                <a:latin typeface="Trebuchet MS" pitchFamily="34" charset="0"/>
+                <a:ea typeface="Trebuchet MS" pitchFamily="34" charset="-122"/>
+                <a:cs typeface="Trebuchet MS" pitchFamily="34" charset="-120"/>
+              </a:rPr>
+              <a:t>tion</a:t>
+            </a:r>
+            <a:endParaRPr lang="en-US" sz="1300" dirty="0"/>
+          </a:p>
+        </p:txBody>
+      </p:sp>
+      <p:sp>
+        <p:nvSpPr>
+          <p:cNvPr id="28" name="Text 26"/>
+          <p:cNvSpPr/>
+          <p:nvPr/>
+        </p:nvSpPr>
+        <p:spPr>
+          <a:xfrm>
+            <a:off x="6998818" y="2569464"/>
+            <a:ext cx="1581912" cy="201168"/>
+          </a:xfrm>
+          <a:prstGeom prst="rect">
+            <a:avLst/>
+          </a:prstGeom>
+          <a:noFill/>
+          <a:ln/>
+        </p:spPr>
+        <p:txBody>
+          <a:bodyPr wrap="square" lIns="0" tIns="0" rIns="0" bIns="0" rtlCol="0" anchor="t"/>
+          <a:lstStyle/>
+          <a:p>
+            <a:pPr algn="ctr" indent="0" marL="0">
+              <a:buNone/>
+            </a:pPr>
+            <a:r>
+              <a:rPr lang="en-US" sz="850" dirty="0">
+                <a:solidFill>
+                  <a:srgbClr val="475569"/>
+                </a:solidFill>
+                <a:latin typeface="Calibri" pitchFamily="34" charset="0"/>
+                <a:ea typeface="Calibri" pitchFamily="34" charset="-122"/>
+                <a:cs typeface="Calibri" pitchFamily="34" charset="-120"/>
+              </a:rPr>
+              <a:t>act or process of</a:t>
+            </a:r>
+            <a:endParaRPr lang="en-US" sz="850" dirty="0"/>
+          </a:p>
+        </p:txBody>
+      </p:sp>
+      <p:sp>
+        <p:nvSpPr>
+          <p:cNvPr id="29" name="Text 27"/>
+          <p:cNvSpPr/>
+          <p:nvPr/>
+        </p:nvSpPr>
+        <p:spPr>
+          <a:xfrm>
+            <a:off x="6998818" y="2752344"/>
+            <a:ext cx="1581912" cy="182880"/>
+          </a:xfrm>
+          <a:prstGeom prst="rect">
+            <a:avLst/>
+          </a:prstGeom>
+          <a:noFill/>
+          <a:ln/>
+        </p:spPr>
+        <p:txBody>
+          <a:bodyPr wrap="square" lIns="0" tIns="0" rIns="0" bIns="0" rtlCol="0" anchor="t"/>
+          <a:lstStyle/>
+          <a:p>
+            <a:pPr algn="ctr" indent="0" marL="0">
+              <a:buNone/>
+            </a:pPr>
+            <a:r>
+              <a:rPr lang="en-US" sz="700" i="1" dirty="0">
+                <a:solidFill>
+                  <a:srgbClr val="94A3B8"/>
+                </a:solidFill>
+                <a:latin typeface="Calibri" pitchFamily="34" charset="0"/>
+                <a:ea typeface="Calibri" pitchFamily="34" charset="-122"/>
+                <a:cs typeface="Calibri" pitchFamily="34" charset="-120"/>
+              </a:rPr>
+              <a:t>ti → /sh/ before on</a:t>
+            </a:r>
+            <a:endParaRPr lang="en-US" sz="700" dirty="0"/>
+          </a:p>
+        </p:txBody>
+      </p:sp>
+      <p:sp>
+        <p:nvSpPr>
+          <p:cNvPr id="30" name="Shape 28"/>
+          <p:cNvSpPr/>
+          <p:nvPr/>
+        </p:nvSpPr>
+        <p:spPr>
+          <a:xfrm>
             <a:off x="365760" y="3273552"/>
             <a:ext cx="1371600" cy="658368"/>
           </a:xfrm>
@@ -23284,7 +23544,7 @@
       </p:sp>
       <p:sp>
         <p:nvSpPr>
-          <p:cNvPr id="23" name="Text 21"/>
+          <p:cNvPr id="31" name="Text 29"/>
           <p:cNvSpPr/>
           <p:nvPr/>
         </p:nvSpPr>
@@ -23323,7 +23583,7 @@
       </p:sp>
       <p:sp>
         <p:nvSpPr>
-          <p:cNvPr id="24" name="Shape 22"/>
+          <p:cNvPr id="32" name="Shape 30"/>
           <p:cNvSpPr/>
           <p:nvPr/>
         </p:nvSpPr>
@@ -23350,7 +23610,7 @@
       </p:sp>
       <p:sp>
         <p:nvSpPr>
-          <p:cNvPr id="25" name="Text 23"/>
+          <p:cNvPr id="33" name="Text 31"/>
           <p:cNvSpPr/>
           <p:nvPr/>
         </p:nvSpPr>
@@ -23389,7 +23649,7 @@
       </p:sp>
       <p:sp>
         <p:nvSpPr>
-          <p:cNvPr id="26" name="Shape 24"/>
+          <p:cNvPr id="34" name="Shape 32"/>
           <p:cNvSpPr/>
           <p:nvPr/>
         </p:nvSpPr>
@@ -23416,7 +23676,7 @@
       </p:sp>
       <p:sp>
         <p:nvSpPr>
-          <p:cNvPr id="27" name="Text 25"/>
+          <p:cNvPr id="35" name="Text 33"/>
           <p:cNvSpPr/>
           <p:nvPr/>
         </p:nvSpPr>
@@ -23455,7 +23715,7 @@
       </p:sp>
       <p:sp>
         <p:nvSpPr>
-          <p:cNvPr id="28" name="Shape 26"/>
+          <p:cNvPr id="36" name="Shape 34"/>
           <p:cNvSpPr/>
           <p:nvPr/>
         </p:nvSpPr>
@@ -23482,7 +23742,7 @@
       </p:sp>
       <p:sp>
         <p:nvSpPr>
-          <p:cNvPr id="29" name="Text 27"/>
+          <p:cNvPr id="37" name="Text 35"/>
           <p:cNvSpPr/>
           <p:nvPr/>
         </p:nvSpPr>
@@ -23805,7 +24065,7 @@
                 <a:ea typeface="Calibri" pitchFamily="34" charset="-122"/>
                 <a:cs typeface="Calibri" pitchFamily="34" charset="-120"/>
               </a:rPr>
-              <a:t>Word Labs  •  wordlabs.app  •  Root: 'port' = carry, bring, transport</a:t>
+              <a:t>Word Labs  •  wordlabs.app  •  Root: 'port' = carry, bring, bear</a:t>
             </a:r>
             <a:endParaRPr lang="en-US" sz="800" dirty="0"/>
           </a:p>
@@ -23878,7 +24138,7 @@
                 <a:ea typeface="Trebuchet MS" pitchFamily="34" charset="-122"/>
                 <a:cs typeface="Trebuchet MS" pitchFamily="34" charset="-120"/>
               </a:rPr>
-              <a:t>We are learning that the root 'port' means 'carry, bring, transport'.</a:t>
+              <a:t>We are learning that the root 'port' means 'carry, bring, bear'.</a:t>
             </a:r>
             <a:endParaRPr lang="en-US" sz="2000" dirty="0"/>
           </a:p>
@@ -24524,7 +24784,7 @@
                 <a:ea typeface="Calibri" pitchFamily="34" charset="-122"/>
                 <a:cs typeface="Calibri" pitchFamily="34" charset="-120"/>
               </a:rPr>
-              <a:t>Word Labs  •  wordlabs.app  •  Root: 'port' = carry, bring, transport</a:t>
+              <a:t>Word Labs  •  wordlabs.app  •  Root: 'port' = carry, bring, bear</a:t>
             </a:r>
             <a:endParaRPr lang="en-US" sz="800" dirty="0"/>
           </a:p>
@@ -24663,7 +24923,7 @@
                 <a:ea typeface="Trebuchet MS" pitchFamily="34" charset="-122"/>
                 <a:cs typeface="Trebuchet MS" pitchFamily="34" charset="-120"/>
               </a:rPr>
-              <a:t>transport</a:t>
+              <a:t>transportation</a:t>
             </a:r>
             <a:endParaRPr lang="en-US" sz="2800" dirty="0"/>
           </a:p>
@@ -24743,8 +25003,8 @@
         </p:nvSpPr>
         <p:spPr>
           <a:xfrm>
-            <a:off x="2938272" y="2258568"/>
-            <a:ext cx="1828800" cy="292608"/>
+            <a:off x="1989734" y="2258568"/>
+            <a:ext cx="1581912" cy="292608"/>
           </a:xfrm>
           <a:prstGeom prst="rect">
             <a:avLst>
@@ -24777,8 +25037,8 @@
         </p:nvSpPr>
         <p:spPr>
           <a:xfrm>
-            <a:off x="2938272" y="2258568"/>
-            <a:ext cx="1828800" cy="292608"/>
+            <a:off x="1989734" y="2258568"/>
+            <a:ext cx="1581912" cy="292608"/>
           </a:xfrm>
           <a:prstGeom prst="rect">
             <a:avLst/>
@@ -24816,8 +25076,8 @@
         </p:nvSpPr>
         <p:spPr>
           <a:xfrm>
-            <a:off x="2938272" y="2569464"/>
-            <a:ext cx="1828800" cy="201168"/>
+            <a:off x="1989734" y="2569464"/>
+            <a:ext cx="1581912" cy="201168"/>
           </a:xfrm>
           <a:prstGeom prst="rect">
             <a:avLst/>
@@ -24841,7 +25101,7 @@
                 <a:ea typeface="Calibri" pitchFamily="34" charset="-122"/>
                 <a:cs typeface="Calibri" pitchFamily="34" charset="-120"/>
               </a:rPr>
-              <a:t>across, through</a:t>
+              <a:t>across</a:t>
             </a:r>
             <a:endParaRPr lang="en-US" sz="850" dirty="0"/>
           </a:p>
@@ -24855,8 +25115,8 @@
         </p:nvSpPr>
         <p:spPr>
           <a:xfrm>
-            <a:off x="5803392" y="2258568"/>
-            <a:ext cx="1828800" cy="292608"/>
+            <a:off x="3659429" y="2258568"/>
+            <a:ext cx="1581912" cy="292608"/>
           </a:xfrm>
           <a:prstGeom prst="rect">
             <a:avLst>
@@ -24889,8 +25149,8 @@
         </p:nvSpPr>
         <p:spPr>
           <a:xfrm>
-            <a:off x="5803392" y="2258568"/>
-            <a:ext cx="1828800" cy="292608"/>
+            <a:off x="3659429" y="2258568"/>
+            <a:ext cx="1581912" cy="292608"/>
           </a:xfrm>
           <a:prstGeom prst="rect">
             <a:avLst/>
@@ -24928,8 +25188,8 @@
         </p:nvSpPr>
         <p:spPr>
           <a:xfrm>
-            <a:off x="5803392" y="2569464"/>
-            <a:ext cx="1828800" cy="201168"/>
+            <a:off x="3659429" y="2569464"/>
+            <a:ext cx="1581912" cy="201168"/>
           </a:xfrm>
           <a:prstGeom prst="rect">
             <a:avLst/>
@@ -24967,6 +25227,308 @@
         </p:nvSpPr>
         <p:spPr>
           <a:xfrm>
+            <a:off x="5329123" y="2258568"/>
+            <a:ext cx="1581912" cy="292608"/>
+          </a:xfrm>
+          <a:prstGeom prst="rect">
+            <a:avLst>
+              <a:gd name="adj" fmla="val 25000"/>
+            </a:avLst>
+          </a:prstGeom>
+          <a:solidFill>
+            <a:srgbClr val="FCE7F3"/>
+          </a:solidFill>
+          <a:ln w="19050">
+            <a:solidFill>
+              <a:srgbClr val="DB2777"/>
+            </a:solidFill>
+            <a:prstDash val="solid"/>
+          </a:ln>
+          <a:effectLst>
+            <a:outerShdw sx="100000" sy="100000" kx="0" ky="0" algn="bl" rotWithShape="0" blurRad="101600" dist="38100" dir="8100000">
+              <a:srgbClr val="000000">
+                <a:alpha val="12000"/>
+              </a:srgbClr>
+            </a:outerShdw>
+          </a:effectLst>
+        </p:spPr>
+      </p:sp>
+      <p:sp>
+        <p:nvSpPr>
+          <p:cNvPr id="23" name="Text 21"/>
+          <p:cNvSpPr/>
+          <p:nvPr/>
+        </p:nvSpPr>
+        <p:spPr>
+          <a:xfrm>
+            <a:off x="5329123" y="2258568"/>
+            <a:ext cx="1581912" cy="292608"/>
+          </a:xfrm>
+          <a:prstGeom prst="rect">
+            <a:avLst/>
+          </a:prstGeom>
+          <a:noFill/>
+          <a:ln/>
+        </p:spPr>
+        <p:txBody>
+          <a:bodyPr wrap="square" lIns="0" tIns="0" rIns="0" bIns="0" rtlCol="0" anchor="ctr"/>
+          <a:lstStyle/>
+          <a:p>
+            <a:pPr algn="ctr" indent="0" marL="0">
+              <a:buNone/>
+            </a:pPr>
+            <a:r>
+              <a:rPr lang="en-US" sz="1300" b="1" dirty="0">
+                <a:solidFill>
+                  <a:srgbClr val="9D174D"/>
+                </a:solidFill>
+                <a:latin typeface="Trebuchet MS" pitchFamily="34" charset="0"/>
+                <a:ea typeface="Trebuchet MS" pitchFamily="34" charset="-122"/>
+                <a:cs typeface="Trebuchet MS" pitchFamily="34" charset="-120"/>
+              </a:rPr>
+              <a:t>a</a:t>
+            </a:r>
+            <a:endParaRPr lang="en-US" sz="1300" dirty="0"/>
+          </a:p>
+        </p:txBody>
+      </p:sp>
+      <p:sp>
+        <p:nvSpPr>
+          <p:cNvPr id="24" name="Text 22"/>
+          <p:cNvSpPr/>
+          <p:nvPr/>
+        </p:nvSpPr>
+        <p:spPr>
+          <a:xfrm>
+            <a:off x="5329123" y="2569464"/>
+            <a:ext cx="1581912" cy="201168"/>
+          </a:xfrm>
+          <a:prstGeom prst="rect">
+            <a:avLst/>
+          </a:prstGeom>
+          <a:noFill/>
+          <a:ln/>
+        </p:spPr>
+        <p:txBody>
+          <a:bodyPr wrap="square" lIns="0" tIns="0" rIns="0" bIns="0" rtlCol="0" anchor="t"/>
+          <a:lstStyle/>
+          <a:p>
+            <a:pPr algn="ctr" indent="0" marL="0">
+              <a:buNone/>
+            </a:pPr>
+            <a:r>
+              <a:rPr lang="en-US" sz="850" dirty="0">
+                <a:solidFill>
+                  <a:srgbClr val="475569"/>
+                </a:solidFill>
+                <a:latin typeface="Calibri" pitchFamily="34" charset="0"/>
+                <a:ea typeface="Calibri" pitchFamily="34" charset="-122"/>
+                <a:cs typeface="Calibri" pitchFamily="34" charset="-120"/>
+              </a:rPr>
+              <a:t>connecting vowel</a:t>
+            </a:r>
+            <a:endParaRPr lang="en-US" sz="850" dirty="0"/>
+          </a:p>
+        </p:txBody>
+      </p:sp>
+      <p:sp>
+        <p:nvSpPr>
+          <p:cNvPr id="25" name="Text 23"/>
+          <p:cNvSpPr/>
+          <p:nvPr/>
+        </p:nvSpPr>
+        <p:spPr>
+          <a:xfrm>
+            <a:off x="5329123" y="2752344"/>
+            <a:ext cx="1581912" cy="182880"/>
+          </a:xfrm>
+          <a:prstGeom prst="rect">
+            <a:avLst/>
+          </a:prstGeom>
+          <a:noFill/>
+          <a:ln/>
+        </p:spPr>
+        <p:txBody>
+          <a:bodyPr wrap="square" lIns="0" tIns="0" rIns="0" bIns="0" rtlCol="0" anchor="t"/>
+          <a:lstStyle/>
+          <a:p>
+            <a:pPr algn="ctr" indent="0" marL="0">
+              <a:buNone/>
+            </a:pPr>
+            <a:r>
+              <a:rPr lang="en-US" sz="700" i="1" dirty="0">
+                <a:solidFill>
+                  <a:srgbClr val="94A3B8"/>
+                </a:solidFill>
+                <a:latin typeface="Calibri" pitchFamily="34" charset="0"/>
+                <a:ea typeface="Calibri" pitchFamily="34" charset="-122"/>
+                <a:cs typeface="Calibri" pitchFamily="34" charset="-120"/>
+              </a:rPr>
+              <a:t>links base to suffix</a:t>
+            </a:r>
+            <a:endParaRPr lang="en-US" sz="700" dirty="0"/>
+          </a:p>
+        </p:txBody>
+      </p:sp>
+      <p:sp>
+        <p:nvSpPr>
+          <p:cNvPr id="26" name="Shape 24"/>
+          <p:cNvSpPr/>
+          <p:nvPr/>
+        </p:nvSpPr>
+        <p:spPr>
+          <a:xfrm>
+            <a:off x="6998818" y="2258568"/>
+            <a:ext cx="1581912" cy="292608"/>
+          </a:xfrm>
+          <a:prstGeom prst="rect">
+            <a:avLst>
+              <a:gd name="adj" fmla="val 25000"/>
+            </a:avLst>
+          </a:prstGeom>
+          <a:solidFill>
+            <a:srgbClr val="FCE7F3"/>
+          </a:solidFill>
+          <a:ln w="19050">
+            <a:solidFill>
+              <a:srgbClr val="DB2777"/>
+            </a:solidFill>
+            <a:prstDash val="solid"/>
+          </a:ln>
+          <a:effectLst>
+            <a:outerShdw sx="100000" sy="100000" kx="0" ky="0" algn="bl" rotWithShape="0" blurRad="101600" dist="38100" dir="8100000">
+              <a:srgbClr val="000000">
+                <a:alpha val="12000"/>
+              </a:srgbClr>
+            </a:outerShdw>
+          </a:effectLst>
+        </p:spPr>
+      </p:sp>
+      <p:sp>
+        <p:nvSpPr>
+          <p:cNvPr id="27" name="Text 25"/>
+          <p:cNvSpPr/>
+          <p:nvPr/>
+        </p:nvSpPr>
+        <p:spPr>
+          <a:xfrm>
+            <a:off x="6998818" y="2258568"/>
+            <a:ext cx="1581912" cy="292608"/>
+          </a:xfrm>
+          <a:prstGeom prst="rect">
+            <a:avLst/>
+          </a:prstGeom>
+          <a:noFill/>
+          <a:ln/>
+        </p:spPr>
+        <p:txBody>
+          <a:bodyPr wrap="square" lIns="0" tIns="0" rIns="0" bIns="0" rtlCol="0" anchor="ctr"/>
+          <a:lstStyle/>
+          <a:p>
+            <a:pPr algn="ctr" indent="0" marL="0">
+              <a:buNone/>
+            </a:pPr>
+            <a:r>
+              <a:rPr lang="en-US" sz="1300" b="1" dirty="0">
+                <a:solidFill>
+                  <a:srgbClr val="9D174D"/>
+                </a:solidFill>
+                <a:latin typeface="Trebuchet MS" pitchFamily="34" charset="0"/>
+                <a:ea typeface="Trebuchet MS" pitchFamily="34" charset="-122"/>
+                <a:cs typeface="Trebuchet MS" pitchFamily="34" charset="-120"/>
+              </a:rPr>
+              <a:t>tion</a:t>
+            </a:r>
+            <a:endParaRPr lang="en-US" sz="1300" dirty="0"/>
+          </a:p>
+        </p:txBody>
+      </p:sp>
+      <p:sp>
+        <p:nvSpPr>
+          <p:cNvPr id="28" name="Text 26"/>
+          <p:cNvSpPr/>
+          <p:nvPr/>
+        </p:nvSpPr>
+        <p:spPr>
+          <a:xfrm>
+            <a:off x="6998818" y="2569464"/>
+            <a:ext cx="1581912" cy="201168"/>
+          </a:xfrm>
+          <a:prstGeom prst="rect">
+            <a:avLst/>
+          </a:prstGeom>
+          <a:noFill/>
+          <a:ln/>
+        </p:spPr>
+        <p:txBody>
+          <a:bodyPr wrap="square" lIns="0" tIns="0" rIns="0" bIns="0" rtlCol="0" anchor="t"/>
+          <a:lstStyle/>
+          <a:p>
+            <a:pPr algn="ctr" indent="0" marL="0">
+              <a:buNone/>
+            </a:pPr>
+            <a:r>
+              <a:rPr lang="en-US" sz="850" dirty="0">
+                <a:solidFill>
+                  <a:srgbClr val="475569"/>
+                </a:solidFill>
+                <a:latin typeface="Calibri" pitchFamily="34" charset="0"/>
+                <a:ea typeface="Calibri" pitchFamily="34" charset="-122"/>
+                <a:cs typeface="Calibri" pitchFamily="34" charset="-120"/>
+              </a:rPr>
+              <a:t>act or process of</a:t>
+            </a:r>
+            <a:endParaRPr lang="en-US" sz="850" dirty="0"/>
+          </a:p>
+        </p:txBody>
+      </p:sp>
+      <p:sp>
+        <p:nvSpPr>
+          <p:cNvPr id="29" name="Text 27"/>
+          <p:cNvSpPr/>
+          <p:nvPr/>
+        </p:nvSpPr>
+        <p:spPr>
+          <a:xfrm>
+            <a:off x="6998818" y="2752344"/>
+            <a:ext cx="1581912" cy="182880"/>
+          </a:xfrm>
+          <a:prstGeom prst="rect">
+            <a:avLst/>
+          </a:prstGeom>
+          <a:noFill/>
+          <a:ln/>
+        </p:spPr>
+        <p:txBody>
+          <a:bodyPr wrap="square" lIns="0" tIns="0" rIns="0" bIns="0" rtlCol="0" anchor="t"/>
+          <a:lstStyle/>
+          <a:p>
+            <a:pPr algn="ctr" indent="0" marL="0">
+              <a:buNone/>
+            </a:pPr>
+            <a:r>
+              <a:rPr lang="en-US" sz="700" i="1" dirty="0">
+                <a:solidFill>
+                  <a:srgbClr val="94A3B8"/>
+                </a:solidFill>
+                <a:latin typeface="Calibri" pitchFamily="34" charset="0"/>
+                <a:ea typeface="Calibri" pitchFamily="34" charset="-122"/>
+                <a:cs typeface="Calibri" pitchFamily="34" charset="-120"/>
+              </a:rPr>
+              <a:t>ti → /sh/ before on</a:t>
+            </a:r>
+            <a:endParaRPr lang="en-US" sz="700" dirty="0"/>
+          </a:p>
+        </p:txBody>
+      </p:sp>
+      <p:sp>
+        <p:nvSpPr>
+          <p:cNvPr id="30" name="Shape 28"/>
+          <p:cNvSpPr/>
+          <p:nvPr/>
+        </p:nvSpPr>
+        <p:spPr>
+          <a:xfrm>
             <a:off x="365760" y="3273552"/>
             <a:ext cx="1371600" cy="658368"/>
           </a:xfrm>
@@ -24988,7 +25550,7 @@
       </p:sp>
       <p:sp>
         <p:nvSpPr>
-          <p:cNvPr id="23" name="Text 21"/>
+          <p:cNvPr id="31" name="Text 29"/>
           <p:cNvSpPr/>
           <p:nvPr/>
         </p:nvSpPr>
@@ -25027,7 +25589,7 @@
       </p:sp>
       <p:sp>
         <p:nvSpPr>
-          <p:cNvPr id="24" name="Shape 22"/>
+          <p:cNvPr id="32" name="Shape 30"/>
           <p:cNvSpPr/>
           <p:nvPr/>
         </p:nvSpPr>
@@ -25054,14 +25616,14 @@
       </p:sp>
       <p:sp>
         <p:nvSpPr>
-          <p:cNvPr id="25" name="Shape 23"/>
-          <p:cNvSpPr/>
-          <p:nvPr/>
-        </p:nvSpPr>
-        <p:spPr>
-          <a:xfrm>
-            <a:off x="2999232" y="3364992"/>
-            <a:ext cx="1645920" cy="475488"/>
+          <p:cNvPr id="33" name="Shape 31"/>
+          <p:cNvSpPr/>
+          <p:nvPr/>
+        </p:nvSpPr>
+        <p:spPr>
+          <a:xfrm>
+            <a:off x="1975104" y="3364992"/>
+            <a:ext cx="1554480" cy="475488"/>
           </a:xfrm>
           <a:prstGeom prst="rect">
             <a:avLst>
@@ -25081,14 +25643,14 @@
       </p:sp>
       <p:sp>
         <p:nvSpPr>
-          <p:cNvPr id="26" name="Text 24"/>
-          <p:cNvSpPr/>
-          <p:nvPr/>
-        </p:nvSpPr>
-        <p:spPr>
-          <a:xfrm>
-            <a:off x="2999232" y="3364992"/>
-            <a:ext cx="1645920" cy="475488"/>
+          <p:cNvPr id="34" name="Text 32"/>
+          <p:cNvSpPr/>
+          <p:nvPr/>
+        </p:nvSpPr>
+        <p:spPr>
+          <a:xfrm>
+            <a:off x="1975104" y="3364992"/>
+            <a:ext cx="1554480" cy="475488"/>
           </a:xfrm>
           <a:prstGeom prst="rect">
             <a:avLst/>
@@ -25120,14 +25682,14 @@
       </p:sp>
       <p:sp>
         <p:nvSpPr>
-          <p:cNvPr id="27" name="Text 25"/>
-          <p:cNvSpPr/>
-          <p:nvPr/>
-        </p:nvSpPr>
-        <p:spPr>
-          <a:xfrm>
-            <a:off x="4645152" y="3364992"/>
-            <a:ext cx="1097280" cy="475488"/>
+          <p:cNvPr id="35" name="Text 33"/>
+          <p:cNvSpPr/>
+          <p:nvPr/>
+        </p:nvSpPr>
+        <p:spPr>
+          <a:xfrm>
+            <a:off x="3529584" y="3364992"/>
+            <a:ext cx="73152" cy="475488"/>
           </a:xfrm>
           <a:prstGeom prst="rect">
             <a:avLst/>
@@ -25159,14 +25721,14 @@
       </p:sp>
       <p:sp>
         <p:nvSpPr>
-          <p:cNvPr id="28" name="Shape 26"/>
-          <p:cNvSpPr/>
-          <p:nvPr/>
-        </p:nvSpPr>
-        <p:spPr>
-          <a:xfrm>
-            <a:off x="5742432" y="3364992"/>
-            <a:ext cx="1645920" cy="475488"/>
+          <p:cNvPr id="36" name="Shape 34"/>
+          <p:cNvSpPr/>
+          <p:nvPr/>
+        </p:nvSpPr>
+        <p:spPr>
+          <a:xfrm>
+            <a:off x="3602736" y="3364992"/>
+            <a:ext cx="1554480" cy="475488"/>
           </a:xfrm>
           <a:prstGeom prst="rect">
             <a:avLst>
@@ -25186,14 +25748,14 @@
       </p:sp>
       <p:sp>
         <p:nvSpPr>
-          <p:cNvPr id="29" name="Text 27"/>
-          <p:cNvSpPr/>
-          <p:nvPr/>
-        </p:nvSpPr>
-        <p:spPr>
-          <a:xfrm>
-            <a:off x="5742432" y="3364992"/>
-            <a:ext cx="1645920" cy="475488"/>
+          <p:cNvPr id="37" name="Text 35"/>
+          <p:cNvSpPr/>
+          <p:nvPr/>
+        </p:nvSpPr>
+        <p:spPr>
+          <a:xfrm>
+            <a:off x="3602736" y="3364992"/>
+            <a:ext cx="1554480" cy="475488"/>
           </a:xfrm>
           <a:prstGeom prst="rect">
             <a:avLst/>
@@ -25217,7 +25779,7 @@
                 <a:ea typeface="Trebuchet MS" pitchFamily="34" charset="-122"/>
                 <a:cs typeface="Trebuchet MS" pitchFamily="34" charset="-120"/>
               </a:rPr>
-              <a:t>port</a:t>
+              <a:t>por</a:t>
             </a:r>
             <a:endParaRPr lang="en-US" sz="1400" dirty="0"/>
           </a:p>
@@ -25225,7 +25787,217 @@
       </p:sp>
       <p:sp>
         <p:nvSpPr>
-          <p:cNvPr id="30" name="Shape 28"/>
+          <p:cNvPr id="38" name="Text 36"/>
+          <p:cNvSpPr/>
+          <p:nvPr/>
+        </p:nvSpPr>
+        <p:spPr>
+          <a:xfrm>
+            <a:off x="5157216" y="3364992"/>
+            <a:ext cx="73152" cy="475488"/>
+          </a:xfrm>
+          <a:prstGeom prst="rect">
+            <a:avLst/>
+          </a:prstGeom>
+          <a:noFill/>
+          <a:ln/>
+        </p:spPr>
+        <p:txBody>
+          <a:bodyPr wrap="square" lIns="0" tIns="0" rIns="0" bIns="0" rtlCol="0" anchor="ctr"/>
+          <a:lstStyle/>
+          <a:p>
+            <a:pPr algn="ctr" indent="0" marL="0">
+              <a:buNone/>
+            </a:pPr>
+            <a:r>
+              <a:rPr lang="en-US" sz="1600" b="1" dirty="0">
+                <a:solidFill>
+                  <a:srgbClr val="0D9488"/>
+                </a:solidFill>
+                <a:latin typeface="Trebuchet MS" pitchFamily="34" charset="0"/>
+                <a:ea typeface="Trebuchet MS" pitchFamily="34" charset="-122"/>
+                <a:cs typeface="Trebuchet MS" pitchFamily="34" charset="-120"/>
+              </a:rPr>
+              <a:t>·</a:t>
+            </a:r>
+            <a:endParaRPr lang="en-US" sz="1600" dirty="0"/>
+          </a:p>
+        </p:txBody>
+      </p:sp>
+      <p:sp>
+        <p:nvSpPr>
+          <p:cNvPr id="39" name="Shape 37"/>
+          <p:cNvSpPr/>
+          <p:nvPr/>
+        </p:nvSpPr>
+        <p:spPr>
+          <a:xfrm>
+            <a:off x="5230368" y="3364992"/>
+            <a:ext cx="1554480" cy="475488"/>
+          </a:xfrm>
+          <a:prstGeom prst="rect">
+            <a:avLst>
+              <a:gd name="adj" fmla="val 9615"/>
+            </a:avLst>
+          </a:prstGeom>
+          <a:solidFill>
+            <a:srgbClr val="FFFFFF"/>
+          </a:solidFill>
+          <a:ln w="12700">
+            <a:solidFill>
+              <a:srgbClr val="0D9488"/>
+            </a:solidFill>
+            <a:prstDash val="solid"/>
+          </a:ln>
+        </p:spPr>
+      </p:sp>
+      <p:sp>
+        <p:nvSpPr>
+          <p:cNvPr id="40" name="Text 38"/>
+          <p:cNvSpPr/>
+          <p:nvPr/>
+        </p:nvSpPr>
+        <p:spPr>
+          <a:xfrm>
+            <a:off x="5230368" y="3364992"/>
+            <a:ext cx="1554480" cy="475488"/>
+          </a:xfrm>
+          <a:prstGeom prst="rect">
+            <a:avLst/>
+          </a:prstGeom>
+          <a:noFill/>
+          <a:ln/>
+        </p:spPr>
+        <p:txBody>
+          <a:bodyPr wrap="square" lIns="0" tIns="0" rIns="0" bIns="0" rtlCol="0" anchor="ctr"/>
+          <a:lstStyle/>
+          <a:p>
+            <a:pPr algn="ctr" indent="0" marL="0">
+              <a:buNone/>
+            </a:pPr>
+            <a:r>
+              <a:rPr lang="en-US" sz="1400" b="1" dirty="0">
+                <a:solidFill>
+                  <a:srgbClr val="0D9488"/>
+                </a:solidFill>
+                <a:latin typeface="Trebuchet MS" pitchFamily="34" charset="0"/>
+                <a:ea typeface="Trebuchet MS" pitchFamily="34" charset="-122"/>
+                <a:cs typeface="Trebuchet MS" pitchFamily="34" charset="-120"/>
+              </a:rPr>
+              <a:t>ta</a:t>
+            </a:r>
+            <a:endParaRPr lang="en-US" sz="1400" dirty="0"/>
+          </a:p>
+        </p:txBody>
+      </p:sp>
+      <p:sp>
+        <p:nvSpPr>
+          <p:cNvPr id="41" name="Text 39"/>
+          <p:cNvSpPr/>
+          <p:nvPr/>
+        </p:nvSpPr>
+        <p:spPr>
+          <a:xfrm>
+            <a:off x="6784848" y="3364992"/>
+            <a:ext cx="73152" cy="475488"/>
+          </a:xfrm>
+          <a:prstGeom prst="rect">
+            <a:avLst/>
+          </a:prstGeom>
+          <a:noFill/>
+          <a:ln/>
+        </p:spPr>
+        <p:txBody>
+          <a:bodyPr wrap="square" lIns="0" tIns="0" rIns="0" bIns="0" rtlCol="0" anchor="ctr"/>
+          <a:lstStyle/>
+          <a:p>
+            <a:pPr algn="ctr" indent="0" marL="0">
+              <a:buNone/>
+            </a:pPr>
+            <a:r>
+              <a:rPr lang="en-US" sz="1600" b="1" dirty="0">
+                <a:solidFill>
+                  <a:srgbClr val="0D9488"/>
+                </a:solidFill>
+                <a:latin typeface="Trebuchet MS" pitchFamily="34" charset="0"/>
+                <a:ea typeface="Trebuchet MS" pitchFamily="34" charset="-122"/>
+                <a:cs typeface="Trebuchet MS" pitchFamily="34" charset="-120"/>
+              </a:rPr>
+              <a:t>·</a:t>
+            </a:r>
+            <a:endParaRPr lang="en-US" sz="1600" dirty="0"/>
+          </a:p>
+        </p:txBody>
+      </p:sp>
+      <p:sp>
+        <p:nvSpPr>
+          <p:cNvPr id="42" name="Shape 40"/>
+          <p:cNvSpPr/>
+          <p:nvPr/>
+        </p:nvSpPr>
+        <p:spPr>
+          <a:xfrm>
+            <a:off x="6858000" y="3364992"/>
+            <a:ext cx="1554480" cy="475488"/>
+          </a:xfrm>
+          <a:prstGeom prst="rect">
+            <a:avLst>
+              <a:gd name="adj" fmla="val 9615"/>
+            </a:avLst>
+          </a:prstGeom>
+          <a:solidFill>
+            <a:srgbClr val="FFFFFF"/>
+          </a:solidFill>
+          <a:ln w="12700">
+            <a:solidFill>
+              <a:srgbClr val="0D9488"/>
+            </a:solidFill>
+            <a:prstDash val="solid"/>
+          </a:ln>
+        </p:spPr>
+      </p:sp>
+      <p:sp>
+        <p:nvSpPr>
+          <p:cNvPr id="43" name="Text 41"/>
+          <p:cNvSpPr/>
+          <p:nvPr/>
+        </p:nvSpPr>
+        <p:spPr>
+          <a:xfrm>
+            <a:off x="6858000" y="3364992"/>
+            <a:ext cx="1554480" cy="475488"/>
+          </a:xfrm>
+          <a:prstGeom prst="rect">
+            <a:avLst/>
+          </a:prstGeom>
+          <a:noFill/>
+          <a:ln/>
+        </p:spPr>
+        <p:txBody>
+          <a:bodyPr wrap="square" lIns="0" tIns="0" rIns="0" bIns="0" rtlCol="0" anchor="ctr"/>
+          <a:lstStyle/>
+          <a:p>
+            <a:pPr algn="ctr" indent="0" marL="0">
+              <a:buNone/>
+            </a:pPr>
+            <a:r>
+              <a:rPr lang="en-US" sz="1400" b="1" dirty="0">
+                <a:solidFill>
+                  <a:srgbClr val="0D9488"/>
+                </a:solidFill>
+                <a:latin typeface="Trebuchet MS" pitchFamily="34" charset="0"/>
+                <a:ea typeface="Trebuchet MS" pitchFamily="34" charset="-122"/>
+                <a:cs typeface="Trebuchet MS" pitchFamily="34" charset="-120"/>
+              </a:rPr>
+              <a:t>tion</a:t>
+            </a:r>
+            <a:endParaRPr lang="en-US" sz="1400" dirty="0"/>
+          </a:p>
+        </p:txBody>
+      </p:sp>
+      <p:sp>
+        <p:nvSpPr>
+          <p:cNvPr id="44" name="Shape 42"/>
           <p:cNvSpPr/>
           <p:nvPr/>
         </p:nvSpPr>
@@ -25252,7 +26024,7 @@
       </p:sp>
       <p:sp>
         <p:nvSpPr>
-          <p:cNvPr id="31" name="Text 29"/>
+          <p:cNvPr id="45" name="Text 43"/>
           <p:cNvSpPr/>
           <p:nvPr/>
         </p:nvSpPr>
@@ -25291,7 +26063,7 @@
       </p:sp>
       <p:sp>
         <p:nvSpPr>
-          <p:cNvPr id="32" name="Shape 30"/>
+          <p:cNvPr id="46" name="Shape 44"/>
           <p:cNvSpPr/>
           <p:nvPr/>
         </p:nvSpPr>
@@ -25318,7 +26090,7 @@
       </p:sp>
       <p:sp>
         <p:nvSpPr>
-          <p:cNvPr id="33" name="Text 31"/>
+          <p:cNvPr id="47" name="Text 45"/>
           <p:cNvSpPr/>
           <p:nvPr/>
         </p:nvSpPr>
@@ -25641,7 +26413,7 @@
                 <a:ea typeface="Calibri" pitchFamily="34" charset="-122"/>
                 <a:cs typeface="Calibri" pitchFamily="34" charset="-120"/>
               </a:rPr>
-              <a:t>Word Labs  •  wordlabs.app  •  Root: 'port' = carry, bring, transport</a:t>
+              <a:t>Word Labs  •  wordlabs.app  •  Root: 'port' = carry, bring, bear</a:t>
             </a:r>
             <a:endParaRPr lang="en-US" sz="800" dirty="0"/>
           </a:p>
@@ -25780,7 +26552,7 @@
                 <a:ea typeface="Trebuchet MS" pitchFamily="34" charset="-122"/>
                 <a:cs typeface="Trebuchet MS" pitchFamily="34" charset="-120"/>
               </a:rPr>
-              <a:t>transport</a:t>
+              <a:t>transportation</a:t>
             </a:r>
             <a:endParaRPr lang="en-US" sz="2800" dirty="0"/>
           </a:p>
@@ -25860,8 +26632,8 @@
         </p:nvSpPr>
         <p:spPr>
           <a:xfrm>
-            <a:off x="2938272" y="2258568"/>
-            <a:ext cx="1828800" cy="292608"/>
+            <a:off x="1989734" y="2258568"/>
+            <a:ext cx="1581912" cy="292608"/>
           </a:xfrm>
           <a:prstGeom prst="rect">
             <a:avLst>
@@ -25894,8 +26666,8 @@
         </p:nvSpPr>
         <p:spPr>
           <a:xfrm>
-            <a:off x="2938272" y="2258568"/>
-            <a:ext cx="1828800" cy="292608"/>
+            <a:off x="1989734" y="2258568"/>
+            <a:ext cx="1581912" cy="292608"/>
           </a:xfrm>
           <a:prstGeom prst="rect">
             <a:avLst/>
@@ -25933,8 +26705,8 @@
         </p:nvSpPr>
         <p:spPr>
           <a:xfrm>
-            <a:off x="2938272" y="2569464"/>
-            <a:ext cx="1828800" cy="201168"/>
+            <a:off x="1989734" y="2569464"/>
+            <a:ext cx="1581912" cy="201168"/>
           </a:xfrm>
           <a:prstGeom prst="rect">
             <a:avLst/>
@@ -25958,7 +26730,7 @@
                 <a:ea typeface="Calibri" pitchFamily="34" charset="-122"/>
                 <a:cs typeface="Calibri" pitchFamily="34" charset="-120"/>
               </a:rPr>
-              <a:t>across, through</a:t>
+              <a:t>across</a:t>
             </a:r>
             <a:endParaRPr lang="en-US" sz="850" dirty="0"/>
           </a:p>
@@ -25972,8 +26744,8 @@
         </p:nvSpPr>
         <p:spPr>
           <a:xfrm>
-            <a:off x="5803392" y="2258568"/>
-            <a:ext cx="1828800" cy="292608"/>
+            <a:off x="3659429" y="2258568"/>
+            <a:ext cx="1581912" cy="292608"/>
           </a:xfrm>
           <a:prstGeom prst="rect">
             <a:avLst>
@@ -26006,8 +26778,8 @@
         </p:nvSpPr>
         <p:spPr>
           <a:xfrm>
-            <a:off x="5803392" y="2258568"/>
-            <a:ext cx="1828800" cy="292608"/>
+            <a:off x="3659429" y="2258568"/>
+            <a:ext cx="1581912" cy="292608"/>
           </a:xfrm>
           <a:prstGeom prst="rect">
             <a:avLst/>
@@ -26045,8 +26817,8 @@
         </p:nvSpPr>
         <p:spPr>
           <a:xfrm>
-            <a:off x="5803392" y="2569464"/>
-            <a:ext cx="1828800" cy="201168"/>
+            <a:off x="3659429" y="2569464"/>
+            <a:ext cx="1581912" cy="201168"/>
           </a:xfrm>
           <a:prstGeom prst="rect">
             <a:avLst/>
@@ -26084,6 +26856,308 @@
         </p:nvSpPr>
         <p:spPr>
           <a:xfrm>
+            <a:off x="5329123" y="2258568"/>
+            <a:ext cx="1581912" cy="292608"/>
+          </a:xfrm>
+          <a:prstGeom prst="rect">
+            <a:avLst>
+              <a:gd name="adj" fmla="val 25000"/>
+            </a:avLst>
+          </a:prstGeom>
+          <a:solidFill>
+            <a:srgbClr val="FCE7F3"/>
+          </a:solidFill>
+          <a:ln w="19050">
+            <a:solidFill>
+              <a:srgbClr val="DB2777"/>
+            </a:solidFill>
+            <a:prstDash val="solid"/>
+          </a:ln>
+          <a:effectLst>
+            <a:outerShdw sx="100000" sy="100000" kx="0" ky="0" algn="bl" rotWithShape="0" blurRad="101600" dist="38100" dir="8100000">
+              <a:srgbClr val="000000">
+                <a:alpha val="12000"/>
+              </a:srgbClr>
+            </a:outerShdw>
+          </a:effectLst>
+        </p:spPr>
+      </p:sp>
+      <p:sp>
+        <p:nvSpPr>
+          <p:cNvPr id="23" name="Text 21"/>
+          <p:cNvSpPr/>
+          <p:nvPr/>
+        </p:nvSpPr>
+        <p:spPr>
+          <a:xfrm>
+            <a:off x="5329123" y="2258568"/>
+            <a:ext cx="1581912" cy="292608"/>
+          </a:xfrm>
+          <a:prstGeom prst="rect">
+            <a:avLst/>
+          </a:prstGeom>
+          <a:noFill/>
+          <a:ln/>
+        </p:spPr>
+        <p:txBody>
+          <a:bodyPr wrap="square" lIns="0" tIns="0" rIns="0" bIns="0" rtlCol="0" anchor="ctr"/>
+          <a:lstStyle/>
+          <a:p>
+            <a:pPr algn="ctr" indent="0" marL="0">
+              <a:buNone/>
+            </a:pPr>
+            <a:r>
+              <a:rPr lang="en-US" sz="1300" b="1" dirty="0">
+                <a:solidFill>
+                  <a:srgbClr val="9D174D"/>
+                </a:solidFill>
+                <a:latin typeface="Trebuchet MS" pitchFamily="34" charset="0"/>
+                <a:ea typeface="Trebuchet MS" pitchFamily="34" charset="-122"/>
+                <a:cs typeface="Trebuchet MS" pitchFamily="34" charset="-120"/>
+              </a:rPr>
+              <a:t>a</a:t>
+            </a:r>
+            <a:endParaRPr lang="en-US" sz="1300" dirty="0"/>
+          </a:p>
+        </p:txBody>
+      </p:sp>
+      <p:sp>
+        <p:nvSpPr>
+          <p:cNvPr id="24" name="Text 22"/>
+          <p:cNvSpPr/>
+          <p:nvPr/>
+        </p:nvSpPr>
+        <p:spPr>
+          <a:xfrm>
+            <a:off x="5329123" y="2569464"/>
+            <a:ext cx="1581912" cy="201168"/>
+          </a:xfrm>
+          <a:prstGeom prst="rect">
+            <a:avLst/>
+          </a:prstGeom>
+          <a:noFill/>
+          <a:ln/>
+        </p:spPr>
+        <p:txBody>
+          <a:bodyPr wrap="square" lIns="0" tIns="0" rIns="0" bIns="0" rtlCol="0" anchor="t"/>
+          <a:lstStyle/>
+          <a:p>
+            <a:pPr algn="ctr" indent="0" marL="0">
+              <a:buNone/>
+            </a:pPr>
+            <a:r>
+              <a:rPr lang="en-US" sz="850" dirty="0">
+                <a:solidFill>
+                  <a:srgbClr val="475569"/>
+                </a:solidFill>
+                <a:latin typeface="Calibri" pitchFamily="34" charset="0"/>
+                <a:ea typeface="Calibri" pitchFamily="34" charset="-122"/>
+                <a:cs typeface="Calibri" pitchFamily="34" charset="-120"/>
+              </a:rPr>
+              <a:t>connecting vowel</a:t>
+            </a:r>
+            <a:endParaRPr lang="en-US" sz="850" dirty="0"/>
+          </a:p>
+        </p:txBody>
+      </p:sp>
+      <p:sp>
+        <p:nvSpPr>
+          <p:cNvPr id="25" name="Text 23"/>
+          <p:cNvSpPr/>
+          <p:nvPr/>
+        </p:nvSpPr>
+        <p:spPr>
+          <a:xfrm>
+            <a:off x="5329123" y="2752344"/>
+            <a:ext cx="1581912" cy="182880"/>
+          </a:xfrm>
+          <a:prstGeom prst="rect">
+            <a:avLst/>
+          </a:prstGeom>
+          <a:noFill/>
+          <a:ln/>
+        </p:spPr>
+        <p:txBody>
+          <a:bodyPr wrap="square" lIns="0" tIns="0" rIns="0" bIns="0" rtlCol="0" anchor="t"/>
+          <a:lstStyle/>
+          <a:p>
+            <a:pPr algn="ctr" indent="0" marL="0">
+              <a:buNone/>
+            </a:pPr>
+            <a:r>
+              <a:rPr lang="en-US" sz="700" i="1" dirty="0">
+                <a:solidFill>
+                  <a:srgbClr val="94A3B8"/>
+                </a:solidFill>
+                <a:latin typeface="Calibri" pitchFamily="34" charset="0"/>
+                <a:ea typeface="Calibri" pitchFamily="34" charset="-122"/>
+                <a:cs typeface="Calibri" pitchFamily="34" charset="-120"/>
+              </a:rPr>
+              <a:t>links base to suffix</a:t>
+            </a:r>
+            <a:endParaRPr lang="en-US" sz="700" dirty="0"/>
+          </a:p>
+        </p:txBody>
+      </p:sp>
+      <p:sp>
+        <p:nvSpPr>
+          <p:cNvPr id="26" name="Shape 24"/>
+          <p:cNvSpPr/>
+          <p:nvPr/>
+        </p:nvSpPr>
+        <p:spPr>
+          <a:xfrm>
+            <a:off x="6998818" y="2258568"/>
+            <a:ext cx="1581912" cy="292608"/>
+          </a:xfrm>
+          <a:prstGeom prst="rect">
+            <a:avLst>
+              <a:gd name="adj" fmla="val 25000"/>
+            </a:avLst>
+          </a:prstGeom>
+          <a:solidFill>
+            <a:srgbClr val="FCE7F3"/>
+          </a:solidFill>
+          <a:ln w="19050">
+            <a:solidFill>
+              <a:srgbClr val="DB2777"/>
+            </a:solidFill>
+            <a:prstDash val="solid"/>
+          </a:ln>
+          <a:effectLst>
+            <a:outerShdw sx="100000" sy="100000" kx="0" ky="0" algn="bl" rotWithShape="0" blurRad="101600" dist="38100" dir="8100000">
+              <a:srgbClr val="000000">
+                <a:alpha val="12000"/>
+              </a:srgbClr>
+            </a:outerShdw>
+          </a:effectLst>
+        </p:spPr>
+      </p:sp>
+      <p:sp>
+        <p:nvSpPr>
+          <p:cNvPr id="27" name="Text 25"/>
+          <p:cNvSpPr/>
+          <p:nvPr/>
+        </p:nvSpPr>
+        <p:spPr>
+          <a:xfrm>
+            <a:off x="6998818" y="2258568"/>
+            <a:ext cx="1581912" cy="292608"/>
+          </a:xfrm>
+          <a:prstGeom prst="rect">
+            <a:avLst/>
+          </a:prstGeom>
+          <a:noFill/>
+          <a:ln/>
+        </p:spPr>
+        <p:txBody>
+          <a:bodyPr wrap="square" lIns="0" tIns="0" rIns="0" bIns="0" rtlCol="0" anchor="ctr"/>
+          <a:lstStyle/>
+          <a:p>
+            <a:pPr algn="ctr" indent="0" marL="0">
+              <a:buNone/>
+            </a:pPr>
+            <a:r>
+              <a:rPr lang="en-US" sz="1300" b="1" dirty="0">
+                <a:solidFill>
+                  <a:srgbClr val="9D174D"/>
+                </a:solidFill>
+                <a:latin typeface="Trebuchet MS" pitchFamily="34" charset="0"/>
+                <a:ea typeface="Trebuchet MS" pitchFamily="34" charset="-122"/>
+                <a:cs typeface="Trebuchet MS" pitchFamily="34" charset="-120"/>
+              </a:rPr>
+              <a:t>tion</a:t>
+            </a:r>
+            <a:endParaRPr lang="en-US" sz="1300" dirty="0"/>
+          </a:p>
+        </p:txBody>
+      </p:sp>
+      <p:sp>
+        <p:nvSpPr>
+          <p:cNvPr id="28" name="Text 26"/>
+          <p:cNvSpPr/>
+          <p:nvPr/>
+        </p:nvSpPr>
+        <p:spPr>
+          <a:xfrm>
+            <a:off x="6998818" y="2569464"/>
+            <a:ext cx="1581912" cy="201168"/>
+          </a:xfrm>
+          <a:prstGeom prst="rect">
+            <a:avLst/>
+          </a:prstGeom>
+          <a:noFill/>
+          <a:ln/>
+        </p:spPr>
+        <p:txBody>
+          <a:bodyPr wrap="square" lIns="0" tIns="0" rIns="0" bIns="0" rtlCol="0" anchor="t"/>
+          <a:lstStyle/>
+          <a:p>
+            <a:pPr algn="ctr" indent="0" marL="0">
+              <a:buNone/>
+            </a:pPr>
+            <a:r>
+              <a:rPr lang="en-US" sz="850" dirty="0">
+                <a:solidFill>
+                  <a:srgbClr val="475569"/>
+                </a:solidFill>
+                <a:latin typeface="Calibri" pitchFamily="34" charset="0"/>
+                <a:ea typeface="Calibri" pitchFamily="34" charset="-122"/>
+                <a:cs typeface="Calibri" pitchFamily="34" charset="-120"/>
+              </a:rPr>
+              <a:t>act or process of</a:t>
+            </a:r>
+            <a:endParaRPr lang="en-US" sz="850" dirty="0"/>
+          </a:p>
+        </p:txBody>
+      </p:sp>
+      <p:sp>
+        <p:nvSpPr>
+          <p:cNvPr id="29" name="Text 27"/>
+          <p:cNvSpPr/>
+          <p:nvPr/>
+        </p:nvSpPr>
+        <p:spPr>
+          <a:xfrm>
+            <a:off x="6998818" y="2752344"/>
+            <a:ext cx="1581912" cy="182880"/>
+          </a:xfrm>
+          <a:prstGeom prst="rect">
+            <a:avLst/>
+          </a:prstGeom>
+          <a:noFill/>
+          <a:ln/>
+        </p:spPr>
+        <p:txBody>
+          <a:bodyPr wrap="square" lIns="0" tIns="0" rIns="0" bIns="0" rtlCol="0" anchor="t"/>
+          <a:lstStyle/>
+          <a:p>
+            <a:pPr algn="ctr" indent="0" marL="0">
+              <a:buNone/>
+            </a:pPr>
+            <a:r>
+              <a:rPr lang="en-US" sz="700" i="1" dirty="0">
+                <a:solidFill>
+                  <a:srgbClr val="94A3B8"/>
+                </a:solidFill>
+                <a:latin typeface="Calibri" pitchFamily="34" charset="0"/>
+                <a:ea typeface="Calibri" pitchFamily="34" charset="-122"/>
+                <a:cs typeface="Calibri" pitchFamily="34" charset="-120"/>
+              </a:rPr>
+              <a:t>ti → /sh/ before on</a:t>
+            </a:r>
+            <a:endParaRPr lang="en-US" sz="700" dirty="0"/>
+          </a:p>
+        </p:txBody>
+      </p:sp>
+      <p:sp>
+        <p:nvSpPr>
+          <p:cNvPr id="30" name="Shape 28"/>
+          <p:cNvSpPr/>
+          <p:nvPr/>
+        </p:nvSpPr>
+        <p:spPr>
+          <a:xfrm>
             <a:off x="365760" y="3273552"/>
             <a:ext cx="1371600" cy="658368"/>
           </a:xfrm>
@@ -26105,7 +27179,7 @@
       </p:sp>
       <p:sp>
         <p:nvSpPr>
-          <p:cNvPr id="23" name="Text 21"/>
+          <p:cNvPr id="31" name="Text 29"/>
           <p:cNvSpPr/>
           <p:nvPr/>
         </p:nvSpPr>
@@ -26144,7 +27218,7 @@
       </p:sp>
       <p:sp>
         <p:nvSpPr>
-          <p:cNvPr id="24" name="Shape 22"/>
+          <p:cNvPr id="32" name="Shape 30"/>
           <p:cNvSpPr/>
           <p:nvPr/>
         </p:nvSpPr>
@@ -26171,14 +27245,14 @@
       </p:sp>
       <p:sp>
         <p:nvSpPr>
-          <p:cNvPr id="25" name="Shape 23"/>
-          <p:cNvSpPr/>
-          <p:nvPr/>
-        </p:nvSpPr>
-        <p:spPr>
-          <a:xfrm>
-            <a:off x="2999232" y="3364992"/>
-            <a:ext cx="1645920" cy="475488"/>
+          <p:cNvPr id="33" name="Shape 31"/>
+          <p:cNvSpPr/>
+          <p:nvPr/>
+        </p:nvSpPr>
+        <p:spPr>
+          <a:xfrm>
+            <a:off x="1975104" y="3364992"/>
+            <a:ext cx="1554480" cy="475488"/>
           </a:xfrm>
           <a:prstGeom prst="rect">
             <a:avLst>
@@ -26198,14 +27272,14 @@
       </p:sp>
       <p:sp>
         <p:nvSpPr>
-          <p:cNvPr id="26" name="Text 24"/>
-          <p:cNvSpPr/>
-          <p:nvPr/>
-        </p:nvSpPr>
-        <p:spPr>
-          <a:xfrm>
-            <a:off x="2999232" y="3364992"/>
-            <a:ext cx="1645920" cy="475488"/>
+          <p:cNvPr id="34" name="Text 32"/>
+          <p:cNvSpPr/>
+          <p:nvPr/>
+        </p:nvSpPr>
+        <p:spPr>
+          <a:xfrm>
+            <a:off x="1975104" y="3364992"/>
+            <a:ext cx="1554480" cy="475488"/>
           </a:xfrm>
           <a:prstGeom prst="rect">
             <a:avLst/>
@@ -26237,14 +27311,14 @@
       </p:sp>
       <p:sp>
         <p:nvSpPr>
-          <p:cNvPr id="27" name="Text 25"/>
-          <p:cNvSpPr/>
-          <p:nvPr/>
-        </p:nvSpPr>
-        <p:spPr>
-          <a:xfrm>
-            <a:off x="4645152" y="3364992"/>
-            <a:ext cx="1097280" cy="475488"/>
+          <p:cNvPr id="35" name="Text 33"/>
+          <p:cNvSpPr/>
+          <p:nvPr/>
+        </p:nvSpPr>
+        <p:spPr>
+          <a:xfrm>
+            <a:off x="3529584" y="3364992"/>
+            <a:ext cx="73152" cy="475488"/>
           </a:xfrm>
           <a:prstGeom prst="rect">
             <a:avLst/>
@@ -26276,14 +27350,14 @@
       </p:sp>
       <p:sp>
         <p:nvSpPr>
-          <p:cNvPr id="28" name="Shape 26"/>
-          <p:cNvSpPr/>
-          <p:nvPr/>
-        </p:nvSpPr>
-        <p:spPr>
-          <a:xfrm>
-            <a:off x="5742432" y="3364992"/>
-            <a:ext cx="1645920" cy="475488"/>
+          <p:cNvPr id="36" name="Shape 34"/>
+          <p:cNvSpPr/>
+          <p:nvPr/>
+        </p:nvSpPr>
+        <p:spPr>
+          <a:xfrm>
+            <a:off x="3602736" y="3364992"/>
+            <a:ext cx="1554480" cy="475488"/>
           </a:xfrm>
           <a:prstGeom prst="rect">
             <a:avLst>
@@ -26303,14 +27377,14 @@
       </p:sp>
       <p:sp>
         <p:nvSpPr>
-          <p:cNvPr id="29" name="Text 27"/>
-          <p:cNvSpPr/>
-          <p:nvPr/>
-        </p:nvSpPr>
-        <p:spPr>
-          <a:xfrm>
-            <a:off x="5742432" y="3364992"/>
-            <a:ext cx="1645920" cy="475488"/>
+          <p:cNvPr id="37" name="Text 35"/>
+          <p:cNvSpPr/>
+          <p:nvPr/>
+        </p:nvSpPr>
+        <p:spPr>
+          <a:xfrm>
+            <a:off x="3602736" y="3364992"/>
+            <a:ext cx="1554480" cy="475488"/>
           </a:xfrm>
           <a:prstGeom prst="rect">
             <a:avLst/>
@@ -26334,7 +27408,7 @@
                 <a:ea typeface="Trebuchet MS" pitchFamily="34" charset="-122"/>
                 <a:cs typeface="Trebuchet MS" pitchFamily="34" charset="-120"/>
               </a:rPr>
-              <a:t>port</a:t>
+              <a:t>por</a:t>
             </a:r>
             <a:endParaRPr lang="en-US" sz="1400" dirty="0"/>
           </a:p>
@@ -26342,7 +27416,217 @@
       </p:sp>
       <p:sp>
         <p:nvSpPr>
-          <p:cNvPr id="30" name="Shape 28"/>
+          <p:cNvPr id="38" name="Text 36"/>
+          <p:cNvSpPr/>
+          <p:nvPr/>
+        </p:nvSpPr>
+        <p:spPr>
+          <a:xfrm>
+            <a:off x="5157216" y="3364992"/>
+            <a:ext cx="73152" cy="475488"/>
+          </a:xfrm>
+          <a:prstGeom prst="rect">
+            <a:avLst/>
+          </a:prstGeom>
+          <a:noFill/>
+          <a:ln/>
+        </p:spPr>
+        <p:txBody>
+          <a:bodyPr wrap="square" lIns="0" tIns="0" rIns="0" bIns="0" rtlCol="0" anchor="ctr"/>
+          <a:lstStyle/>
+          <a:p>
+            <a:pPr algn="ctr" indent="0" marL="0">
+              <a:buNone/>
+            </a:pPr>
+            <a:r>
+              <a:rPr lang="en-US" sz="1600" b="1" dirty="0">
+                <a:solidFill>
+                  <a:srgbClr val="0D9488"/>
+                </a:solidFill>
+                <a:latin typeface="Trebuchet MS" pitchFamily="34" charset="0"/>
+                <a:ea typeface="Trebuchet MS" pitchFamily="34" charset="-122"/>
+                <a:cs typeface="Trebuchet MS" pitchFamily="34" charset="-120"/>
+              </a:rPr>
+              <a:t>·</a:t>
+            </a:r>
+            <a:endParaRPr lang="en-US" sz="1600" dirty="0"/>
+          </a:p>
+        </p:txBody>
+      </p:sp>
+      <p:sp>
+        <p:nvSpPr>
+          <p:cNvPr id="39" name="Shape 37"/>
+          <p:cNvSpPr/>
+          <p:nvPr/>
+        </p:nvSpPr>
+        <p:spPr>
+          <a:xfrm>
+            <a:off x="5230368" y="3364992"/>
+            <a:ext cx="1554480" cy="475488"/>
+          </a:xfrm>
+          <a:prstGeom prst="rect">
+            <a:avLst>
+              <a:gd name="adj" fmla="val 9615"/>
+            </a:avLst>
+          </a:prstGeom>
+          <a:solidFill>
+            <a:srgbClr val="FFFFFF"/>
+          </a:solidFill>
+          <a:ln w="12700">
+            <a:solidFill>
+              <a:srgbClr val="0D9488"/>
+            </a:solidFill>
+            <a:prstDash val="solid"/>
+          </a:ln>
+        </p:spPr>
+      </p:sp>
+      <p:sp>
+        <p:nvSpPr>
+          <p:cNvPr id="40" name="Text 38"/>
+          <p:cNvSpPr/>
+          <p:nvPr/>
+        </p:nvSpPr>
+        <p:spPr>
+          <a:xfrm>
+            <a:off x="5230368" y="3364992"/>
+            <a:ext cx="1554480" cy="475488"/>
+          </a:xfrm>
+          <a:prstGeom prst="rect">
+            <a:avLst/>
+          </a:prstGeom>
+          <a:noFill/>
+          <a:ln/>
+        </p:spPr>
+        <p:txBody>
+          <a:bodyPr wrap="square" lIns="0" tIns="0" rIns="0" bIns="0" rtlCol="0" anchor="ctr"/>
+          <a:lstStyle/>
+          <a:p>
+            <a:pPr algn="ctr" indent="0" marL="0">
+              <a:buNone/>
+            </a:pPr>
+            <a:r>
+              <a:rPr lang="en-US" sz="1400" b="1" dirty="0">
+                <a:solidFill>
+                  <a:srgbClr val="0D9488"/>
+                </a:solidFill>
+                <a:latin typeface="Trebuchet MS" pitchFamily="34" charset="0"/>
+                <a:ea typeface="Trebuchet MS" pitchFamily="34" charset="-122"/>
+                <a:cs typeface="Trebuchet MS" pitchFamily="34" charset="-120"/>
+              </a:rPr>
+              <a:t>ta</a:t>
+            </a:r>
+            <a:endParaRPr lang="en-US" sz="1400" dirty="0"/>
+          </a:p>
+        </p:txBody>
+      </p:sp>
+      <p:sp>
+        <p:nvSpPr>
+          <p:cNvPr id="41" name="Text 39"/>
+          <p:cNvSpPr/>
+          <p:nvPr/>
+        </p:nvSpPr>
+        <p:spPr>
+          <a:xfrm>
+            <a:off x="6784848" y="3364992"/>
+            <a:ext cx="73152" cy="475488"/>
+          </a:xfrm>
+          <a:prstGeom prst="rect">
+            <a:avLst/>
+          </a:prstGeom>
+          <a:noFill/>
+          <a:ln/>
+        </p:spPr>
+        <p:txBody>
+          <a:bodyPr wrap="square" lIns="0" tIns="0" rIns="0" bIns="0" rtlCol="0" anchor="ctr"/>
+          <a:lstStyle/>
+          <a:p>
+            <a:pPr algn="ctr" indent="0" marL="0">
+              <a:buNone/>
+            </a:pPr>
+            <a:r>
+              <a:rPr lang="en-US" sz="1600" b="1" dirty="0">
+                <a:solidFill>
+                  <a:srgbClr val="0D9488"/>
+                </a:solidFill>
+                <a:latin typeface="Trebuchet MS" pitchFamily="34" charset="0"/>
+                <a:ea typeface="Trebuchet MS" pitchFamily="34" charset="-122"/>
+                <a:cs typeface="Trebuchet MS" pitchFamily="34" charset="-120"/>
+              </a:rPr>
+              <a:t>·</a:t>
+            </a:r>
+            <a:endParaRPr lang="en-US" sz="1600" dirty="0"/>
+          </a:p>
+        </p:txBody>
+      </p:sp>
+      <p:sp>
+        <p:nvSpPr>
+          <p:cNvPr id="42" name="Shape 40"/>
+          <p:cNvSpPr/>
+          <p:nvPr/>
+        </p:nvSpPr>
+        <p:spPr>
+          <a:xfrm>
+            <a:off x="6858000" y="3364992"/>
+            <a:ext cx="1554480" cy="475488"/>
+          </a:xfrm>
+          <a:prstGeom prst="rect">
+            <a:avLst>
+              <a:gd name="adj" fmla="val 9615"/>
+            </a:avLst>
+          </a:prstGeom>
+          <a:solidFill>
+            <a:srgbClr val="FFFFFF"/>
+          </a:solidFill>
+          <a:ln w="12700">
+            <a:solidFill>
+              <a:srgbClr val="0D9488"/>
+            </a:solidFill>
+            <a:prstDash val="solid"/>
+          </a:ln>
+        </p:spPr>
+      </p:sp>
+      <p:sp>
+        <p:nvSpPr>
+          <p:cNvPr id="43" name="Text 41"/>
+          <p:cNvSpPr/>
+          <p:nvPr/>
+        </p:nvSpPr>
+        <p:spPr>
+          <a:xfrm>
+            <a:off x="6858000" y="3364992"/>
+            <a:ext cx="1554480" cy="475488"/>
+          </a:xfrm>
+          <a:prstGeom prst="rect">
+            <a:avLst/>
+          </a:prstGeom>
+          <a:noFill/>
+          <a:ln/>
+        </p:spPr>
+        <p:txBody>
+          <a:bodyPr wrap="square" lIns="0" tIns="0" rIns="0" bIns="0" rtlCol="0" anchor="ctr"/>
+          <a:lstStyle/>
+          <a:p>
+            <a:pPr algn="ctr" indent="0" marL="0">
+              <a:buNone/>
+            </a:pPr>
+            <a:r>
+              <a:rPr lang="en-US" sz="1400" b="1" dirty="0">
+                <a:solidFill>
+                  <a:srgbClr val="0D9488"/>
+                </a:solidFill>
+                <a:latin typeface="Trebuchet MS" pitchFamily="34" charset="0"/>
+                <a:ea typeface="Trebuchet MS" pitchFamily="34" charset="-122"/>
+                <a:cs typeface="Trebuchet MS" pitchFamily="34" charset="-120"/>
+              </a:rPr>
+              <a:t>tion</a:t>
+            </a:r>
+            <a:endParaRPr lang="en-US" sz="1400" dirty="0"/>
+          </a:p>
+        </p:txBody>
+      </p:sp>
+      <p:sp>
+        <p:nvSpPr>
+          <p:cNvPr id="44" name="Shape 42"/>
           <p:cNvSpPr/>
           <p:nvPr/>
         </p:nvSpPr>
@@ -26369,7 +27653,7 @@
       </p:sp>
       <p:sp>
         <p:nvSpPr>
-          <p:cNvPr id="31" name="Text 29"/>
+          <p:cNvPr id="45" name="Text 43"/>
           <p:cNvSpPr/>
           <p:nvPr/>
         </p:nvSpPr>
@@ -26408,18 +27692,18 @@
       </p:sp>
       <p:sp>
         <p:nvSpPr>
-          <p:cNvPr id="32" name="Shape 30"/>
+          <p:cNvPr id="46" name="Shape 44"/>
           <p:cNvSpPr/>
           <p:nvPr/>
         </p:nvSpPr>
         <p:spPr>
           <a:xfrm>
             <a:off x="1874520" y="4096512"/>
-            <a:ext cx="6903720" cy="658368"/>
+            <a:ext cx="6903720" cy="804672"/>
           </a:xfrm>
           <a:prstGeom prst="rect">
             <a:avLst>
-              <a:gd name="adj" fmla="val 8333"/>
+              <a:gd name="adj" fmla="val 6818"/>
             </a:avLst>
           </a:prstGeom>
           <a:solidFill>
@@ -26435,18 +27719,18 @@
       </p:sp>
       <p:sp>
         <p:nvSpPr>
-          <p:cNvPr id="33" name="Shape 31"/>
-          <p:cNvSpPr/>
-          <p:nvPr/>
-        </p:nvSpPr>
-        <p:spPr>
-          <a:xfrm>
-            <a:off x="2023872" y="4169664"/>
-            <a:ext cx="685800" cy="475488"/>
+          <p:cNvPr id="47" name="Shape 45"/>
+          <p:cNvSpPr/>
+          <p:nvPr/>
+        </p:nvSpPr>
+        <p:spPr>
+          <a:xfrm>
+            <a:off x="1952596" y="4169664"/>
+            <a:ext cx="493776" cy="384048"/>
           </a:xfrm>
           <a:prstGeom prst="rect">
             <a:avLst>
-              <a:gd name="adj" fmla="val 7692"/>
+              <a:gd name="adj" fmla="val 9524"/>
             </a:avLst>
           </a:prstGeom>
           <a:solidFill>
@@ -26462,14 +27746,14 @@
       </p:sp>
       <p:sp>
         <p:nvSpPr>
-          <p:cNvPr id="34" name="Text 32"/>
-          <p:cNvSpPr/>
-          <p:nvPr/>
-        </p:nvSpPr>
-        <p:spPr>
-          <a:xfrm>
-            <a:off x="2023872" y="4169664"/>
-            <a:ext cx="685800" cy="475488"/>
+          <p:cNvPr id="48" name="Text 46"/>
+          <p:cNvSpPr/>
+          <p:nvPr/>
+        </p:nvSpPr>
+        <p:spPr>
+          <a:xfrm>
+            <a:off x="1952596" y="4169664"/>
+            <a:ext cx="493776" cy="384048"/>
           </a:xfrm>
           <a:prstGeom prst="rect">
             <a:avLst/>
@@ -26501,18 +27785,18 @@
       </p:sp>
       <p:sp>
         <p:nvSpPr>
-          <p:cNvPr id="35" name="Shape 33"/>
-          <p:cNvSpPr/>
-          <p:nvPr/>
-        </p:nvSpPr>
-        <p:spPr>
-          <a:xfrm>
-            <a:off x="2831592" y="4169664"/>
-            <a:ext cx="685800" cy="475488"/>
+          <p:cNvPr id="49" name="Shape 47"/>
+          <p:cNvSpPr/>
+          <p:nvPr/>
+        </p:nvSpPr>
+        <p:spPr>
+          <a:xfrm>
+            <a:off x="2497015" y="4169664"/>
+            <a:ext cx="493776" cy="384048"/>
           </a:xfrm>
           <a:prstGeom prst="rect">
             <a:avLst>
-              <a:gd name="adj" fmla="val 7692"/>
+              <a:gd name="adj" fmla="val 9524"/>
             </a:avLst>
           </a:prstGeom>
           <a:solidFill>
@@ -26528,14 +27812,14 @@
       </p:sp>
       <p:sp>
         <p:nvSpPr>
-          <p:cNvPr id="36" name="Text 34"/>
-          <p:cNvSpPr/>
-          <p:nvPr/>
-        </p:nvSpPr>
-        <p:spPr>
-          <a:xfrm>
-            <a:off x="2831592" y="4169664"/>
-            <a:ext cx="685800" cy="475488"/>
+          <p:cNvPr id="50" name="Text 48"/>
+          <p:cNvSpPr/>
+          <p:nvPr/>
+        </p:nvSpPr>
+        <p:spPr>
+          <a:xfrm>
+            <a:off x="2497015" y="4169664"/>
+            <a:ext cx="493776" cy="384048"/>
           </a:xfrm>
           <a:prstGeom prst="rect">
             <a:avLst/>
@@ -26567,18 +27851,18 @@
       </p:sp>
       <p:sp>
         <p:nvSpPr>
-          <p:cNvPr id="37" name="Shape 35"/>
-          <p:cNvSpPr/>
-          <p:nvPr/>
-        </p:nvSpPr>
-        <p:spPr>
-          <a:xfrm>
-            <a:off x="3639312" y="4169664"/>
-            <a:ext cx="685800" cy="475488"/>
+          <p:cNvPr id="51" name="Shape 49"/>
+          <p:cNvSpPr/>
+          <p:nvPr/>
+        </p:nvSpPr>
+        <p:spPr>
+          <a:xfrm>
+            <a:off x="3041435" y="4169664"/>
+            <a:ext cx="493776" cy="384048"/>
           </a:xfrm>
           <a:prstGeom prst="rect">
             <a:avLst>
-              <a:gd name="adj" fmla="val 7692"/>
+              <a:gd name="adj" fmla="val 9524"/>
             </a:avLst>
           </a:prstGeom>
           <a:solidFill>
@@ -26594,14 +27878,14 @@
       </p:sp>
       <p:sp>
         <p:nvSpPr>
-          <p:cNvPr id="38" name="Text 36"/>
-          <p:cNvSpPr/>
-          <p:nvPr/>
-        </p:nvSpPr>
-        <p:spPr>
-          <a:xfrm>
-            <a:off x="3639312" y="4169664"/>
-            <a:ext cx="685800" cy="475488"/>
+          <p:cNvPr id="52" name="Text 50"/>
+          <p:cNvSpPr/>
+          <p:nvPr/>
+        </p:nvSpPr>
+        <p:spPr>
+          <a:xfrm>
+            <a:off x="3041435" y="4169664"/>
+            <a:ext cx="493776" cy="384048"/>
           </a:xfrm>
           <a:prstGeom prst="rect">
             <a:avLst/>
@@ -26633,18 +27917,18 @@
       </p:sp>
       <p:sp>
         <p:nvSpPr>
-          <p:cNvPr id="39" name="Shape 37"/>
-          <p:cNvSpPr/>
-          <p:nvPr/>
-        </p:nvSpPr>
-        <p:spPr>
-          <a:xfrm>
-            <a:off x="4447032" y="4169664"/>
-            <a:ext cx="685800" cy="475488"/>
+          <p:cNvPr id="53" name="Shape 51"/>
+          <p:cNvSpPr/>
+          <p:nvPr/>
+        </p:nvSpPr>
+        <p:spPr>
+          <a:xfrm>
+            <a:off x="3585855" y="4169664"/>
+            <a:ext cx="493776" cy="384048"/>
           </a:xfrm>
           <a:prstGeom prst="rect">
             <a:avLst>
-              <a:gd name="adj" fmla="val 7692"/>
+              <a:gd name="adj" fmla="val 9524"/>
             </a:avLst>
           </a:prstGeom>
           <a:solidFill>
@@ -26660,14 +27944,14 @@
       </p:sp>
       <p:sp>
         <p:nvSpPr>
-          <p:cNvPr id="40" name="Text 38"/>
-          <p:cNvSpPr/>
-          <p:nvPr/>
-        </p:nvSpPr>
-        <p:spPr>
-          <a:xfrm>
-            <a:off x="4447032" y="4169664"/>
-            <a:ext cx="685800" cy="475488"/>
+          <p:cNvPr id="54" name="Text 52"/>
+          <p:cNvSpPr/>
+          <p:nvPr/>
+        </p:nvSpPr>
+        <p:spPr>
+          <a:xfrm>
+            <a:off x="3585855" y="4169664"/>
+            <a:ext cx="493776" cy="384048"/>
           </a:xfrm>
           <a:prstGeom prst="rect">
             <a:avLst/>
@@ -26699,18 +27983,18 @@
       </p:sp>
       <p:sp>
         <p:nvSpPr>
-          <p:cNvPr id="41" name="Shape 39"/>
-          <p:cNvSpPr/>
-          <p:nvPr/>
-        </p:nvSpPr>
-        <p:spPr>
-          <a:xfrm>
-            <a:off x="5254752" y="4169664"/>
-            <a:ext cx="685800" cy="475488"/>
+          <p:cNvPr id="55" name="Shape 53"/>
+          <p:cNvSpPr/>
+          <p:nvPr/>
+        </p:nvSpPr>
+        <p:spPr>
+          <a:xfrm>
+            <a:off x="4130274" y="4169664"/>
+            <a:ext cx="493776" cy="384048"/>
           </a:xfrm>
           <a:prstGeom prst="rect">
             <a:avLst>
-              <a:gd name="adj" fmla="val 7692"/>
+              <a:gd name="adj" fmla="val 9524"/>
             </a:avLst>
           </a:prstGeom>
           <a:solidFill>
@@ -26726,14 +28010,14 @@
       </p:sp>
       <p:sp>
         <p:nvSpPr>
-          <p:cNvPr id="42" name="Text 40"/>
-          <p:cNvSpPr/>
-          <p:nvPr/>
-        </p:nvSpPr>
-        <p:spPr>
-          <a:xfrm>
-            <a:off x="5254752" y="4169664"/>
-            <a:ext cx="685800" cy="475488"/>
+          <p:cNvPr id="56" name="Text 54"/>
+          <p:cNvSpPr/>
+          <p:nvPr/>
+        </p:nvSpPr>
+        <p:spPr>
+          <a:xfrm>
+            <a:off x="4130274" y="4169664"/>
+            <a:ext cx="493776" cy="384048"/>
           </a:xfrm>
           <a:prstGeom prst="rect">
             <a:avLst/>
@@ -26765,18 +28049,18 @@
       </p:sp>
       <p:sp>
         <p:nvSpPr>
-          <p:cNvPr id="43" name="Shape 41"/>
-          <p:cNvSpPr/>
-          <p:nvPr/>
-        </p:nvSpPr>
-        <p:spPr>
-          <a:xfrm>
-            <a:off x="6062472" y="4169664"/>
-            <a:ext cx="685800" cy="475488"/>
+          <p:cNvPr id="57" name="Shape 55"/>
+          <p:cNvSpPr/>
+          <p:nvPr/>
+        </p:nvSpPr>
+        <p:spPr>
+          <a:xfrm>
+            <a:off x="4674694" y="4169664"/>
+            <a:ext cx="493776" cy="384048"/>
           </a:xfrm>
           <a:prstGeom prst="rect">
             <a:avLst>
-              <a:gd name="adj" fmla="val 7692"/>
+              <a:gd name="adj" fmla="val 9524"/>
             </a:avLst>
           </a:prstGeom>
           <a:solidFill>
@@ -26792,14 +28076,14 @@
       </p:sp>
       <p:sp>
         <p:nvSpPr>
-          <p:cNvPr id="44" name="Text 42"/>
-          <p:cNvSpPr/>
-          <p:nvPr/>
-        </p:nvSpPr>
-        <p:spPr>
-          <a:xfrm>
-            <a:off x="6062472" y="4169664"/>
-            <a:ext cx="685800" cy="475488"/>
+          <p:cNvPr id="58" name="Text 56"/>
+          <p:cNvSpPr/>
+          <p:nvPr/>
+        </p:nvSpPr>
+        <p:spPr>
+          <a:xfrm>
+            <a:off x="4674694" y="4169664"/>
+            <a:ext cx="493776" cy="384048"/>
           </a:xfrm>
           <a:prstGeom prst="rect">
             <a:avLst/>
@@ -26831,18 +28115,18 @@
       </p:sp>
       <p:sp>
         <p:nvSpPr>
-          <p:cNvPr id="45" name="Shape 43"/>
-          <p:cNvSpPr/>
-          <p:nvPr/>
-        </p:nvSpPr>
-        <p:spPr>
-          <a:xfrm>
-            <a:off x="6870192" y="4169664"/>
-            <a:ext cx="685800" cy="475488"/>
+          <p:cNvPr id="59" name="Shape 57"/>
+          <p:cNvSpPr/>
+          <p:nvPr/>
+        </p:nvSpPr>
+        <p:spPr>
+          <a:xfrm>
+            <a:off x="5219114" y="4169664"/>
+            <a:ext cx="493776" cy="384048"/>
           </a:xfrm>
           <a:prstGeom prst="rect">
             <a:avLst>
-              <a:gd name="adj" fmla="val 7692"/>
+              <a:gd name="adj" fmla="val 9524"/>
             </a:avLst>
           </a:prstGeom>
           <a:solidFill>
@@ -26858,14 +28142,14 @@
       </p:sp>
       <p:sp>
         <p:nvSpPr>
-          <p:cNvPr id="46" name="Text 44"/>
-          <p:cNvSpPr/>
-          <p:nvPr/>
-        </p:nvSpPr>
-        <p:spPr>
-          <a:xfrm>
-            <a:off x="6870192" y="4169664"/>
-            <a:ext cx="685800" cy="475488"/>
+          <p:cNvPr id="60" name="Text 58"/>
+          <p:cNvSpPr/>
+          <p:nvPr/>
+        </p:nvSpPr>
+        <p:spPr>
+          <a:xfrm>
+            <a:off x="5219114" y="4169664"/>
+            <a:ext cx="493776" cy="384048"/>
           </a:xfrm>
           <a:prstGeom prst="rect">
             <a:avLst/>
@@ -26897,18 +28181,18 @@
       </p:sp>
       <p:sp>
         <p:nvSpPr>
-          <p:cNvPr id="47" name="Shape 45"/>
-          <p:cNvSpPr/>
-          <p:nvPr/>
-        </p:nvSpPr>
-        <p:spPr>
-          <a:xfrm>
-            <a:off x="7677912" y="4169664"/>
-            <a:ext cx="685800" cy="475488"/>
+          <p:cNvPr id="61" name="Shape 59"/>
+          <p:cNvSpPr/>
+          <p:nvPr/>
+        </p:nvSpPr>
+        <p:spPr>
+          <a:xfrm>
+            <a:off x="5763534" y="4169664"/>
+            <a:ext cx="493776" cy="384048"/>
           </a:xfrm>
           <a:prstGeom prst="rect">
             <a:avLst>
-              <a:gd name="adj" fmla="val 7692"/>
+              <a:gd name="adj" fmla="val 9524"/>
             </a:avLst>
           </a:prstGeom>
           <a:solidFill>
@@ -26924,14 +28208,14 @@
       </p:sp>
       <p:sp>
         <p:nvSpPr>
-          <p:cNvPr id="48" name="Text 46"/>
-          <p:cNvSpPr/>
-          <p:nvPr/>
-        </p:nvSpPr>
-        <p:spPr>
-          <a:xfrm>
-            <a:off x="7677912" y="4169664"/>
-            <a:ext cx="685800" cy="475488"/>
+          <p:cNvPr id="62" name="Text 60"/>
+          <p:cNvSpPr/>
+          <p:nvPr/>
+        </p:nvSpPr>
+        <p:spPr>
+          <a:xfrm>
+            <a:off x="5763534" y="4169664"/>
+            <a:ext cx="493776" cy="384048"/>
           </a:xfrm>
           <a:prstGeom prst="rect">
             <a:avLst/>
@@ -26956,6 +28240,309 @@
                 <a:cs typeface="Trebuchet MS" pitchFamily="34" charset="-120"/>
               </a:rPr>
               <a:t>t</a:t>
+            </a:r>
+            <a:endParaRPr lang="en-US" sz="900" dirty="0"/>
+          </a:p>
+        </p:txBody>
+      </p:sp>
+      <p:sp>
+        <p:nvSpPr>
+          <p:cNvPr id="63" name="Shape 61"/>
+          <p:cNvSpPr/>
+          <p:nvPr/>
+        </p:nvSpPr>
+        <p:spPr>
+          <a:xfrm>
+            <a:off x="6307953" y="4169664"/>
+            <a:ext cx="493776" cy="384048"/>
+          </a:xfrm>
+          <a:prstGeom prst="rect">
+            <a:avLst>
+              <a:gd name="adj" fmla="val 9524"/>
+            </a:avLst>
+          </a:prstGeom>
+          <a:solidFill>
+            <a:srgbClr val="FFFFFF"/>
+          </a:solidFill>
+          <a:ln w="12700">
+            <a:solidFill>
+              <a:srgbClr val="DB2777"/>
+            </a:solidFill>
+            <a:prstDash val="solid"/>
+          </a:ln>
+        </p:spPr>
+      </p:sp>
+      <p:sp>
+        <p:nvSpPr>
+          <p:cNvPr id="64" name="Text 62"/>
+          <p:cNvSpPr/>
+          <p:nvPr/>
+        </p:nvSpPr>
+        <p:spPr>
+          <a:xfrm>
+            <a:off x="6307953" y="4169664"/>
+            <a:ext cx="493776" cy="384048"/>
+          </a:xfrm>
+          <a:prstGeom prst="rect">
+            <a:avLst/>
+          </a:prstGeom>
+          <a:noFill/>
+          <a:ln/>
+        </p:spPr>
+        <p:txBody>
+          <a:bodyPr wrap="square" lIns="0" tIns="0" rIns="0" bIns="0" rtlCol="0" anchor="ctr"/>
+          <a:lstStyle/>
+          <a:p>
+            <a:pPr algn="ctr" indent="0" marL="0">
+              <a:buNone/>
+            </a:pPr>
+            <a:r>
+              <a:rPr lang="en-US" sz="900" b="1" dirty="0">
+                <a:solidFill>
+                  <a:srgbClr val="9D174D"/>
+                </a:solidFill>
+                <a:latin typeface="Trebuchet MS" pitchFamily="34" charset="0"/>
+                <a:ea typeface="Trebuchet MS" pitchFamily="34" charset="-122"/>
+                <a:cs typeface="Trebuchet MS" pitchFamily="34" charset="-120"/>
+              </a:rPr>
+              <a:t>a</a:t>
+            </a:r>
+            <a:endParaRPr lang="en-US" sz="900" dirty="0"/>
+          </a:p>
+        </p:txBody>
+      </p:sp>
+      <p:sp>
+        <p:nvSpPr>
+          <p:cNvPr id="65" name="Shape 63"/>
+          <p:cNvSpPr/>
+          <p:nvPr/>
+        </p:nvSpPr>
+        <p:spPr>
+          <a:xfrm>
+            <a:off x="6852373" y="4169664"/>
+            <a:ext cx="493776" cy="384048"/>
+          </a:xfrm>
+          <a:prstGeom prst="rect">
+            <a:avLst>
+              <a:gd name="adj" fmla="val 9524"/>
+            </a:avLst>
+          </a:prstGeom>
+          <a:solidFill>
+            <a:srgbClr val="FFFFFF"/>
+          </a:solidFill>
+          <a:ln w="12700">
+            <a:solidFill>
+              <a:srgbClr val="DB2777"/>
+            </a:solidFill>
+            <a:prstDash val="solid"/>
+          </a:ln>
+        </p:spPr>
+      </p:sp>
+      <p:sp>
+        <p:nvSpPr>
+          <p:cNvPr id="66" name="Text 64"/>
+          <p:cNvSpPr/>
+          <p:nvPr/>
+        </p:nvSpPr>
+        <p:spPr>
+          <a:xfrm>
+            <a:off x="6852373" y="4169664"/>
+            <a:ext cx="493776" cy="384048"/>
+          </a:xfrm>
+          <a:prstGeom prst="rect">
+            <a:avLst/>
+          </a:prstGeom>
+          <a:noFill/>
+          <a:ln/>
+        </p:spPr>
+        <p:txBody>
+          <a:bodyPr wrap="square" lIns="0" tIns="0" rIns="0" bIns="0" rtlCol="0" anchor="ctr"/>
+          <a:lstStyle/>
+          <a:p>
+            <a:pPr algn="ctr" indent="0" marL="0">
+              <a:buNone/>
+            </a:pPr>
+            <a:r>
+              <a:rPr lang="en-US" sz="900" b="1" dirty="0">
+                <a:solidFill>
+                  <a:srgbClr val="9D174D"/>
+                </a:solidFill>
+                <a:latin typeface="Trebuchet MS" pitchFamily="34" charset="0"/>
+                <a:ea typeface="Trebuchet MS" pitchFamily="34" charset="-122"/>
+                <a:cs typeface="Trebuchet MS" pitchFamily="34" charset="-120"/>
+              </a:rPr>
+              <a:t>t</a:t>
+            </a:r>
+            <a:endParaRPr lang="en-US" sz="900" dirty="0"/>
+          </a:p>
+        </p:txBody>
+      </p:sp>
+      <p:sp>
+        <p:nvSpPr>
+          <p:cNvPr id="67" name="Text 65"/>
+          <p:cNvSpPr/>
+          <p:nvPr/>
+        </p:nvSpPr>
+        <p:spPr>
+          <a:xfrm>
+            <a:off x="6852373" y="4572000"/>
+            <a:ext cx="493776" cy="219456"/>
+          </a:xfrm>
+          <a:prstGeom prst="rect">
+            <a:avLst/>
+          </a:prstGeom>
+          <a:noFill/>
+          <a:ln/>
+        </p:spPr>
+        <p:txBody>
+          <a:bodyPr wrap="square" lIns="0" tIns="0" rIns="0" bIns="0" rtlCol="0" anchor="t"/>
+          <a:lstStyle/>
+          <a:p>
+            <a:pPr algn="ctr" indent="0" marL="0">
+              <a:buNone/>
+            </a:pPr>
+            <a:r>
+              <a:rPr lang="en-US" sz="750" i="1" dirty="0">
+                <a:solidFill>
+                  <a:srgbClr val="94A3B8"/>
+                </a:solidFill>
+                <a:latin typeface="Calibri" pitchFamily="34" charset="0"/>
+                <a:ea typeface="Calibri" pitchFamily="34" charset="-122"/>
+                <a:cs typeface="Calibri" pitchFamily="34" charset="-120"/>
+              </a:rPr>
+              <a:t>/sh/</a:t>
+            </a:r>
+            <a:endParaRPr lang="en-US" sz="750" dirty="0"/>
+          </a:p>
+        </p:txBody>
+      </p:sp>
+      <p:sp>
+        <p:nvSpPr>
+          <p:cNvPr id="68" name="Shape 66"/>
+          <p:cNvSpPr/>
+          <p:nvPr/>
+        </p:nvSpPr>
+        <p:spPr>
+          <a:xfrm>
+            <a:off x="7396793" y="4169664"/>
+            <a:ext cx="493776" cy="384048"/>
+          </a:xfrm>
+          <a:prstGeom prst="rect">
+            <a:avLst>
+              <a:gd name="adj" fmla="val 9524"/>
+            </a:avLst>
+          </a:prstGeom>
+          <a:solidFill>
+            <a:srgbClr val="FFFFFF"/>
+          </a:solidFill>
+          <a:ln w="12700">
+            <a:solidFill>
+              <a:srgbClr val="DB2777"/>
+            </a:solidFill>
+            <a:prstDash val="solid"/>
+          </a:ln>
+        </p:spPr>
+      </p:sp>
+      <p:sp>
+        <p:nvSpPr>
+          <p:cNvPr id="69" name="Text 67"/>
+          <p:cNvSpPr/>
+          <p:nvPr/>
+        </p:nvSpPr>
+        <p:spPr>
+          <a:xfrm>
+            <a:off x="7396793" y="4169664"/>
+            <a:ext cx="493776" cy="384048"/>
+          </a:xfrm>
+          <a:prstGeom prst="rect">
+            <a:avLst/>
+          </a:prstGeom>
+          <a:noFill/>
+          <a:ln/>
+        </p:spPr>
+        <p:txBody>
+          <a:bodyPr wrap="square" lIns="0" tIns="0" rIns="0" bIns="0" rtlCol="0" anchor="ctr"/>
+          <a:lstStyle/>
+          <a:p>
+            <a:pPr algn="ctr" indent="0" marL="0">
+              <a:buNone/>
+            </a:pPr>
+            <a:r>
+              <a:rPr lang="en-US" sz="900" b="1" dirty="0">
+                <a:solidFill>
+                  <a:srgbClr val="9D174D"/>
+                </a:solidFill>
+                <a:latin typeface="Trebuchet MS" pitchFamily="34" charset="0"/>
+                <a:ea typeface="Trebuchet MS" pitchFamily="34" charset="-122"/>
+                <a:cs typeface="Trebuchet MS" pitchFamily="34" charset="-120"/>
+              </a:rPr>
+              <a:t>io</a:t>
+            </a:r>
+            <a:endParaRPr lang="en-US" sz="900" dirty="0"/>
+          </a:p>
+        </p:txBody>
+      </p:sp>
+      <p:sp>
+        <p:nvSpPr>
+          <p:cNvPr id="70" name="Shape 68"/>
+          <p:cNvSpPr/>
+          <p:nvPr/>
+        </p:nvSpPr>
+        <p:spPr>
+          <a:xfrm>
+            <a:off x="7941212" y="4169664"/>
+            <a:ext cx="493776" cy="384048"/>
+          </a:xfrm>
+          <a:prstGeom prst="rect">
+            <a:avLst>
+              <a:gd name="adj" fmla="val 9524"/>
+            </a:avLst>
+          </a:prstGeom>
+          <a:solidFill>
+            <a:srgbClr val="FFFFFF"/>
+          </a:solidFill>
+          <a:ln w="12700">
+            <a:solidFill>
+              <a:srgbClr val="DB2777"/>
+            </a:solidFill>
+            <a:prstDash val="solid"/>
+          </a:ln>
+        </p:spPr>
+      </p:sp>
+      <p:sp>
+        <p:nvSpPr>
+          <p:cNvPr id="71" name="Text 69"/>
+          <p:cNvSpPr/>
+          <p:nvPr/>
+        </p:nvSpPr>
+        <p:spPr>
+          <a:xfrm>
+            <a:off x="7941212" y="4169664"/>
+            <a:ext cx="493776" cy="384048"/>
+          </a:xfrm>
+          <a:prstGeom prst="rect">
+            <a:avLst/>
+          </a:prstGeom>
+          <a:noFill/>
+          <a:ln/>
+        </p:spPr>
+        <p:txBody>
+          <a:bodyPr wrap="square" lIns="0" tIns="0" rIns="0" bIns="0" rtlCol="0" anchor="ctr"/>
+          <a:lstStyle/>
+          <a:p>
+            <a:pPr algn="ctr" indent="0" marL="0">
+              <a:buNone/>
+            </a:pPr>
+            <a:r>
+              <a:rPr lang="en-US" sz="900" b="1" dirty="0">
+                <a:solidFill>
+                  <a:srgbClr val="9D174D"/>
+                </a:solidFill>
+                <a:latin typeface="Trebuchet MS" pitchFamily="34" charset="0"/>
+                <a:ea typeface="Trebuchet MS" pitchFamily="34" charset="-122"/>
+                <a:cs typeface="Trebuchet MS" pitchFamily="34" charset="-120"/>
+              </a:rPr>
+              <a:t>n</a:t>
             </a:r>
             <a:endParaRPr lang="en-US" sz="900" dirty="0"/>
           </a:p>
@@ -27247,7 +28834,7 @@
                 <a:ea typeface="Calibri" pitchFamily="34" charset="-122"/>
                 <a:cs typeface="Calibri" pitchFamily="34" charset="-120"/>
               </a:rPr>
-              <a:t>Word Labs  •  wordlabs.app  •  Root: 'port' = carry, bring, transport</a:t>
+              <a:t>Word Labs  •  wordlabs.app  •  Root: 'port' = carry, bring, bear</a:t>
             </a:r>
             <a:endParaRPr lang="en-US" sz="800" dirty="0"/>
           </a:p>
@@ -27386,7 +28973,7 @@
                 <a:ea typeface="Trebuchet MS" pitchFamily="34" charset="-122"/>
                 <a:cs typeface="Trebuchet MS" pitchFamily="34" charset="-120"/>
               </a:rPr>
-              <a:t>importation</a:t>
+              <a:t>support</a:t>
             </a:r>
             <a:endParaRPr lang="en-US" sz="2800" dirty="0"/>
           </a:p>
@@ -28074,7 +29661,7 @@
                 <a:ea typeface="Calibri" pitchFamily="34" charset="-122"/>
                 <a:cs typeface="Calibri" pitchFamily="34" charset="-120"/>
               </a:rPr>
-              <a:t>Word Labs  •  wordlabs.app  •  Root: 'port' = carry, bring, transport</a:t>
+              <a:t>Word Labs  •  wordlabs.app  •  Root: 'port' = carry, bring, bear</a:t>
             </a:r>
             <a:endParaRPr lang="en-US" sz="800" dirty="0"/>
           </a:p>
@@ -28213,7 +29800,7 @@
                 <a:ea typeface="Trebuchet MS" pitchFamily="34" charset="-122"/>
                 <a:cs typeface="Trebuchet MS" pitchFamily="34" charset="-120"/>
               </a:rPr>
-              <a:t>importation</a:t>
+              <a:t>support</a:t>
             </a:r>
             <a:endParaRPr lang="en-US" sz="2800" dirty="0"/>
           </a:p>
@@ -28293,7 +29880,7 @@
         </p:nvSpPr>
         <p:spPr>
           <a:xfrm>
-            <a:off x="2221992" y="2258568"/>
+            <a:off x="2938272" y="2258568"/>
             <a:ext cx="1828800" cy="292608"/>
           </a:xfrm>
           <a:prstGeom prst="rect">
@@ -28327,7 +29914,7 @@
         </p:nvSpPr>
         <p:spPr>
           <a:xfrm>
-            <a:off x="2221992" y="2258568"/>
+            <a:off x="2938272" y="2258568"/>
             <a:ext cx="1828800" cy="292608"/>
           </a:xfrm>
           <a:prstGeom prst="rect">
@@ -28352,7 +29939,7 @@
                 <a:ea typeface="Trebuchet MS" pitchFamily="34" charset="-122"/>
                 <a:cs typeface="Trebuchet MS" pitchFamily="34" charset="-120"/>
               </a:rPr>
-              <a:t>im</a:t>
+              <a:t>sup</a:t>
             </a:r>
             <a:endParaRPr lang="en-US" sz="1300" dirty="0"/>
           </a:p>
@@ -28366,7 +29953,7 @@
         </p:nvSpPr>
         <p:spPr>
           <a:xfrm>
-            <a:off x="2221992" y="2569464"/>
+            <a:off x="2938272" y="2569464"/>
             <a:ext cx="1828800" cy="201168"/>
           </a:xfrm>
           <a:prstGeom prst="rect">
@@ -28391,7 +29978,7 @@
                 <a:ea typeface="Calibri" pitchFamily="34" charset="-122"/>
                 <a:cs typeface="Calibri" pitchFamily="34" charset="-120"/>
               </a:rPr>
-              <a:t>into</a:t>
+              <a:t>under, up from below</a:t>
             </a:r>
             <a:endParaRPr lang="en-US" sz="850" dirty="0"/>
           </a:p>
@@ -28405,7 +29992,7 @@
         </p:nvSpPr>
         <p:spPr>
           <a:xfrm>
-            <a:off x="2221992" y="2752344"/>
+            <a:off x="2938272" y="2752344"/>
             <a:ext cx="1828800" cy="182880"/>
           </a:xfrm>
           <a:prstGeom prst="rect">
@@ -28430,7 +30017,7 @@
                 <a:ea typeface="Calibri" pitchFamily="34" charset="-122"/>
                 <a:cs typeface="Calibri" pitchFamily="34" charset="-120"/>
               </a:rPr>
-              <a:t>in → im before 'm/p'</a:t>
+              <a:t>sub → sup before 'p'</a:t>
             </a:r>
             <a:endParaRPr lang="en-US" sz="700" dirty="0"/>
           </a:p>
@@ -28444,7 +30031,7 @@
         </p:nvSpPr>
         <p:spPr>
           <a:xfrm>
-            <a:off x="4370832" y="2258568"/>
+            <a:off x="5803392" y="2258568"/>
             <a:ext cx="1828800" cy="292608"/>
           </a:xfrm>
           <a:prstGeom prst="rect">
@@ -28478,7 +30065,7 @@
         </p:nvSpPr>
         <p:spPr>
           <a:xfrm>
-            <a:off x="4370832" y="2258568"/>
+            <a:off x="5803392" y="2258568"/>
             <a:ext cx="1828800" cy="292608"/>
           </a:xfrm>
           <a:prstGeom prst="rect">
@@ -28517,7 +30104,7 @@
         </p:nvSpPr>
         <p:spPr>
           <a:xfrm>
-            <a:off x="4370832" y="2569464"/>
+            <a:off x="5803392" y="2569464"/>
             <a:ext cx="1828800" cy="201168"/>
           </a:xfrm>
           <a:prstGeom prst="rect">
@@ -28556,30 +30143,23 @@
         </p:nvSpPr>
         <p:spPr>
           <a:xfrm>
-            <a:off x="6519672" y="2258568"/>
-            <a:ext cx="1828800" cy="292608"/>
+            <a:off x="365760" y="3273552"/>
+            <a:ext cx="1371600" cy="658368"/>
           </a:xfrm>
           <a:prstGeom prst="rect">
             <a:avLst>
-              <a:gd name="adj" fmla="val 25000"/>
+              <a:gd name="adj" fmla="val 8333"/>
             </a:avLst>
           </a:prstGeom>
           <a:solidFill>
-            <a:srgbClr val="FCE7F3"/>
-          </a:solidFill>
-          <a:ln w="19050">
-            <a:solidFill>
-              <a:srgbClr val="DB2777"/>
-            </a:solidFill>
-            <a:prstDash val="solid"/>
-          </a:ln>
-          <a:effectLst>
-            <a:outerShdw sx="100000" sy="100000" kx="0" ky="0" algn="bl" rotWithShape="0" blurRad="101600" dist="38100" dir="8100000">
-              <a:srgbClr val="000000">
-                <a:alpha val="12000"/>
-              </a:srgbClr>
-            </a:outerShdw>
-          </a:effectLst>
+            <a:srgbClr val="E2E8F0"/>
+          </a:solidFill>
+          <a:ln w="12700">
+            <a:solidFill>
+              <a:srgbClr val="E2E8F0"/>
+            </a:solidFill>
+            <a:prstDash val="solid"/>
+          </a:ln>
         </p:spPr>
       </p:sp>
       <p:sp>
@@ -28590,8 +30170,8 @@
         </p:nvSpPr>
         <p:spPr>
           <a:xfrm>
-            <a:off x="6519672" y="2258568"/>
-            <a:ext cx="1828800" cy="292608"/>
+            <a:off x="365760" y="3273552"/>
+            <a:ext cx="1371600" cy="658368"/>
           </a:xfrm>
           <a:prstGeom prst="rect">
             <a:avLst/>
@@ -28607,73 +30187,100 @@
               <a:buNone/>
             </a:pPr>
             <a:r>
-              <a:rPr lang="en-US" sz="1300" b="1" dirty="0">
-                <a:solidFill>
-                  <a:srgbClr val="9D174D"/>
+              <a:rPr lang="en-US" sz="1100" b="1" dirty="0">
+                <a:solidFill>
+                  <a:srgbClr val="475569"/>
                 </a:solidFill>
                 <a:latin typeface="Trebuchet MS" pitchFamily="34" charset="0"/>
                 <a:ea typeface="Trebuchet MS" pitchFamily="34" charset="-122"/>
                 <a:cs typeface="Trebuchet MS" pitchFamily="34" charset="-120"/>
               </a:rPr>
-              <a:t>ation</a:t>
-            </a:r>
-            <a:endParaRPr lang="en-US" sz="1300" dirty="0"/>
-          </a:p>
-        </p:txBody>
-      </p:sp>
-      <p:sp>
-        <p:nvSpPr>
-          <p:cNvPr id="25" name="Text 23"/>
-          <p:cNvSpPr/>
-          <p:nvPr/>
-        </p:nvSpPr>
-        <p:spPr>
-          <a:xfrm>
-            <a:off x="6519672" y="2569464"/>
-            <a:ext cx="1828800" cy="201168"/>
-          </a:xfrm>
-          <a:prstGeom prst="rect">
-            <a:avLst/>
-          </a:prstGeom>
-          <a:noFill/>
-          <a:ln/>
-        </p:spPr>
-        <p:txBody>
-          <a:bodyPr wrap="square" lIns="0" tIns="0" rIns="0" bIns="0" rtlCol="0" anchor="t"/>
-          <a:lstStyle/>
-          <a:p>
-            <a:pPr algn="ctr" indent="0" marL="0">
-              <a:buNone/>
-            </a:pPr>
-            <a:r>
-              <a:rPr lang="en-US" sz="850" dirty="0">
-                <a:solidFill>
-                  <a:srgbClr val="475569"/>
+              <a:t>Syllables</a:t>
+            </a:r>
+            <a:endParaRPr lang="en-US" sz="1100" dirty="0"/>
+          </a:p>
+        </p:txBody>
+      </p:sp>
+      <p:sp>
+        <p:nvSpPr>
+          <p:cNvPr id="25" name="Shape 23"/>
+          <p:cNvSpPr/>
+          <p:nvPr/>
+        </p:nvSpPr>
+        <p:spPr>
+          <a:xfrm>
+            <a:off x="1874520" y="3273552"/>
+            <a:ext cx="6903720" cy="658368"/>
+          </a:xfrm>
+          <a:prstGeom prst="rect">
+            <a:avLst>
+              <a:gd name="adj" fmla="val 8333"/>
+            </a:avLst>
+          </a:prstGeom>
+          <a:solidFill>
+            <a:srgbClr val="F8FAFC"/>
+          </a:solidFill>
+          <a:ln w="12700">
+            <a:solidFill>
+              <a:srgbClr val="E2E8F0"/>
+            </a:solidFill>
+            <a:prstDash val="dash"/>
+          </a:ln>
+        </p:spPr>
+      </p:sp>
+      <p:sp>
+        <p:nvSpPr>
+          <p:cNvPr id="26" name="Text 24"/>
+          <p:cNvSpPr/>
+          <p:nvPr/>
+        </p:nvSpPr>
+        <p:spPr>
+          <a:xfrm>
+            <a:off x="1874520" y="3273552"/>
+            <a:ext cx="6903720" cy="658368"/>
+          </a:xfrm>
+          <a:prstGeom prst="rect">
+            <a:avLst/>
+          </a:prstGeom>
+          <a:noFill/>
+          <a:ln/>
+        </p:spPr>
+        <p:txBody>
+          <a:bodyPr wrap="square" rtlCol="0" anchor="ctr"/>
+          <a:lstStyle/>
+          <a:p>
+            <a:pPr algn="ctr" indent="0" marL="0">
+              <a:buNone/>
+            </a:pPr>
+            <a:r>
+              <a:rPr lang="en-US" sz="1100" i="1" dirty="0">
+                <a:solidFill>
+                  <a:srgbClr val="CBD5E1"/>
                 </a:solidFill>
                 <a:latin typeface="Calibri" pitchFamily="34" charset="0"/>
                 <a:ea typeface="Calibri" pitchFamily="34" charset="-122"/>
                 <a:cs typeface="Calibri" pitchFamily="34" charset="-120"/>
               </a:rPr>
-              <a:t>act or process of</a:t>
-            </a:r>
-            <a:endParaRPr lang="en-US" sz="850" dirty="0"/>
-          </a:p>
-        </p:txBody>
-      </p:sp>
-      <p:sp>
-        <p:nvSpPr>
-          <p:cNvPr id="26" name="Shape 24"/>
-          <p:cNvSpPr/>
-          <p:nvPr/>
-        </p:nvSpPr>
-        <p:spPr>
-          <a:xfrm>
-            <a:off x="365760" y="3273552"/>
-            <a:ext cx="1371600" cy="658368"/>
+              <a:t>Write here...</a:t>
+            </a:r>
+            <a:endParaRPr lang="en-US" sz="1100" dirty="0"/>
+          </a:p>
+        </p:txBody>
+      </p:sp>
+      <p:sp>
+        <p:nvSpPr>
+          <p:cNvPr id="27" name="Shape 25"/>
+          <p:cNvSpPr/>
+          <p:nvPr/>
+        </p:nvSpPr>
+        <p:spPr>
+          <a:xfrm>
+            <a:off x="365760" y="4096512"/>
+            <a:ext cx="1371600" cy="804672"/>
           </a:xfrm>
           <a:prstGeom prst="rect">
             <a:avLst>
-              <a:gd name="adj" fmla="val 8333"/>
+              <a:gd name="adj" fmla="val 6818"/>
             </a:avLst>
           </a:prstGeom>
           <a:solidFill>
@@ -28689,14 +30296,14 @@
       </p:sp>
       <p:sp>
         <p:nvSpPr>
-          <p:cNvPr id="27" name="Text 25"/>
-          <p:cNvSpPr/>
-          <p:nvPr/>
-        </p:nvSpPr>
-        <p:spPr>
-          <a:xfrm>
-            <a:off x="365760" y="3273552"/>
-            <a:ext cx="1371600" cy="658368"/>
+          <p:cNvPr id="28" name="Text 26"/>
+          <p:cNvSpPr/>
+          <p:nvPr/>
+        </p:nvSpPr>
+        <p:spPr>
+          <a:xfrm>
+            <a:off x="365760" y="4096512"/>
+            <a:ext cx="1371600" cy="804672"/>
           </a:xfrm>
           <a:prstGeom prst="rect">
             <a:avLst/>
@@ -28720,7 +30327,7 @@
                 <a:ea typeface="Trebuchet MS" pitchFamily="34" charset="-122"/>
                 <a:cs typeface="Trebuchet MS" pitchFamily="34" charset="-120"/>
               </a:rPr>
-              <a:t>Syllables</a:t>
+              <a:t>Phonemes</a:t>
             </a:r>
             <a:endParaRPr lang="en-US" sz="1100" dirty="0"/>
           </a:p>
@@ -28728,80 +30335,14 @@
       </p:sp>
       <p:sp>
         <p:nvSpPr>
-          <p:cNvPr id="28" name="Shape 26"/>
-          <p:cNvSpPr/>
-          <p:nvPr/>
-        </p:nvSpPr>
-        <p:spPr>
-          <a:xfrm>
-            <a:off x="1874520" y="3273552"/>
-            <a:ext cx="6903720" cy="658368"/>
-          </a:xfrm>
-          <a:prstGeom prst="rect">
-            <a:avLst>
-              <a:gd name="adj" fmla="val 8333"/>
-            </a:avLst>
-          </a:prstGeom>
-          <a:solidFill>
-            <a:srgbClr val="F8FAFC"/>
-          </a:solidFill>
-          <a:ln w="12700">
-            <a:solidFill>
-              <a:srgbClr val="E2E8F0"/>
-            </a:solidFill>
-            <a:prstDash val="dash"/>
-          </a:ln>
-        </p:spPr>
-      </p:sp>
-      <p:sp>
-        <p:nvSpPr>
-          <p:cNvPr id="29" name="Text 27"/>
-          <p:cNvSpPr/>
-          <p:nvPr/>
-        </p:nvSpPr>
-        <p:spPr>
-          <a:xfrm>
-            <a:off x="1874520" y="3273552"/>
-            <a:ext cx="6903720" cy="658368"/>
-          </a:xfrm>
-          <a:prstGeom prst="rect">
-            <a:avLst/>
-          </a:prstGeom>
-          <a:noFill/>
-          <a:ln/>
-        </p:spPr>
-        <p:txBody>
-          <a:bodyPr wrap="square" rtlCol="0" anchor="ctr"/>
-          <a:lstStyle/>
-          <a:p>
-            <a:pPr algn="ctr" indent="0" marL="0">
-              <a:buNone/>
-            </a:pPr>
-            <a:r>
-              <a:rPr lang="en-US" sz="1100" i="1" dirty="0">
-                <a:solidFill>
-                  <a:srgbClr val="CBD5E1"/>
-                </a:solidFill>
-                <a:latin typeface="Calibri" pitchFamily="34" charset="0"/>
-                <a:ea typeface="Calibri" pitchFamily="34" charset="-122"/>
-                <a:cs typeface="Calibri" pitchFamily="34" charset="-120"/>
-              </a:rPr>
-              <a:t>Write here...</a:t>
-            </a:r>
-            <a:endParaRPr lang="en-US" sz="1100" dirty="0"/>
-          </a:p>
-        </p:txBody>
-      </p:sp>
-      <p:sp>
-        <p:nvSpPr>
-          <p:cNvPr id="30" name="Shape 28"/>
-          <p:cNvSpPr/>
-          <p:nvPr/>
-        </p:nvSpPr>
-        <p:spPr>
-          <a:xfrm>
-            <a:off x="365760" y="4096512"/>
-            <a:ext cx="1371600" cy="804672"/>
+          <p:cNvPr id="29" name="Shape 27"/>
+          <p:cNvSpPr/>
+          <p:nvPr/>
+        </p:nvSpPr>
+        <p:spPr>
+          <a:xfrm>
+            <a:off x="1874520" y="4096512"/>
+            <a:ext cx="6903720" cy="804672"/>
           </a:xfrm>
           <a:prstGeom prst="rect">
             <a:avLst>
@@ -28809,85 +30350,19 @@
             </a:avLst>
           </a:prstGeom>
           <a:solidFill>
-            <a:srgbClr val="E2E8F0"/>
+            <a:srgbClr val="F8FAFC"/>
           </a:solidFill>
           <a:ln w="12700">
             <a:solidFill>
               <a:srgbClr val="E2E8F0"/>
             </a:solidFill>
-            <a:prstDash val="solid"/>
-          </a:ln>
-        </p:spPr>
-      </p:sp>
-      <p:sp>
-        <p:nvSpPr>
-          <p:cNvPr id="31" name="Text 29"/>
-          <p:cNvSpPr/>
-          <p:nvPr/>
-        </p:nvSpPr>
-        <p:spPr>
-          <a:xfrm>
-            <a:off x="365760" y="4096512"/>
-            <a:ext cx="1371600" cy="804672"/>
-          </a:xfrm>
-          <a:prstGeom prst="rect">
-            <a:avLst/>
-          </a:prstGeom>
-          <a:noFill/>
-          <a:ln/>
-        </p:spPr>
-        <p:txBody>
-          <a:bodyPr wrap="square" lIns="0" tIns="0" rIns="0" bIns="0" rtlCol="0" anchor="ctr"/>
-          <a:lstStyle/>
-          <a:p>
-            <a:pPr algn="ctr" indent="0" marL="0">
-              <a:buNone/>
-            </a:pPr>
-            <a:r>
-              <a:rPr lang="en-US" sz="1100" b="1" dirty="0">
-                <a:solidFill>
-                  <a:srgbClr val="475569"/>
-                </a:solidFill>
-                <a:latin typeface="Trebuchet MS" pitchFamily="34" charset="0"/>
-                <a:ea typeface="Trebuchet MS" pitchFamily="34" charset="-122"/>
-                <a:cs typeface="Trebuchet MS" pitchFamily="34" charset="-120"/>
-              </a:rPr>
-              <a:t>Phonemes</a:t>
-            </a:r>
-            <a:endParaRPr lang="en-US" sz="1100" dirty="0"/>
-          </a:p>
-        </p:txBody>
-      </p:sp>
-      <p:sp>
-        <p:nvSpPr>
-          <p:cNvPr id="32" name="Shape 30"/>
-          <p:cNvSpPr/>
-          <p:nvPr/>
-        </p:nvSpPr>
-        <p:spPr>
-          <a:xfrm>
-            <a:off x="1874520" y="4096512"/>
-            <a:ext cx="6903720" cy="804672"/>
-          </a:xfrm>
-          <a:prstGeom prst="rect">
-            <a:avLst>
-              <a:gd name="adj" fmla="val 6818"/>
-            </a:avLst>
-          </a:prstGeom>
-          <a:solidFill>
-            <a:srgbClr val="F8FAFC"/>
-          </a:solidFill>
-          <a:ln w="12700">
-            <a:solidFill>
-              <a:srgbClr val="E2E8F0"/>
-            </a:solidFill>
             <a:prstDash val="dash"/>
           </a:ln>
         </p:spPr>
       </p:sp>
       <p:sp>
         <p:nvSpPr>
-          <p:cNvPr id="33" name="Text 31"/>
+          <p:cNvPr id="30" name="Text 28"/>
           <p:cNvSpPr/>
           <p:nvPr/>
         </p:nvSpPr>
@@ -29210,7 +30685,7 @@
                 <a:ea typeface="Calibri" pitchFamily="34" charset="-122"/>
                 <a:cs typeface="Calibri" pitchFamily="34" charset="-120"/>
               </a:rPr>
-              <a:t>Word Labs  •  wordlabs.app  •  Root: 'port' = carry, bring, transport</a:t>
+              <a:t>Word Labs  •  wordlabs.app  •  Root: 'port' = carry, bring, bear</a:t>
             </a:r>
             <a:endParaRPr lang="en-US" sz="800" dirty="0"/>
           </a:p>
@@ -29349,7 +30824,7 @@
                 <a:ea typeface="Trebuchet MS" pitchFamily="34" charset="-122"/>
                 <a:cs typeface="Trebuchet MS" pitchFamily="34" charset="-120"/>
               </a:rPr>
-              <a:t>importation</a:t>
+              <a:t>support</a:t>
             </a:r>
             <a:endParaRPr lang="en-US" sz="2800" dirty="0"/>
           </a:p>
@@ -29429,7 +30904,7 @@
         </p:nvSpPr>
         <p:spPr>
           <a:xfrm>
-            <a:off x="2221992" y="2258568"/>
+            <a:off x="2938272" y="2258568"/>
             <a:ext cx="1828800" cy="292608"/>
           </a:xfrm>
           <a:prstGeom prst="rect">
@@ -29463,7 +30938,7 @@
         </p:nvSpPr>
         <p:spPr>
           <a:xfrm>
-            <a:off x="2221992" y="2258568"/>
+            <a:off x="2938272" y="2258568"/>
             <a:ext cx="1828800" cy="292608"/>
           </a:xfrm>
           <a:prstGeom prst="rect">
@@ -29488,7 +30963,7 @@
                 <a:ea typeface="Trebuchet MS" pitchFamily="34" charset="-122"/>
                 <a:cs typeface="Trebuchet MS" pitchFamily="34" charset="-120"/>
               </a:rPr>
-              <a:t>im</a:t>
+              <a:t>sup</a:t>
             </a:r>
             <a:endParaRPr lang="en-US" sz="1300" dirty="0"/>
           </a:p>
@@ -29502,7 +30977,7 @@
         </p:nvSpPr>
         <p:spPr>
           <a:xfrm>
-            <a:off x="2221992" y="2569464"/>
+            <a:off x="2938272" y="2569464"/>
             <a:ext cx="1828800" cy="201168"/>
           </a:xfrm>
           <a:prstGeom prst="rect">
@@ -29527,7 +31002,7 @@
                 <a:ea typeface="Calibri" pitchFamily="34" charset="-122"/>
                 <a:cs typeface="Calibri" pitchFamily="34" charset="-120"/>
               </a:rPr>
-              <a:t>into</a:t>
+              <a:t>under, up from below</a:t>
             </a:r>
             <a:endParaRPr lang="en-US" sz="850" dirty="0"/>
           </a:p>
@@ -29541,7 +31016,7 @@
         </p:nvSpPr>
         <p:spPr>
           <a:xfrm>
-            <a:off x="2221992" y="2752344"/>
+            <a:off x="2938272" y="2752344"/>
             <a:ext cx="1828800" cy="182880"/>
           </a:xfrm>
           <a:prstGeom prst="rect">
@@ -29566,7 +31041,7 @@
                 <a:ea typeface="Calibri" pitchFamily="34" charset="-122"/>
                 <a:cs typeface="Calibri" pitchFamily="34" charset="-120"/>
               </a:rPr>
-              <a:t>in → im before 'm/p'</a:t>
+              <a:t>sub → sup before 'p'</a:t>
             </a:r>
             <a:endParaRPr lang="en-US" sz="700" dirty="0"/>
           </a:p>
@@ -29580,7 +31055,7 @@
         </p:nvSpPr>
         <p:spPr>
           <a:xfrm>
-            <a:off x="4370832" y="2258568"/>
+            <a:off x="5803392" y="2258568"/>
             <a:ext cx="1828800" cy="292608"/>
           </a:xfrm>
           <a:prstGeom prst="rect">
@@ -29614,7 +31089,7 @@
         </p:nvSpPr>
         <p:spPr>
           <a:xfrm>
-            <a:off x="4370832" y="2258568"/>
+            <a:off x="5803392" y="2258568"/>
             <a:ext cx="1828800" cy="292608"/>
           </a:xfrm>
           <a:prstGeom prst="rect">
@@ -29653,7 +31128,7 @@
         </p:nvSpPr>
         <p:spPr>
           <a:xfrm>
-            <a:off x="4370832" y="2569464"/>
+            <a:off x="5803392" y="2569464"/>
             <a:ext cx="1828800" cy="201168"/>
           </a:xfrm>
           <a:prstGeom prst="rect">
@@ -29692,30 +31167,23 @@
         </p:nvSpPr>
         <p:spPr>
           <a:xfrm>
-            <a:off x="6519672" y="2258568"/>
-            <a:ext cx="1828800" cy="292608"/>
+            <a:off x="365760" y="3273552"/>
+            <a:ext cx="1371600" cy="658368"/>
           </a:xfrm>
           <a:prstGeom prst="rect">
             <a:avLst>
-              <a:gd name="adj" fmla="val 25000"/>
+              <a:gd name="adj" fmla="val 8333"/>
             </a:avLst>
           </a:prstGeom>
           <a:solidFill>
-            <a:srgbClr val="FCE7F3"/>
-          </a:solidFill>
-          <a:ln w="19050">
-            <a:solidFill>
-              <a:srgbClr val="DB2777"/>
-            </a:solidFill>
-            <a:prstDash val="solid"/>
-          </a:ln>
-          <a:effectLst>
-            <a:outerShdw sx="100000" sy="100000" kx="0" ky="0" algn="bl" rotWithShape="0" blurRad="101600" dist="38100" dir="8100000">
-              <a:srgbClr val="000000">
-                <a:alpha val="12000"/>
-              </a:srgbClr>
-            </a:outerShdw>
-          </a:effectLst>
+            <a:srgbClr val="E2E8F0"/>
+          </a:solidFill>
+          <a:ln w="12700">
+            <a:solidFill>
+              <a:srgbClr val="E2E8F0"/>
+            </a:solidFill>
+            <a:prstDash val="solid"/>
+          </a:ln>
         </p:spPr>
       </p:sp>
       <p:sp>
@@ -29726,8 +31194,8 @@
         </p:nvSpPr>
         <p:spPr>
           <a:xfrm>
-            <a:off x="6519672" y="2258568"/>
-            <a:ext cx="1828800" cy="292608"/>
+            <a:off x="365760" y="3273552"/>
+            <a:ext cx="1371600" cy="658368"/>
           </a:xfrm>
           <a:prstGeom prst="rect">
             <a:avLst/>
@@ -29743,69 +31211,30 @@
               <a:buNone/>
             </a:pPr>
             <a:r>
-              <a:rPr lang="en-US" sz="1300" b="1" dirty="0">
-                <a:solidFill>
-                  <a:srgbClr val="9D174D"/>
+              <a:rPr lang="en-US" sz="1100" b="1" dirty="0">
+                <a:solidFill>
+                  <a:srgbClr val="475569"/>
                 </a:solidFill>
                 <a:latin typeface="Trebuchet MS" pitchFamily="34" charset="0"/>
                 <a:ea typeface="Trebuchet MS" pitchFamily="34" charset="-122"/>
                 <a:cs typeface="Trebuchet MS" pitchFamily="34" charset="-120"/>
               </a:rPr>
-              <a:t>ation</a:t>
-            </a:r>
-            <a:endParaRPr lang="en-US" sz="1300" dirty="0"/>
-          </a:p>
-        </p:txBody>
-      </p:sp>
-      <p:sp>
-        <p:nvSpPr>
-          <p:cNvPr id="25" name="Text 23"/>
-          <p:cNvSpPr/>
-          <p:nvPr/>
-        </p:nvSpPr>
-        <p:spPr>
-          <a:xfrm>
-            <a:off x="6519672" y="2569464"/>
-            <a:ext cx="1828800" cy="201168"/>
-          </a:xfrm>
-          <a:prstGeom prst="rect">
-            <a:avLst/>
-          </a:prstGeom>
-          <a:noFill/>
-          <a:ln/>
-        </p:spPr>
-        <p:txBody>
-          <a:bodyPr wrap="square" lIns="0" tIns="0" rIns="0" bIns="0" rtlCol="0" anchor="t"/>
-          <a:lstStyle/>
-          <a:p>
-            <a:pPr algn="ctr" indent="0" marL="0">
-              <a:buNone/>
-            </a:pPr>
-            <a:r>
-              <a:rPr lang="en-US" sz="850" dirty="0">
-                <a:solidFill>
-                  <a:srgbClr val="475569"/>
-                </a:solidFill>
-                <a:latin typeface="Calibri" pitchFamily="34" charset="0"/>
-                <a:ea typeface="Calibri" pitchFamily="34" charset="-122"/>
-                <a:cs typeface="Calibri" pitchFamily="34" charset="-120"/>
-              </a:rPr>
-              <a:t>act or process of</a:t>
-            </a:r>
-            <a:endParaRPr lang="en-US" sz="850" dirty="0"/>
-          </a:p>
-        </p:txBody>
-      </p:sp>
-      <p:sp>
-        <p:nvSpPr>
-          <p:cNvPr id="26" name="Shape 24"/>
-          <p:cNvSpPr/>
-          <p:nvPr/>
-        </p:nvSpPr>
-        <p:spPr>
-          <a:xfrm>
-            <a:off x="365760" y="3273552"/>
-            <a:ext cx="1371600" cy="658368"/>
+              <a:t>Syllables</a:t>
+            </a:r>
+            <a:endParaRPr lang="en-US" sz="1100" dirty="0"/>
+          </a:p>
+        </p:txBody>
+      </p:sp>
+      <p:sp>
+        <p:nvSpPr>
+          <p:cNvPr id="25" name="Shape 23"/>
+          <p:cNvSpPr/>
+          <p:nvPr/>
+        </p:nvSpPr>
+        <p:spPr>
+          <a:xfrm>
+            <a:off x="1874520" y="3273552"/>
+            <a:ext cx="6903720" cy="658368"/>
           </a:xfrm>
           <a:prstGeom prst="rect">
             <a:avLst>
@@ -29813,11 +31242,38 @@
             </a:avLst>
           </a:prstGeom>
           <a:solidFill>
-            <a:srgbClr val="E2E8F0"/>
-          </a:solidFill>
-          <a:ln w="12700">
-            <a:solidFill>
-              <a:srgbClr val="E2E8F0"/>
+            <a:srgbClr val="CCFBF1"/>
+          </a:solidFill>
+          <a:ln w="12700">
+            <a:solidFill>
+              <a:srgbClr val="0D9488"/>
+            </a:solidFill>
+            <a:prstDash val="solid"/>
+          </a:ln>
+        </p:spPr>
+      </p:sp>
+      <p:sp>
+        <p:nvSpPr>
+          <p:cNvPr id="26" name="Shape 24"/>
+          <p:cNvSpPr/>
+          <p:nvPr/>
+        </p:nvSpPr>
+        <p:spPr>
+          <a:xfrm>
+            <a:off x="2999232" y="3364992"/>
+            <a:ext cx="1645920" cy="475488"/>
+          </a:xfrm>
+          <a:prstGeom prst="rect">
+            <a:avLst>
+              <a:gd name="adj" fmla="val 9615"/>
+            </a:avLst>
+          </a:prstGeom>
+          <a:solidFill>
+            <a:srgbClr val="FFFFFF"/>
+          </a:solidFill>
+          <a:ln w="12700">
+            <a:solidFill>
+              <a:srgbClr val="0D9488"/>
             </a:solidFill>
             <a:prstDash val="solid"/>
           </a:ln>
@@ -29831,8 +31287,8 @@
         </p:nvSpPr>
         <p:spPr>
           <a:xfrm>
-            <a:off x="365760" y="3273552"/>
-            <a:ext cx="1371600" cy="658368"/>
+            <a:off x="2999232" y="3364992"/>
+            <a:ext cx="1645920" cy="475488"/>
           </a:xfrm>
           <a:prstGeom prst="rect">
             <a:avLst/>
@@ -29848,46 +31304,58 @@
               <a:buNone/>
             </a:pPr>
             <a:r>
-              <a:rPr lang="en-US" sz="1100" b="1" dirty="0">
-                <a:solidFill>
-                  <a:srgbClr val="475569"/>
+              <a:rPr lang="en-US" sz="1400" b="1" dirty="0">
+                <a:solidFill>
+                  <a:srgbClr val="0D9488"/>
                 </a:solidFill>
                 <a:latin typeface="Trebuchet MS" pitchFamily="34" charset="0"/>
                 <a:ea typeface="Trebuchet MS" pitchFamily="34" charset="-122"/>
                 <a:cs typeface="Trebuchet MS" pitchFamily="34" charset="-120"/>
               </a:rPr>
-              <a:t>Syllables</a:t>
-            </a:r>
-            <a:endParaRPr lang="en-US" sz="1100" dirty="0"/>
-          </a:p>
-        </p:txBody>
-      </p:sp>
-      <p:sp>
-        <p:nvSpPr>
-          <p:cNvPr id="28" name="Shape 26"/>
-          <p:cNvSpPr/>
-          <p:nvPr/>
-        </p:nvSpPr>
-        <p:spPr>
-          <a:xfrm>
-            <a:off x="1874520" y="3273552"/>
-            <a:ext cx="6903720" cy="658368"/>
-          </a:xfrm>
-          <a:prstGeom prst="rect">
-            <a:avLst>
-              <a:gd name="adj" fmla="val 8333"/>
-            </a:avLst>
-          </a:prstGeom>
-          <a:solidFill>
-            <a:srgbClr val="CCFBF1"/>
-          </a:solidFill>
-          <a:ln w="12700">
-            <a:solidFill>
-              <a:srgbClr val="0D9488"/>
-            </a:solidFill>
-            <a:prstDash val="solid"/>
-          </a:ln>
-        </p:spPr>
+              <a:t>sup</a:t>
+            </a:r>
+            <a:endParaRPr lang="en-US" sz="1400" dirty="0"/>
+          </a:p>
+        </p:txBody>
+      </p:sp>
+      <p:sp>
+        <p:nvSpPr>
+          <p:cNvPr id="28" name="Text 26"/>
+          <p:cNvSpPr/>
+          <p:nvPr/>
+        </p:nvSpPr>
+        <p:spPr>
+          <a:xfrm>
+            <a:off x="4645152" y="3364992"/>
+            <a:ext cx="1097280" cy="475488"/>
+          </a:xfrm>
+          <a:prstGeom prst="rect">
+            <a:avLst/>
+          </a:prstGeom>
+          <a:noFill/>
+          <a:ln/>
+        </p:spPr>
+        <p:txBody>
+          <a:bodyPr wrap="square" lIns="0" tIns="0" rIns="0" bIns="0" rtlCol="0" anchor="ctr"/>
+          <a:lstStyle/>
+          <a:p>
+            <a:pPr algn="ctr" indent="0" marL="0">
+              <a:buNone/>
+            </a:pPr>
+            <a:r>
+              <a:rPr lang="en-US" sz="1600" b="1" dirty="0">
+                <a:solidFill>
+                  <a:srgbClr val="0D9488"/>
+                </a:solidFill>
+                <a:latin typeface="Trebuchet MS" pitchFamily="34" charset="0"/>
+                <a:ea typeface="Trebuchet MS" pitchFamily="34" charset="-122"/>
+                <a:cs typeface="Trebuchet MS" pitchFamily="34" charset="-120"/>
+              </a:rPr>
+              <a:t>·</a:t>
+            </a:r>
+            <a:endParaRPr lang="en-US" sz="1600" dirty="0"/>
+          </a:p>
+        </p:txBody>
       </p:sp>
       <p:sp>
         <p:nvSpPr>
@@ -29897,8 +31365,8 @@
         </p:nvSpPr>
         <p:spPr>
           <a:xfrm>
-            <a:off x="1975104" y="3364992"/>
-            <a:ext cx="1554480" cy="475488"/>
+            <a:off x="5742432" y="3364992"/>
+            <a:ext cx="1645920" cy="475488"/>
           </a:xfrm>
           <a:prstGeom prst="rect">
             <a:avLst>
@@ -29924,8 +31392,8 @@
         </p:nvSpPr>
         <p:spPr>
           <a:xfrm>
-            <a:off x="1975104" y="3364992"/>
-            <a:ext cx="1554480" cy="475488"/>
+            <a:off x="5742432" y="3364992"/>
+            <a:ext cx="1645920" cy="475488"/>
           </a:xfrm>
           <a:prstGeom prst="rect">
             <a:avLst/>
@@ -29949,7 +31417,7 @@
                 <a:ea typeface="Trebuchet MS" pitchFamily="34" charset="-122"/>
                 <a:cs typeface="Trebuchet MS" pitchFamily="34" charset="-120"/>
               </a:rPr>
-              <a:t>im</a:t>
+              <a:t>port</a:t>
             </a:r>
             <a:endParaRPr lang="en-US" sz="1400" dirty="0"/>
           </a:p>
@@ -29957,14 +31425,41 @@
       </p:sp>
       <p:sp>
         <p:nvSpPr>
-          <p:cNvPr id="31" name="Text 29"/>
-          <p:cNvSpPr/>
-          <p:nvPr/>
-        </p:nvSpPr>
-        <p:spPr>
-          <a:xfrm>
-            <a:off x="3529584" y="3364992"/>
-            <a:ext cx="73152" cy="475488"/>
+          <p:cNvPr id="31" name="Shape 29"/>
+          <p:cNvSpPr/>
+          <p:nvPr/>
+        </p:nvSpPr>
+        <p:spPr>
+          <a:xfrm>
+            <a:off x="365760" y="4096512"/>
+            <a:ext cx="1371600" cy="804672"/>
+          </a:xfrm>
+          <a:prstGeom prst="rect">
+            <a:avLst>
+              <a:gd name="adj" fmla="val 6818"/>
+            </a:avLst>
+          </a:prstGeom>
+          <a:solidFill>
+            <a:srgbClr val="E2E8F0"/>
+          </a:solidFill>
+          <a:ln w="12700">
+            <a:solidFill>
+              <a:srgbClr val="E2E8F0"/>
+            </a:solidFill>
+            <a:prstDash val="solid"/>
+          </a:ln>
+        </p:spPr>
+      </p:sp>
+      <p:sp>
+        <p:nvSpPr>
+          <p:cNvPr id="32" name="Text 30"/>
+          <p:cNvSpPr/>
+          <p:nvPr/>
+        </p:nvSpPr>
+        <p:spPr>
+          <a:xfrm>
+            <a:off x="365760" y="4096512"/>
+            <a:ext cx="1371600" cy="804672"/>
           </a:xfrm>
           <a:prstGeom prst="rect">
             <a:avLst/>
@@ -29980,306 +31475,30 @@
               <a:buNone/>
             </a:pPr>
             <a:r>
-              <a:rPr lang="en-US" sz="1600" b="1" dirty="0">
-                <a:solidFill>
-                  <a:srgbClr val="0D9488"/>
+              <a:rPr lang="en-US" sz="1100" b="1" dirty="0">
+                <a:solidFill>
+                  <a:srgbClr val="475569"/>
                 </a:solidFill>
                 <a:latin typeface="Trebuchet MS" pitchFamily="34" charset="0"/>
                 <a:ea typeface="Trebuchet MS" pitchFamily="34" charset="-122"/>
                 <a:cs typeface="Trebuchet MS" pitchFamily="34" charset="-120"/>
               </a:rPr>
-              <a:t>·</a:t>
-            </a:r>
-            <a:endParaRPr lang="en-US" sz="1600" dirty="0"/>
-          </a:p>
-        </p:txBody>
-      </p:sp>
-      <p:sp>
-        <p:nvSpPr>
-          <p:cNvPr id="32" name="Shape 30"/>
-          <p:cNvSpPr/>
-          <p:nvPr/>
-        </p:nvSpPr>
-        <p:spPr>
-          <a:xfrm>
-            <a:off x="3602736" y="3364992"/>
-            <a:ext cx="1554480" cy="475488"/>
-          </a:xfrm>
-          <a:prstGeom prst="rect">
-            <a:avLst>
-              <a:gd name="adj" fmla="val 9615"/>
-            </a:avLst>
-          </a:prstGeom>
-          <a:solidFill>
-            <a:srgbClr val="FFFFFF"/>
-          </a:solidFill>
-          <a:ln w="12700">
-            <a:solidFill>
-              <a:srgbClr val="0D9488"/>
-            </a:solidFill>
-            <a:prstDash val="solid"/>
-          </a:ln>
-        </p:spPr>
-      </p:sp>
-      <p:sp>
-        <p:nvSpPr>
-          <p:cNvPr id="33" name="Text 31"/>
-          <p:cNvSpPr/>
-          <p:nvPr/>
-        </p:nvSpPr>
-        <p:spPr>
-          <a:xfrm>
-            <a:off x="3602736" y="3364992"/>
-            <a:ext cx="1554480" cy="475488"/>
-          </a:xfrm>
-          <a:prstGeom prst="rect">
-            <a:avLst/>
-          </a:prstGeom>
-          <a:noFill/>
-          <a:ln/>
-        </p:spPr>
-        <p:txBody>
-          <a:bodyPr wrap="square" lIns="0" tIns="0" rIns="0" bIns="0" rtlCol="0" anchor="ctr"/>
-          <a:lstStyle/>
-          <a:p>
-            <a:pPr algn="ctr" indent="0" marL="0">
-              <a:buNone/>
-            </a:pPr>
-            <a:r>
-              <a:rPr lang="en-US" sz="1400" b="1" dirty="0">
-                <a:solidFill>
-                  <a:srgbClr val="0D9488"/>
-                </a:solidFill>
-                <a:latin typeface="Trebuchet MS" pitchFamily="34" charset="0"/>
-                <a:ea typeface="Trebuchet MS" pitchFamily="34" charset="-122"/>
-                <a:cs typeface="Trebuchet MS" pitchFamily="34" charset="-120"/>
-              </a:rPr>
-              <a:t>por</a:t>
-            </a:r>
-            <a:endParaRPr lang="en-US" sz="1400" dirty="0"/>
-          </a:p>
-        </p:txBody>
-      </p:sp>
-      <p:sp>
-        <p:nvSpPr>
-          <p:cNvPr id="34" name="Text 32"/>
-          <p:cNvSpPr/>
-          <p:nvPr/>
-        </p:nvSpPr>
-        <p:spPr>
-          <a:xfrm>
-            <a:off x="5157216" y="3364992"/>
-            <a:ext cx="73152" cy="475488"/>
-          </a:xfrm>
-          <a:prstGeom prst="rect">
-            <a:avLst/>
-          </a:prstGeom>
-          <a:noFill/>
-          <a:ln/>
-        </p:spPr>
-        <p:txBody>
-          <a:bodyPr wrap="square" lIns="0" tIns="0" rIns="0" bIns="0" rtlCol="0" anchor="ctr"/>
-          <a:lstStyle/>
-          <a:p>
-            <a:pPr algn="ctr" indent="0" marL="0">
-              <a:buNone/>
-            </a:pPr>
-            <a:r>
-              <a:rPr lang="en-US" sz="1600" b="1" dirty="0">
-                <a:solidFill>
-                  <a:srgbClr val="0D9488"/>
-                </a:solidFill>
-                <a:latin typeface="Trebuchet MS" pitchFamily="34" charset="0"/>
-                <a:ea typeface="Trebuchet MS" pitchFamily="34" charset="-122"/>
-                <a:cs typeface="Trebuchet MS" pitchFamily="34" charset="-120"/>
-              </a:rPr>
-              <a:t>·</a:t>
-            </a:r>
-            <a:endParaRPr lang="en-US" sz="1600" dirty="0"/>
-          </a:p>
-        </p:txBody>
-      </p:sp>
-      <p:sp>
-        <p:nvSpPr>
-          <p:cNvPr id="35" name="Shape 33"/>
-          <p:cNvSpPr/>
-          <p:nvPr/>
-        </p:nvSpPr>
-        <p:spPr>
-          <a:xfrm>
-            <a:off x="5230368" y="3364992"/>
-            <a:ext cx="1554480" cy="475488"/>
-          </a:xfrm>
-          <a:prstGeom prst="rect">
-            <a:avLst>
-              <a:gd name="adj" fmla="val 9615"/>
-            </a:avLst>
-          </a:prstGeom>
-          <a:solidFill>
-            <a:srgbClr val="FFFFFF"/>
-          </a:solidFill>
-          <a:ln w="12700">
-            <a:solidFill>
-              <a:srgbClr val="0D9488"/>
-            </a:solidFill>
-            <a:prstDash val="solid"/>
-          </a:ln>
-        </p:spPr>
-      </p:sp>
-      <p:sp>
-        <p:nvSpPr>
-          <p:cNvPr id="36" name="Text 34"/>
-          <p:cNvSpPr/>
-          <p:nvPr/>
-        </p:nvSpPr>
-        <p:spPr>
-          <a:xfrm>
-            <a:off x="5230368" y="3364992"/>
-            <a:ext cx="1554480" cy="475488"/>
-          </a:xfrm>
-          <a:prstGeom prst="rect">
-            <a:avLst/>
-          </a:prstGeom>
-          <a:noFill/>
-          <a:ln/>
-        </p:spPr>
-        <p:txBody>
-          <a:bodyPr wrap="square" lIns="0" tIns="0" rIns="0" bIns="0" rtlCol="0" anchor="ctr"/>
-          <a:lstStyle/>
-          <a:p>
-            <a:pPr algn="ctr" indent="0" marL="0">
-              <a:buNone/>
-            </a:pPr>
-            <a:r>
-              <a:rPr lang="en-US" sz="1400" b="1" dirty="0">
-                <a:solidFill>
-                  <a:srgbClr val="0D9488"/>
-                </a:solidFill>
-                <a:latin typeface="Trebuchet MS" pitchFamily="34" charset="0"/>
-                <a:ea typeface="Trebuchet MS" pitchFamily="34" charset="-122"/>
-                <a:cs typeface="Trebuchet MS" pitchFamily="34" charset="-120"/>
-              </a:rPr>
-              <a:t>ta</a:t>
-            </a:r>
-            <a:endParaRPr lang="en-US" sz="1400" dirty="0"/>
-          </a:p>
-        </p:txBody>
-      </p:sp>
-      <p:sp>
-        <p:nvSpPr>
-          <p:cNvPr id="37" name="Text 35"/>
-          <p:cNvSpPr/>
-          <p:nvPr/>
-        </p:nvSpPr>
-        <p:spPr>
-          <a:xfrm>
-            <a:off x="6784848" y="3364992"/>
-            <a:ext cx="73152" cy="475488"/>
-          </a:xfrm>
-          <a:prstGeom prst="rect">
-            <a:avLst/>
-          </a:prstGeom>
-          <a:noFill/>
-          <a:ln/>
-        </p:spPr>
-        <p:txBody>
-          <a:bodyPr wrap="square" lIns="0" tIns="0" rIns="0" bIns="0" rtlCol="0" anchor="ctr"/>
-          <a:lstStyle/>
-          <a:p>
-            <a:pPr algn="ctr" indent="0" marL="0">
-              <a:buNone/>
-            </a:pPr>
-            <a:r>
-              <a:rPr lang="en-US" sz="1600" b="1" dirty="0">
-                <a:solidFill>
-                  <a:srgbClr val="0D9488"/>
-                </a:solidFill>
-                <a:latin typeface="Trebuchet MS" pitchFamily="34" charset="0"/>
-                <a:ea typeface="Trebuchet MS" pitchFamily="34" charset="-122"/>
-                <a:cs typeface="Trebuchet MS" pitchFamily="34" charset="-120"/>
-              </a:rPr>
-              <a:t>·</a:t>
-            </a:r>
-            <a:endParaRPr lang="en-US" sz="1600" dirty="0"/>
-          </a:p>
-        </p:txBody>
-      </p:sp>
-      <p:sp>
-        <p:nvSpPr>
-          <p:cNvPr id="38" name="Shape 36"/>
-          <p:cNvSpPr/>
-          <p:nvPr/>
-        </p:nvSpPr>
-        <p:spPr>
-          <a:xfrm>
-            <a:off x="6858000" y="3364992"/>
-            <a:ext cx="1554480" cy="475488"/>
-          </a:xfrm>
-          <a:prstGeom prst="rect">
-            <a:avLst>
-              <a:gd name="adj" fmla="val 9615"/>
-            </a:avLst>
-          </a:prstGeom>
-          <a:solidFill>
-            <a:srgbClr val="FFFFFF"/>
-          </a:solidFill>
-          <a:ln w="12700">
-            <a:solidFill>
-              <a:srgbClr val="0D9488"/>
-            </a:solidFill>
-            <a:prstDash val="solid"/>
-          </a:ln>
-        </p:spPr>
-      </p:sp>
-      <p:sp>
-        <p:nvSpPr>
-          <p:cNvPr id="39" name="Text 37"/>
-          <p:cNvSpPr/>
-          <p:nvPr/>
-        </p:nvSpPr>
-        <p:spPr>
-          <a:xfrm>
-            <a:off x="6858000" y="3364992"/>
-            <a:ext cx="1554480" cy="475488"/>
-          </a:xfrm>
-          <a:prstGeom prst="rect">
-            <a:avLst/>
-          </a:prstGeom>
-          <a:noFill/>
-          <a:ln/>
-        </p:spPr>
-        <p:txBody>
-          <a:bodyPr wrap="square" lIns="0" tIns="0" rIns="0" bIns="0" rtlCol="0" anchor="ctr"/>
-          <a:lstStyle/>
-          <a:p>
-            <a:pPr algn="ctr" indent="0" marL="0">
-              <a:buNone/>
-            </a:pPr>
-            <a:r>
-              <a:rPr lang="en-US" sz="1400" b="1" dirty="0">
-                <a:solidFill>
-                  <a:srgbClr val="0D9488"/>
-                </a:solidFill>
-                <a:latin typeface="Trebuchet MS" pitchFamily="34" charset="0"/>
-                <a:ea typeface="Trebuchet MS" pitchFamily="34" charset="-122"/>
-                <a:cs typeface="Trebuchet MS" pitchFamily="34" charset="-120"/>
-              </a:rPr>
-              <a:t>tion</a:t>
-            </a:r>
-            <a:endParaRPr lang="en-US" sz="1400" dirty="0"/>
-          </a:p>
-        </p:txBody>
-      </p:sp>
-      <p:sp>
-        <p:nvSpPr>
-          <p:cNvPr id="40" name="Shape 38"/>
-          <p:cNvSpPr/>
-          <p:nvPr/>
-        </p:nvSpPr>
-        <p:spPr>
-          <a:xfrm>
-            <a:off x="365760" y="4096512"/>
-            <a:ext cx="1371600" cy="804672"/>
+              <a:t>Phonemes</a:t>
+            </a:r>
+            <a:endParaRPr lang="en-US" sz="1100" dirty="0"/>
+          </a:p>
+        </p:txBody>
+      </p:sp>
+      <p:sp>
+        <p:nvSpPr>
+          <p:cNvPr id="33" name="Shape 31"/>
+          <p:cNvSpPr/>
+          <p:nvPr/>
+        </p:nvSpPr>
+        <p:spPr>
+          <a:xfrm>
+            <a:off x="1874520" y="4096512"/>
+            <a:ext cx="6903720" cy="804672"/>
           </a:xfrm>
           <a:prstGeom prst="rect">
             <a:avLst>
@@ -30287,85 +31506,19 @@
             </a:avLst>
           </a:prstGeom>
           <a:solidFill>
-            <a:srgbClr val="E2E8F0"/>
+            <a:srgbClr val="F8FAFC"/>
           </a:solidFill>
           <a:ln w="12700">
             <a:solidFill>
               <a:srgbClr val="E2E8F0"/>
             </a:solidFill>
-            <a:prstDash val="solid"/>
-          </a:ln>
-        </p:spPr>
-      </p:sp>
-      <p:sp>
-        <p:nvSpPr>
-          <p:cNvPr id="41" name="Text 39"/>
-          <p:cNvSpPr/>
-          <p:nvPr/>
-        </p:nvSpPr>
-        <p:spPr>
-          <a:xfrm>
-            <a:off x="365760" y="4096512"/>
-            <a:ext cx="1371600" cy="804672"/>
-          </a:xfrm>
-          <a:prstGeom prst="rect">
-            <a:avLst/>
-          </a:prstGeom>
-          <a:noFill/>
-          <a:ln/>
-        </p:spPr>
-        <p:txBody>
-          <a:bodyPr wrap="square" lIns="0" tIns="0" rIns="0" bIns="0" rtlCol="0" anchor="ctr"/>
-          <a:lstStyle/>
-          <a:p>
-            <a:pPr algn="ctr" indent="0" marL="0">
-              <a:buNone/>
-            </a:pPr>
-            <a:r>
-              <a:rPr lang="en-US" sz="1100" b="1" dirty="0">
-                <a:solidFill>
-                  <a:srgbClr val="475569"/>
-                </a:solidFill>
-                <a:latin typeface="Trebuchet MS" pitchFamily="34" charset="0"/>
-                <a:ea typeface="Trebuchet MS" pitchFamily="34" charset="-122"/>
-                <a:cs typeface="Trebuchet MS" pitchFamily="34" charset="-120"/>
-              </a:rPr>
-              <a:t>Phonemes</a:t>
-            </a:r>
-            <a:endParaRPr lang="en-US" sz="1100" dirty="0"/>
-          </a:p>
-        </p:txBody>
-      </p:sp>
-      <p:sp>
-        <p:nvSpPr>
-          <p:cNvPr id="42" name="Shape 40"/>
-          <p:cNvSpPr/>
-          <p:nvPr/>
-        </p:nvSpPr>
-        <p:spPr>
-          <a:xfrm>
-            <a:off x="1874520" y="4096512"/>
-            <a:ext cx="6903720" cy="804672"/>
-          </a:xfrm>
-          <a:prstGeom prst="rect">
-            <a:avLst>
-              <a:gd name="adj" fmla="val 6818"/>
-            </a:avLst>
-          </a:prstGeom>
-          <a:solidFill>
-            <a:srgbClr val="F8FAFC"/>
-          </a:solidFill>
-          <a:ln w="12700">
-            <a:solidFill>
-              <a:srgbClr val="E2E8F0"/>
-            </a:solidFill>
             <a:prstDash val="dash"/>
           </a:ln>
         </p:spPr>
       </p:sp>
       <p:sp>
         <p:nvSpPr>
-          <p:cNvPr id="43" name="Text 41"/>
+          <p:cNvPr id="34" name="Text 32"/>
           <p:cNvSpPr/>
           <p:nvPr/>
         </p:nvSpPr>
@@ -30688,7 +31841,7 @@
                 <a:ea typeface="Calibri" pitchFamily="34" charset="-122"/>
                 <a:cs typeface="Calibri" pitchFamily="34" charset="-120"/>
               </a:rPr>
-              <a:t>Word Labs  •  wordlabs.app  •  Root: 'port' = carry, bring, transport</a:t>
+              <a:t>Word Labs  •  wordlabs.app  •  Root: 'port' = carry, bring, bear</a:t>
             </a:r>
             <a:endParaRPr lang="en-US" sz="800" dirty="0"/>
           </a:p>
@@ -30827,7 +31980,7 @@
                 <a:ea typeface="Trebuchet MS" pitchFamily="34" charset="-122"/>
                 <a:cs typeface="Trebuchet MS" pitchFamily="34" charset="-120"/>
               </a:rPr>
-              <a:t>importation</a:t>
+              <a:t>support</a:t>
             </a:r>
             <a:endParaRPr lang="en-US" sz="2800" dirty="0"/>
           </a:p>
@@ -30907,7 +32060,7 @@
         </p:nvSpPr>
         <p:spPr>
           <a:xfrm>
-            <a:off x="2221992" y="2258568"/>
+            <a:off x="2938272" y="2258568"/>
             <a:ext cx="1828800" cy="292608"/>
           </a:xfrm>
           <a:prstGeom prst="rect">
@@ -30941,7 +32094,7 @@
         </p:nvSpPr>
         <p:spPr>
           <a:xfrm>
-            <a:off x="2221992" y="2258568"/>
+            <a:off x="2938272" y="2258568"/>
             <a:ext cx="1828800" cy="292608"/>
           </a:xfrm>
           <a:prstGeom prst="rect">
@@ -30966,7 +32119,7 @@
                 <a:ea typeface="Trebuchet MS" pitchFamily="34" charset="-122"/>
                 <a:cs typeface="Trebuchet MS" pitchFamily="34" charset="-120"/>
               </a:rPr>
-              <a:t>im</a:t>
+              <a:t>sup</a:t>
             </a:r>
             <a:endParaRPr lang="en-US" sz="1300" dirty="0"/>
           </a:p>
@@ -30980,7 +32133,7 @@
         </p:nvSpPr>
         <p:spPr>
           <a:xfrm>
-            <a:off x="2221992" y="2569464"/>
+            <a:off x="2938272" y="2569464"/>
             <a:ext cx="1828800" cy="201168"/>
           </a:xfrm>
           <a:prstGeom prst="rect">
@@ -31005,7 +32158,7 @@
                 <a:ea typeface="Calibri" pitchFamily="34" charset="-122"/>
                 <a:cs typeface="Calibri" pitchFamily="34" charset="-120"/>
               </a:rPr>
-              <a:t>into</a:t>
+              <a:t>under, up from below</a:t>
             </a:r>
             <a:endParaRPr lang="en-US" sz="850" dirty="0"/>
           </a:p>
@@ -31019,7 +32172,7 @@
         </p:nvSpPr>
         <p:spPr>
           <a:xfrm>
-            <a:off x="2221992" y="2752344"/>
+            <a:off x="2938272" y="2752344"/>
             <a:ext cx="1828800" cy="182880"/>
           </a:xfrm>
           <a:prstGeom prst="rect">
@@ -31044,7 +32197,7 @@
                 <a:ea typeface="Calibri" pitchFamily="34" charset="-122"/>
                 <a:cs typeface="Calibri" pitchFamily="34" charset="-120"/>
               </a:rPr>
-              <a:t>in → im before 'm/p'</a:t>
+              <a:t>sub → sup before 'p'</a:t>
             </a:r>
             <a:endParaRPr lang="en-US" sz="700" dirty="0"/>
           </a:p>
@@ -31058,7 +32211,7 @@
         </p:nvSpPr>
         <p:spPr>
           <a:xfrm>
-            <a:off x="4370832" y="2258568"/>
+            <a:off x="5803392" y="2258568"/>
             <a:ext cx="1828800" cy="292608"/>
           </a:xfrm>
           <a:prstGeom prst="rect">
@@ -31092,7 +32245,7 @@
         </p:nvSpPr>
         <p:spPr>
           <a:xfrm>
-            <a:off x="4370832" y="2258568"/>
+            <a:off x="5803392" y="2258568"/>
             <a:ext cx="1828800" cy="292608"/>
           </a:xfrm>
           <a:prstGeom prst="rect">
@@ -31131,7 +32284,7 @@
         </p:nvSpPr>
         <p:spPr>
           <a:xfrm>
-            <a:off x="4370832" y="2569464"/>
+            <a:off x="5803392" y="2569464"/>
             <a:ext cx="1828800" cy="201168"/>
           </a:xfrm>
           <a:prstGeom prst="rect">
@@ -31170,30 +32323,23 @@
         </p:nvSpPr>
         <p:spPr>
           <a:xfrm>
-            <a:off x="6519672" y="2258568"/>
-            <a:ext cx="1828800" cy="292608"/>
+            <a:off x="365760" y="3273552"/>
+            <a:ext cx="1371600" cy="658368"/>
           </a:xfrm>
           <a:prstGeom prst="rect">
             <a:avLst>
-              <a:gd name="adj" fmla="val 25000"/>
+              <a:gd name="adj" fmla="val 8333"/>
             </a:avLst>
           </a:prstGeom>
           <a:solidFill>
-            <a:srgbClr val="FCE7F3"/>
-          </a:solidFill>
-          <a:ln w="19050">
-            <a:solidFill>
-              <a:srgbClr val="DB2777"/>
-            </a:solidFill>
-            <a:prstDash val="solid"/>
-          </a:ln>
-          <a:effectLst>
-            <a:outerShdw sx="100000" sy="100000" kx="0" ky="0" algn="bl" rotWithShape="0" blurRad="101600" dist="38100" dir="8100000">
-              <a:srgbClr val="000000">
-                <a:alpha val="12000"/>
-              </a:srgbClr>
-            </a:outerShdw>
-          </a:effectLst>
+            <a:srgbClr val="E2E8F0"/>
+          </a:solidFill>
+          <a:ln w="12700">
+            <a:solidFill>
+              <a:srgbClr val="E2E8F0"/>
+            </a:solidFill>
+            <a:prstDash val="solid"/>
+          </a:ln>
         </p:spPr>
       </p:sp>
       <p:sp>
@@ -31204,8 +32350,8 @@
         </p:nvSpPr>
         <p:spPr>
           <a:xfrm>
-            <a:off x="6519672" y="2258568"/>
-            <a:ext cx="1828800" cy="292608"/>
+            <a:off x="365760" y="3273552"/>
+            <a:ext cx="1371600" cy="658368"/>
           </a:xfrm>
           <a:prstGeom prst="rect">
             <a:avLst/>
@@ -31221,69 +32367,30 @@
               <a:buNone/>
             </a:pPr>
             <a:r>
-              <a:rPr lang="en-US" sz="1300" b="1" dirty="0">
-                <a:solidFill>
-                  <a:srgbClr val="9D174D"/>
+              <a:rPr lang="en-US" sz="1100" b="1" dirty="0">
+                <a:solidFill>
+                  <a:srgbClr val="475569"/>
                 </a:solidFill>
                 <a:latin typeface="Trebuchet MS" pitchFamily="34" charset="0"/>
                 <a:ea typeface="Trebuchet MS" pitchFamily="34" charset="-122"/>
                 <a:cs typeface="Trebuchet MS" pitchFamily="34" charset="-120"/>
               </a:rPr>
-              <a:t>ation</a:t>
-            </a:r>
-            <a:endParaRPr lang="en-US" sz="1300" dirty="0"/>
-          </a:p>
-        </p:txBody>
-      </p:sp>
-      <p:sp>
-        <p:nvSpPr>
-          <p:cNvPr id="25" name="Text 23"/>
-          <p:cNvSpPr/>
-          <p:nvPr/>
-        </p:nvSpPr>
-        <p:spPr>
-          <a:xfrm>
-            <a:off x="6519672" y="2569464"/>
-            <a:ext cx="1828800" cy="201168"/>
-          </a:xfrm>
-          <a:prstGeom prst="rect">
-            <a:avLst/>
-          </a:prstGeom>
-          <a:noFill/>
-          <a:ln/>
-        </p:spPr>
-        <p:txBody>
-          <a:bodyPr wrap="square" lIns="0" tIns="0" rIns="0" bIns="0" rtlCol="0" anchor="t"/>
-          <a:lstStyle/>
-          <a:p>
-            <a:pPr algn="ctr" indent="0" marL="0">
-              <a:buNone/>
-            </a:pPr>
-            <a:r>
-              <a:rPr lang="en-US" sz="850" dirty="0">
-                <a:solidFill>
-                  <a:srgbClr val="475569"/>
-                </a:solidFill>
-                <a:latin typeface="Calibri" pitchFamily="34" charset="0"/>
-                <a:ea typeface="Calibri" pitchFamily="34" charset="-122"/>
-                <a:cs typeface="Calibri" pitchFamily="34" charset="-120"/>
-              </a:rPr>
-              <a:t>act or process of</a:t>
-            </a:r>
-            <a:endParaRPr lang="en-US" sz="850" dirty="0"/>
-          </a:p>
-        </p:txBody>
-      </p:sp>
-      <p:sp>
-        <p:nvSpPr>
-          <p:cNvPr id="26" name="Shape 24"/>
-          <p:cNvSpPr/>
-          <p:nvPr/>
-        </p:nvSpPr>
-        <p:spPr>
-          <a:xfrm>
-            <a:off x="365760" y="3273552"/>
-            <a:ext cx="1371600" cy="658368"/>
+              <a:t>Syllables</a:t>
+            </a:r>
+            <a:endParaRPr lang="en-US" sz="1100" dirty="0"/>
+          </a:p>
+        </p:txBody>
+      </p:sp>
+      <p:sp>
+        <p:nvSpPr>
+          <p:cNvPr id="25" name="Shape 23"/>
+          <p:cNvSpPr/>
+          <p:nvPr/>
+        </p:nvSpPr>
+        <p:spPr>
+          <a:xfrm>
+            <a:off x="1874520" y="3273552"/>
+            <a:ext cx="6903720" cy="658368"/>
           </a:xfrm>
           <a:prstGeom prst="rect">
             <a:avLst>
@@ -31291,11 +32398,38 @@
             </a:avLst>
           </a:prstGeom>
           <a:solidFill>
-            <a:srgbClr val="E2E8F0"/>
-          </a:solidFill>
-          <a:ln w="12700">
-            <a:solidFill>
-              <a:srgbClr val="E2E8F0"/>
+            <a:srgbClr val="CCFBF1"/>
+          </a:solidFill>
+          <a:ln w="12700">
+            <a:solidFill>
+              <a:srgbClr val="0D9488"/>
+            </a:solidFill>
+            <a:prstDash val="solid"/>
+          </a:ln>
+        </p:spPr>
+      </p:sp>
+      <p:sp>
+        <p:nvSpPr>
+          <p:cNvPr id="26" name="Shape 24"/>
+          <p:cNvSpPr/>
+          <p:nvPr/>
+        </p:nvSpPr>
+        <p:spPr>
+          <a:xfrm>
+            <a:off x="2999232" y="3364992"/>
+            <a:ext cx="1645920" cy="475488"/>
+          </a:xfrm>
+          <a:prstGeom prst="rect">
+            <a:avLst>
+              <a:gd name="adj" fmla="val 9615"/>
+            </a:avLst>
+          </a:prstGeom>
+          <a:solidFill>
+            <a:srgbClr val="FFFFFF"/>
+          </a:solidFill>
+          <a:ln w="12700">
+            <a:solidFill>
+              <a:srgbClr val="0D9488"/>
             </a:solidFill>
             <a:prstDash val="solid"/>
           </a:ln>
@@ -31309,8 +32443,8 @@
         </p:nvSpPr>
         <p:spPr>
           <a:xfrm>
-            <a:off x="365760" y="3273552"/>
-            <a:ext cx="1371600" cy="658368"/>
+            <a:off x="2999232" y="3364992"/>
+            <a:ext cx="1645920" cy="475488"/>
           </a:xfrm>
           <a:prstGeom prst="rect">
             <a:avLst/>
@@ -31326,15 +32460,186 @@
               <a:buNone/>
             </a:pPr>
             <a:r>
-              <a:rPr lang="en-US" sz="1100" b="1" dirty="0">
-                <a:solidFill>
-                  <a:srgbClr val="475569"/>
+              <a:rPr lang="en-US" sz="1400" b="1" dirty="0">
+                <a:solidFill>
+                  <a:srgbClr val="0D9488"/>
                 </a:solidFill>
                 <a:latin typeface="Trebuchet MS" pitchFamily="34" charset="0"/>
                 <a:ea typeface="Trebuchet MS" pitchFamily="34" charset="-122"/>
                 <a:cs typeface="Trebuchet MS" pitchFamily="34" charset="-120"/>
               </a:rPr>
-              <a:t>Syllables</a:t>
+              <a:t>sup</a:t>
+            </a:r>
+            <a:endParaRPr lang="en-US" sz="1400" dirty="0"/>
+          </a:p>
+        </p:txBody>
+      </p:sp>
+      <p:sp>
+        <p:nvSpPr>
+          <p:cNvPr id="28" name="Text 26"/>
+          <p:cNvSpPr/>
+          <p:nvPr/>
+        </p:nvSpPr>
+        <p:spPr>
+          <a:xfrm>
+            <a:off x="4645152" y="3364992"/>
+            <a:ext cx="1097280" cy="475488"/>
+          </a:xfrm>
+          <a:prstGeom prst="rect">
+            <a:avLst/>
+          </a:prstGeom>
+          <a:noFill/>
+          <a:ln/>
+        </p:spPr>
+        <p:txBody>
+          <a:bodyPr wrap="square" lIns="0" tIns="0" rIns="0" bIns="0" rtlCol="0" anchor="ctr"/>
+          <a:lstStyle/>
+          <a:p>
+            <a:pPr algn="ctr" indent="0" marL="0">
+              <a:buNone/>
+            </a:pPr>
+            <a:r>
+              <a:rPr lang="en-US" sz="1600" b="1" dirty="0">
+                <a:solidFill>
+                  <a:srgbClr val="0D9488"/>
+                </a:solidFill>
+                <a:latin typeface="Trebuchet MS" pitchFamily="34" charset="0"/>
+                <a:ea typeface="Trebuchet MS" pitchFamily="34" charset="-122"/>
+                <a:cs typeface="Trebuchet MS" pitchFamily="34" charset="-120"/>
+              </a:rPr>
+              <a:t>·</a:t>
+            </a:r>
+            <a:endParaRPr lang="en-US" sz="1600" dirty="0"/>
+          </a:p>
+        </p:txBody>
+      </p:sp>
+      <p:sp>
+        <p:nvSpPr>
+          <p:cNvPr id="29" name="Shape 27"/>
+          <p:cNvSpPr/>
+          <p:nvPr/>
+        </p:nvSpPr>
+        <p:spPr>
+          <a:xfrm>
+            <a:off x="5742432" y="3364992"/>
+            <a:ext cx="1645920" cy="475488"/>
+          </a:xfrm>
+          <a:prstGeom prst="rect">
+            <a:avLst>
+              <a:gd name="adj" fmla="val 9615"/>
+            </a:avLst>
+          </a:prstGeom>
+          <a:solidFill>
+            <a:srgbClr val="FFFFFF"/>
+          </a:solidFill>
+          <a:ln w="12700">
+            <a:solidFill>
+              <a:srgbClr val="0D9488"/>
+            </a:solidFill>
+            <a:prstDash val="solid"/>
+          </a:ln>
+        </p:spPr>
+      </p:sp>
+      <p:sp>
+        <p:nvSpPr>
+          <p:cNvPr id="30" name="Text 28"/>
+          <p:cNvSpPr/>
+          <p:nvPr/>
+        </p:nvSpPr>
+        <p:spPr>
+          <a:xfrm>
+            <a:off x="5742432" y="3364992"/>
+            <a:ext cx="1645920" cy="475488"/>
+          </a:xfrm>
+          <a:prstGeom prst="rect">
+            <a:avLst/>
+          </a:prstGeom>
+          <a:noFill/>
+          <a:ln/>
+        </p:spPr>
+        <p:txBody>
+          <a:bodyPr wrap="square" lIns="0" tIns="0" rIns="0" bIns="0" rtlCol="0" anchor="ctr"/>
+          <a:lstStyle/>
+          <a:p>
+            <a:pPr algn="ctr" indent="0" marL="0">
+              <a:buNone/>
+            </a:pPr>
+            <a:r>
+              <a:rPr lang="en-US" sz="1400" b="1" dirty="0">
+                <a:solidFill>
+                  <a:srgbClr val="0D9488"/>
+                </a:solidFill>
+                <a:latin typeface="Trebuchet MS" pitchFamily="34" charset="0"/>
+                <a:ea typeface="Trebuchet MS" pitchFamily="34" charset="-122"/>
+                <a:cs typeface="Trebuchet MS" pitchFamily="34" charset="-120"/>
+              </a:rPr>
+              <a:t>port</a:t>
+            </a:r>
+            <a:endParaRPr lang="en-US" sz="1400" dirty="0"/>
+          </a:p>
+        </p:txBody>
+      </p:sp>
+      <p:sp>
+        <p:nvSpPr>
+          <p:cNvPr id="31" name="Shape 29"/>
+          <p:cNvSpPr/>
+          <p:nvPr/>
+        </p:nvSpPr>
+        <p:spPr>
+          <a:xfrm>
+            <a:off x="365760" y="4096512"/>
+            <a:ext cx="1371600" cy="804672"/>
+          </a:xfrm>
+          <a:prstGeom prst="rect">
+            <a:avLst>
+              <a:gd name="adj" fmla="val 6818"/>
+            </a:avLst>
+          </a:prstGeom>
+          <a:solidFill>
+            <a:srgbClr val="E2E8F0"/>
+          </a:solidFill>
+          <a:ln w="12700">
+            <a:solidFill>
+              <a:srgbClr val="E2E8F0"/>
+            </a:solidFill>
+            <a:prstDash val="solid"/>
+          </a:ln>
+        </p:spPr>
+      </p:sp>
+      <p:sp>
+        <p:nvSpPr>
+          <p:cNvPr id="32" name="Text 30"/>
+          <p:cNvSpPr/>
+          <p:nvPr/>
+        </p:nvSpPr>
+        <p:spPr>
+          <a:xfrm>
+            <a:off x="365760" y="4096512"/>
+            <a:ext cx="1371600" cy="804672"/>
+          </a:xfrm>
+          <a:prstGeom prst="rect">
+            <a:avLst/>
+          </a:prstGeom>
+          <a:noFill/>
+          <a:ln/>
+        </p:spPr>
+        <p:txBody>
+          <a:bodyPr wrap="square" lIns="0" tIns="0" rIns="0" bIns="0" rtlCol="0" anchor="ctr"/>
+          <a:lstStyle/>
+          <a:p>
+            <a:pPr algn="ctr" indent="0" marL="0">
+              <a:buNone/>
+            </a:pPr>
+            <a:r>
+              <a:rPr lang="en-US" sz="1100" b="1" dirty="0">
+                <a:solidFill>
+                  <a:srgbClr val="475569"/>
+                </a:solidFill>
+                <a:latin typeface="Trebuchet MS" pitchFamily="34" charset="0"/>
+                <a:ea typeface="Trebuchet MS" pitchFamily="34" charset="-122"/>
+                <a:cs typeface="Trebuchet MS" pitchFamily="34" charset="-120"/>
+              </a:rPr>
+              <a:t>Phonemes</a:t>
             </a:r>
             <a:endParaRPr lang="en-US" sz="1100" dirty="0"/>
           </a:p>
@@ -31342,13 +32647,13 @@
       </p:sp>
       <p:sp>
         <p:nvSpPr>
-          <p:cNvPr id="28" name="Shape 26"/>
-          <p:cNvSpPr/>
-          <p:nvPr/>
-        </p:nvSpPr>
-        <p:spPr>
-          <a:xfrm>
-            <a:off x="1874520" y="3273552"/>
+          <p:cNvPr id="33" name="Shape 31"/>
+          <p:cNvSpPr/>
+          <p:nvPr/>
+        </p:nvSpPr>
+        <p:spPr>
+          <a:xfrm>
+            <a:off x="1874520" y="4096512"/>
             <a:ext cx="6903720" cy="658368"/>
           </a:xfrm>
           <a:prstGeom prst="rect">
@@ -31357,30 +32662,30 @@
             </a:avLst>
           </a:prstGeom>
           <a:solidFill>
-            <a:srgbClr val="CCFBF1"/>
-          </a:solidFill>
-          <a:ln w="12700">
-            <a:solidFill>
-              <a:srgbClr val="0D9488"/>
-            </a:solidFill>
-            <a:prstDash val="solid"/>
-          </a:ln>
-        </p:spPr>
-      </p:sp>
-      <p:sp>
-        <p:nvSpPr>
-          <p:cNvPr id="29" name="Shape 27"/>
-          <p:cNvSpPr/>
-          <p:nvPr/>
-        </p:nvSpPr>
-        <p:spPr>
-          <a:xfrm>
-            <a:off x="1975104" y="3364992"/>
-            <a:ext cx="1554480" cy="475488"/>
+            <a:srgbClr val="FCE7F3"/>
+          </a:solidFill>
+          <a:ln w="12700">
+            <a:solidFill>
+              <a:srgbClr val="DB2777"/>
+            </a:solidFill>
+            <a:prstDash val="solid"/>
+          </a:ln>
+        </p:spPr>
+      </p:sp>
+      <p:sp>
+        <p:nvSpPr>
+          <p:cNvPr id="34" name="Shape 32"/>
+          <p:cNvSpPr/>
+          <p:nvPr/>
+        </p:nvSpPr>
+        <p:spPr>
+          <a:xfrm>
+            <a:off x="2427732" y="4169664"/>
+            <a:ext cx="685800" cy="475488"/>
           </a:xfrm>
           <a:prstGeom prst="rect">
             <a:avLst>
-              <a:gd name="adj" fmla="val 9615"/>
+              <a:gd name="adj" fmla="val 7692"/>
             </a:avLst>
           </a:prstGeom>
           <a:solidFill>
@@ -31388,22 +32693,22 @@
           </a:solidFill>
           <a:ln w="12700">
             <a:solidFill>
-              <a:srgbClr val="0D9488"/>
-            </a:solidFill>
-            <a:prstDash val="solid"/>
-          </a:ln>
-        </p:spPr>
-      </p:sp>
-      <p:sp>
-        <p:nvSpPr>
-          <p:cNvPr id="30" name="Text 28"/>
-          <p:cNvSpPr/>
-          <p:nvPr/>
-        </p:nvSpPr>
-        <p:spPr>
-          <a:xfrm>
-            <a:off x="1975104" y="3364992"/>
-            <a:ext cx="1554480" cy="475488"/>
+              <a:srgbClr val="DB2777"/>
+            </a:solidFill>
+            <a:prstDash val="solid"/>
+          </a:ln>
+        </p:spPr>
+      </p:sp>
+      <p:sp>
+        <p:nvSpPr>
+          <p:cNvPr id="35" name="Text 33"/>
+          <p:cNvSpPr/>
+          <p:nvPr/>
+        </p:nvSpPr>
+        <p:spPr>
+          <a:xfrm>
+            <a:off x="2427732" y="4169664"/>
+            <a:ext cx="685800" cy="475488"/>
           </a:xfrm>
           <a:prstGeom prst="rect">
             <a:avLst/>
@@ -31419,30 +32724,57 @@
               <a:buNone/>
             </a:pPr>
             <a:r>
-              <a:rPr lang="en-US" sz="1400" b="1" dirty="0">
-                <a:solidFill>
-                  <a:srgbClr val="0D9488"/>
+              <a:rPr lang="en-US" sz="900" b="1" dirty="0">
+                <a:solidFill>
+                  <a:srgbClr val="9D174D"/>
                 </a:solidFill>
                 <a:latin typeface="Trebuchet MS" pitchFamily="34" charset="0"/>
                 <a:ea typeface="Trebuchet MS" pitchFamily="34" charset="-122"/>
                 <a:cs typeface="Trebuchet MS" pitchFamily="34" charset="-120"/>
               </a:rPr>
-              <a:t>im</a:t>
-            </a:r>
-            <a:endParaRPr lang="en-US" sz="1400" dirty="0"/>
-          </a:p>
-        </p:txBody>
-      </p:sp>
-      <p:sp>
-        <p:nvSpPr>
-          <p:cNvPr id="31" name="Text 29"/>
-          <p:cNvSpPr/>
-          <p:nvPr/>
-        </p:nvSpPr>
-        <p:spPr>
-          <a:xfrm>
-            <a:off x="3529584" y="3364992"/>
-            <a:ext cx="73152" cy="475488"/>
+              <a:t>s</a:t>
+            </a:r>
+            <a:endParaRPr lang="en-US" sz="900" dirty="0"/>
+          </a:p>
+        </p:txBody>
+      </p:sp>
+      <p:sp>
+        <p:nvSpPr>
+          <p:cNvPr id="36" name="Shape 34"/>
+          <p:cNvSpPr/>
+          <p:nvPr/>
+        </p:nvSpPr>
+        <p:spPr>
+          <a:xfrm>
+            <a:off x="3639312" y="4169664"/>
+            <a:ext cx="685800" cy="475488"/>
+          </a:xfrm>
+          <a:prstGeom prst="rect">
+            <a:avLst>
+              <a:gd name="adj" fmla="val 7692"/>
+            </a:avLst>
+          </a:prstGeom>
+          <a:solidFill>
+            <a:srgbClr val="FFFFFF"/>
+          </a:solidFill>
+          <a:ln w="12700">
+            <a:solidFill>
+              <a:srgbClr val="DB2777"/>
+            </a:solidFill>
+            <a:prstDash val="solid"/>
+          </a:ln>
+        </p:spPr>
+      </p:sp>
+      <p:sp>
+        <p:nvSpPr>
+          <p:cNvPr id="37" name="Text 35"/>
+          <p:cNvSpPr/>
+          <p:nvPr/>
+        </p:nvSpPr>
+        <p:spPr>
+          <a:xfrm>
+            <a:off x="3639312" y="4169664"/>
+            <a:ext cx="685800" cy="475488"/>
           </a:xfrm>
           <a:prstGeom prst="rect">
             <a:avLst/>
@@ -31458,34 +32790,34 @@
               <a:buNone/>
             </a:pPr>
             <a:r>
-              <a:rPr lang="en-US" sz="1600" b="1" dirty="0">
-                <a:solidFill>
-                  <a:srgbClr val="0D9488"/>
+              <a:rPr lang="en-US" sz="900" b="1" dirty="0">
+                <a:solidFill>
+                  <a:srgbClr val="9D174D"/>
                 </a:solidFill>
                 <a:latin typeface="Trebuchet MS" pitchFamily="34" charset="0"/>
                 <a:ea typeface="Trebuchet MS" pitchFamily="34" charset="-122"/>
                 <a:cs typeface="Trebuchet MS" pitchFamily="34" charset="-120"/>
               </a:rPr>
-              <a:t>·</a:t>
-            </a:r>
-            <a:endParaRPr lang="en-US" sz="1600" dirty="0"/>
-          </a:p>
-        </p:txBody>
-      </p:sp>
-      <p:sp>
-        <p:nvSpPr>
-          <p:cNvPr id="32" name="Shape 30"/>
-          <p:cNvSpPr/>
-          <p:nvPr/>
-        </p:nvSpPr>
-        <p:spPr>
-          <a:xfrm>
-            <a:off x="3602736" y="3364992"/>
-            <a:ext cx="1554480" cy="475488"/>
+              <a:t>u</a:t>
+            </a:r>
+            <a:endParaRPr lang="en-US" sz="900" dirty="0"/>
+          </a:p>
+        </p:txBody>
+      </p:sp>
+      <p:sp>
+        <p:nvSpPr>
+          <p:cNvPr id="38" name="Shape 36"/>
+          <p:cNvSpPr/>
+          <p:nvPr/>
+        </p:nvSpPr>
+        <p:spPr>
+          <a:xfrm>
+            <a:off x="4850892" y="4169664"/>
+            <a:ext cx="685800" cy="475488"/>
           </a:xfrm>
           <a:prstGeom prst="rect">
             <a:avLst>
-              <a:gd name="adj" fmla="val 9615"/>
+              <a:gd name="adj" fmla="val 7692"/>
             </a:avLst>
           </a:prstGeom>
           <a:solidFill>
@@ -31493,22 +32825,22 @@
           </a:solidFill>
           <a:ln w="12700">
             <a:solidFill>
-              <a:srgbClr val="0D9488"/>
-            </a:solidFill>
-            <a:prstDash val="solid"/>
-          </a:ln>
-        </p:spPr>
-      </p:sp>
-      <p:sp>
-        <p:nvSpPr>
-          <p:cNvPr id="33" name="Text 31"/>
-          <p:cNvSpPr/>
-          <p:nvPr/>
-        </p:nvSpPr>
-        <p:spPr>
-          <a:xfrm>
-            <a:off x="3602736" y="3364992"/>
-            <a:ext cx="1554480" cy="475488"/>
+              <a:srgbClr val="DB2777"/>
+            </a:solidFill>
+            <a:prstDash val="solid"/>
+          </a:ln>
+        </p:spPr>
+      </p:sp>
+      <p:sp>
+        <p:nvSpPr>
+          <p:cNvPr id="39" name="Text 37"/>
+          <p:cNvSpPr/>
+          <p:nvPr/>
+        </p:nvSpPr>
+        <p:spPr>
+          <a:xfrm>
+            <a:off x="4850892" y="4169664"/>
+            <a:ext cx="685800" cy="475488"/>
           </a:xfrm>
           <a:prstGeom prst="rect">
             <a:avLst/>
@@ -31524,30 +32856,57 @@
               <a:buNone/>
             </a:pPr>
             <a:r>
-              <a:rPr lang="en-US" sz="1400" b="1" dirty="0">
-                <a:solidFill>
-                  <a:srgbClr val="0D9488"/>
+              <a:rPr lang="en-US" sz="900" b="1" dirty="0">
+                <a:solidFill>
+                  <a:srgbClr val="9D174D"/>
                 </a:solidFill>
                 <a:latin typeface="Trebuchet MS" pitchFamily="34" charset="0"/>
                 <a:ea typeface="Trebuchet MS" pitchFamily="34" charset="-122"/>
                 <a:cs typeface="Trebuchet MS" pitchFamily="34" charset="-120"/>
               </a:rPr>
-              <a:t>por</a:t>
-            </a:r>
-            <a:endParaRPr lang="en-US" sz="1400" dirty="0"/>
-          </a:p>
-        </p:txBody>
-      </p:sp>
-      <p:sp>
-        <p:nvSpPr>
-          <p:cNvPr id="34" name="Text 32"/>
-          <p:cNvSpPr/>
-          <p:nvPr/>
-        </p:nvSpPr>
-        <p:spPr>
-          <a:xfrm>
-            <a:off x="5157216" y="3364992"/>
-            <a:ext cx="73152" cy="475488"/>
+              <a:t>pp</a:t>
+            </a:r>
+            <a:endParaRPr lang="en-US" sz="900" dirty="0"/>
+          </a:p>
+        </p:txBody>
+      </p:sp>
+      <p:sp>
+        <p:nvSpPr>
+          <p:cNvPr id="40" name="Shape 38"/>
+          <p:cNvSpPr/>
+          <p:nvPr/>
+        </p:nvSpPr>
+        <p:spPr>
+          <a:xfrm>
+            <a:off x="6062472" y="4169664"/>
+            <a:ext cx="685800" cy="475488"/>
+          </a:xfrm>
+          <a:prstGeom prst="rect">
+            <a:avLst>
+              <a:gd name="adj" fmla="val 7692"/>
+            </a:avLst>
+          </a:prstGeom>
+          <a:solidFill>
+            <a:srgbClr val="FFFFFF"/>
+          </a:solidFill>
+          <a:ln w="12700">
+            <a:solidFill>
+              <a:srgbClr val="DB2777"/>
+            </a:solidFill>
+            <a:prstDash val="solid"/>
+          </a:ln>
+        </p:spPr>
+      </p:sp>
+      <p:sp>
+        <p:nvSpPr>
+          <p:cNvPr id="41" name="Text 39"/>
+          <p:cNvSpPr/>
+          <p:nvPr/>
+        </p:nvSpPr>
+        <p:spPr>
+          <a:xfrm>
+            <a:off x="6062472" y="4169664"/>
+            <a:ext cx="685800" cy="475488"/>
           </a:xfrm>
           <a:prstGeom prst="rect">
             <a:avLst/>
@@ -31563,34 +32922,34 @@
               <a:buNone/>
             </a:pPr>
             <a:r>
-              <a:rPr lang="en-US" sz="1600" b="1" dirty="0">
-                <a:solidFill>
-                  <a:srgbClr val="0D9488"/>
+              <a:rPr lang="en-US" sz="900" b="1" dirty="0">
+                <a:solidFill>
+                  <a:srgbClr val="9D174D"/>
                 </a:solidFill>
                 <a:latin typeface="Trebuchet MS" pitchFamily="34" charset="0"/>
                 <a:ea typeface="Trebuchet MS" pitchFamily="34" charset="-122"/>
                 <a:cs typeface="Trebuchet MS" pitchFamily="34" charset="-120"/>
               </a:rPr>
-              <a:t>·</a:t>
-            </a:r>
-            <a:endParaRPr lang="en-US" sz="1600" dirty="0"/>
-          </a:p>
-        </p:txBody>
-      </p:sp>
-      <p:sp>
-        <p:nvSpPr>
-          <p:cNvPr id="35" name="Shape 33"/>
-          <p:cNvSpPr/>
-          <p:nvPr/>
-        </p:nvSpPr>
-        <p:spPr>
-          <a:xfrm>
-            <a:off x="5230368" y="3364992"/>
-            <a:ext cx="1554480" cy="475488"/>
+              <a:t>or</a:t>
+            </a:r>
+            <a:endParaRPr lang="en-US" sz="900" dirty="0"/>
+          </a:p>
+        </p:txBody>
+      </p:sp>
+      <p:sp>
+        <p:nvSpPr>
+          <p:cNvPr id="42" name="Shape 40"/>
+          <p:cNvSpPr/>
+          <p:nvPr/>
+        </p:nvSpPr>
+        <p:spPr>
+          <a:xfrm>
+            <a:off x="7274052" y="4169664"/>
+            <a:ext cx="685800" cy="475488"/>
           </a:xfrm>
           <a:prstGeom prst="rect">
             <a:avLst>
-              <a:gd name="adj" fmla="val 9615"/>
+              <a:gd name="adj" fmla="val 7692"/>
             </a:avLst>
           </a:prstGeom>
           <a:solidFill>
@@ -31598,22 +32957,22 @@
           </a:solidFill>
           <a:ln w="12700">
             <a:solidFill>
-              <a:srgbClr val="0D9488"/>
-            </a:solidFill>
-            <a:prstDash val="solid"/>
-          </a:ln>
-        </p:spPr>
-      </p:sp>
-      <p:sp>
-        <p:nvSpPr>
-          <p:cNvPr id="36" name="Text 34"/>
-          <p:cNvSpPr/>
-          <p:nvPr/>
-        </p:nvSpPr>
-        <p:spPr>
-          <a:xfrm>
-            <a:off x="5230368" y="3364992"/>
-            <a:ext cx="1554480" cy="475488"/>
+              <a:srgbClr val="DB2777"/>
+            </a:solidFill>
+            <a:prstDash val="solid"/>
+          </a:ln>
+        </p:spPr>
+      </p:sp>
+      <p:sp>
+        <p:nvSpPr>
+          <p:cNvPr id="43" name="Text 41"/>
+          <p:cNvSpPr/>
+          <p:nvPr/>
+        </p:nvSpPr>
+        <p:spPr>
+          <a:xfrm>
+            <a:off x="7274052" y="4169664"/>
+            <a:ext cx="685800" cy="475488"/>
           </a:xfrm>
           <a:prstGeom prst="rect">
             <a:avLst/>
@@ -31629,846 +32988,15 @@
               <a:buNone/>
             </a:pPr>
             <a:r>
-              <a:rPr lang="en-US" sz="1400" b="1" dirty="0">
-                <a:solidFill>
-                  <a:srgbClr val="0D9488"/>
+              <a:rPr lang="en-US" sz="900" b="1" dirty="0">
+                <a:solidFill>
+                  <a:srgbClr val="9D174D"/>
                 </a:solidFill>
                 <a:latin typeface="Trebuchet MS" pitchFamily="34" charset="0"/>
                 <a:ea typeface="Trebuchet MS" pitchFamily="34" charset="-122"/>
                 <a:cs typeface="Trebuchet MS" pitchFamily="34" charset="-120"/>
               </a:rPr>
-              <a:t>ta</a:t>
-            </a:r>
-            <a:endParaRPr lang="en-US" sz="1400" dirty="0"/>
-          </a:p>
-        </p:txBody>
-      </p:sp>
-      <p:sp>
-        <p:nvSpPr>
-          <p:cNvPr id="37" name="Text 35"/>
-          <p:cNvSpPr/>
-          <p:nvPr/>
-        </p:nvSpPr>
-        <p:spPr>
-          <a:xfrm>
-            <a:off x="6784848" y="3364992"/>
-            <a:ext cx="73152" cy="475488"/>
-          </a:xfrm>
-          <a:prstGeom prst="rect">
-            <a:avLst/>
-          </a:prstGeom>
-          <a:noFill/>
-          <a:ln/>
-        </p:spPr>
-        <p:txBody>
-          <a:bodyPr wrap="square" lIns="0" tIns="0" rIns="0" bIns="0" rtlCol="0" anchor="ctr"/>
-          <a:lstStyle/>
-          <a:p>
-            <a:pPr algn="ctr" indent="0" marL="0">
-              <a:buNone/>
-            </a:pPr>
-            <a:r>
-              <a:rPr lang="en-US" sz="1600" b="1" dirty="0">
-                <a:solidFill>
-                  <a:srgbClr val="0D9488"/>
-                </a:solidFill>
-                <a:latin typeface="Trebuchet MS" pitchFamily="34" charset="0"/>
-                <a:ea typeface="Trebuchet MS" pitchFamily="34" charset="-122"/>
-                <a:cs typeface="Trebuchet MS" pitchFamily="34" charset="-120"/>
-              </a:rPr>
-              <a:t>·</a:t>
-            </a:r>
-            <a:endParaRPr lang="en-US" sz="1600" dirty="0"/>
-          </a:p>
-        </p:txBody>
-      </p:sp>
-      <p:sp>
-        <p:nvSpPr>
-          <p:cNvPr id="38" name="Shape 36"/>
-          <p:cNvSpPr/>
-          <p:nvPr/>
-        </p:nvSpPr>
-        <p:spPr>
-          <a:xfrm>
-            <a:off x="6858000" y="3364992"/>
-            <a:ext cx="1554480" cy="475488"/>
-          </a:xfrm>
-          <a:prstGeom prst="rect">
-            <a:avLst>
-              <a:gd name="adj" fmla="val 9615"/>
-            </a:avLst>
-          </a:prstGeom>
-          <a:solidFill>
-            <a:srgbClr val="FFFFFF"/>
-          </a:solidFill>
-          <a:ln w="12700">
-            <a:solidFill>
-              <a:srgbClr val="0D9488"/>
-            </a:solidFill>
-            <a:prstDash val="solid"/>
-          </a:ln>
-        </p:spPr>
-      </p:sp>
-      <p:sp>
-        <p:nvSpPr>
-          <p:cNvPr id="39" name="Text 37"/>
-          <p:cNvSpPr/>
-          <p:nvPr/>
-        </p:nvSpPr>
-        <p:spPr>
-          <a:xfrm>
-            <a:off x="6858000" y="3364992"/>
-            <a:ext cx="1554480" cy="475488"/>
-          </a:xfrm>
-          <a:prstGeom prst="rect">
-            <a:avLst/>
-          </a:prstGeom>
-          <a:noFill/>
-          <a:ln/>
-        </p:spPr>
-        <p:txBody>
-          <a:bodyPr wrap="square" lIns="0" tIns="0" rIns="0" bIns="0" rtlCol="0" anchor="ctr"/>
-          <a:lstStyle/>
-          <a:p>
-            <a:pPr algn="ctr" indent="0" marL="0">
-              <a:buNone/>
-            </a:pPr>
-            <a:r>
-              <a:rPr lang="en-US" sz="1400" b="1" dirty="0">
-                <a:solidFill>
-                  <a:srgbClr val="0D9488"/>
-                </a:solidFill>
-                <a:latin typeface="Trebuchet MS" pitchFamily="34" charset="0"/>
-                <a:ea typeface="Trebuchet MS" pitchFamily="34" charset="-122"/>
-                <a:cs typeface="Trebuchet MS" pitchFamily="34" charset="-120"/>
-              </a:rPr>
-              <a:t>tion</a:t>
-            </a:r>
-            <a:endParaRPr lang="en-US" sz="1400" dirty="0"/>
-          </a:p>
-        </p:txBody>
-      </p:sp>
-      <p:sp>
-        <p:nvSpPr>
-          <p:cNvPr id="40" name="Shape 38"/>
-          <p:cNvSpPr/>
-          <p:nvPr/>
-        </p:nvSpPr>
-        <p:spPr>
-          <a:xfrm>
-            <a:off x="365760" y="4096512"/>
-            <a:ext cx="1371600" cy="804672"/>
-          </a:xfrm>
-          <a:prstGeom prst="rect">
-            <a:avLst>
-              <a:gd name="adj" fmla="val 6818"/>
-            </a:avLst>
-          </a:prstGeom>
-          <a:solidFill>
-            <a:srgbClr val="E2E8F0"/>
-          </a:solidFill>
-          <a:ln w="12700">
-            <a:solidFill>
-              <a:srgbClr val="E2E8F0"/>
-            </a:solidFill>
-            <a:prstDash val="solid"/>
-          </a:ln>
-        </p:spPr>
-      </p:sp>
-      <p:sp>
-        <p:nvSpPr>
-          <p:cNvPr id="41" name="Text 39"/>
-          <p:cNvSpPr/>
-          <p:nvPr/>
-        </p:nvSpPr>
-        <p:spPr>
-          <a:xfrm>
-            <a:off x="365760" y="4096512"/>
-            <a:ext cx="1371600" cy="804672"/>
-          </a:xfrm>
-          <a:prstGeom prst="rect">
-            <a:avLst/>
-          </a:prstGeom>
-          <a:noFill/>
-          <a:ln/>
-        </p:spPr>
-        <p:txBody>
-          <a:bodyPr wrap="square" lIns="0" tIns="0" rIns="0" bIns="0" rtlCol="0" anchor="ctr"/>
-          <a:lstStyle/>
-          <a:p>
-            <a:pPr algn="ctr" indent="0" marL="0">
-              <a:buNone/>
-            </a:pPr>
-            <a:r>
-              <a:rPr lang="en-US" sz="1100" b="1" dirty="0">
-                <a:solidFill>
-                  <a:srgbClr val="475569"/>
-                </a:solidFill>
-                <a:latin typeface="Trebuchet MS" pitchFamily="34" charset="0"/>
-                <a:ea typeface="Trebuchet MS" pitchFamily="34" charset="-122"/>
-                <a:cs typeface="Trebuchet MS" pitchFamily="34" charset="-120"/>
-              </a:rPr>
-              <a:t>Phonemes</a:t>
-            </a:r>
-            <a:endParaRPr lang="en-US" sz="1100" dirty="0"/>
-          </a:p>
-        </p:txBody>
-      </p:sp>
-      <p:sp>
-        <p:nvSpPr>
-          <p:cNvPr id="42" name="Shape 40"/>
-          <p:cNvSpPr/>
-          <p:nvPr/>
-        </p:nvSpPr>
-        <p:spPr>
-          <a:xfrm>
-            <a:off x="1874520" y="4096512"/>
-            <a:ext cx="6903720" cy="804672"/>
-          </a:xfrm>
-          <a:prstGeom prst="rect">
-            <a:avLst>
-              <a:gd name="adj" fmla="val 6818"/>
-            </a:avLst>
-          </a:prstGeom>
-          <a:solidFill>
-            <a:srgbClr val="FCE7F3"/>
-          </a:solidFill>
-          <a:ln w="12700">
-            <a:solidFill>
-              <a:srgbClr val="DB2777"/>
-            </a:solidFill>
-            <a:prstDash val="solid"/>
-          </a:ln>
-        </p:spPr>
-      </p:sp>
-      <p:sp>
-        <p:nvSpPr>
-          <p:cNvPr id="43" name="Shape 41"/>
-          <p:cNvSpPr/>
-          <p:nvPr/>
-        </p:nvSpPr>
-        <p:spPr>
-          <a:xfrm>
-            <a:off x="1951330" y="4169664"/>
-            <a:ext cx="676656" cy="384048"/>
-          </a:xfrm>
-          <a:prstGeom prst="rect">
-            <a:avLst>
-              <a:gd name="adj" fmla="val 9524"/>
-            </a:avLst>
-          </a:prstGeom>
-          <a:solidFill>
-            <a:srgbClr val="FFFFFF"/>
-          </a:solidFill>
-          <a:ln w="12700">
-            <a:solidFill>
-              <a:srgbClr val="DB2777"/>
-            </a:solidFill>
-            <a:prstDash val="solid"/>
-          </a:ln>
-        </p:spPr>
-      </p:sp>
-      <p:sp>
-        <p:nvSpPr>
-          <p:cNvPr id="44" name="Text 42"/>
-          <p:cNvSpPr/>
-          <p:nvPr/>
-        </p:nvSpPr>
-        <p:spPr>
-          <a:xfrm>
-            <a:off x="1951330" y="4169664"/>
-            <a:ext cx="676656" cy="384048"/>
-          </a:xfrm>
-          <a:prstGeom prst="rect">
-            <a:avLst/>
-          </a:prstGeom>
-          <a:noFill/>
-          <a:ln/>
-        </p:spPr>
-        <p:txBody>
-          <a:bodyPr wrap="square" lIns="0" tIns="0" rIns="0" bIns="0" rtlCol="0" anchor="ctr"/>
-          <a:lstStyle/>
-          <a:p>
-            <a:pPr algn="ctr" indent="0" marL="0">
-              <a:buNone/>
-            </a:pPr>
-            <a:r>
-              <a:rPr lang="en-US" sz="900" b="1" dirty="0">
-                <a:solidFill>
-                  <a:srgbClr val="9D174D"/>
-                </a:solidFill>
-                <a:latin typeface="Trebuchet MS" pitchFamily="34" charset="0"/>
-                <a:ea typeface="Trebuchet MS" pitchFamily="34" charset="-122"/>
-                <a:cs typeface="Trebuchet MS" pitchFamily="34" charset="-120"/>
-              </a:rPr>
-              <a:t>i</a:t>
-            </a:r>
-            <a:endParaRPr lang="en-US" sz="900" dirty="0"/>
-          </a:p>
-        </p:txBody>
-      </p:sp>
-      <p:sp>
-        <p:nvSpPr>
-          <p:cNvPr id="45" name="Shape 43"/>
-          <p:cNvSpPr/>
-          <p:nvPr/>
-        </p:nvSpPr>
-        <p:spPr>
-          <a:xfrm>
-            <a:off x="2677363" y="4169664"/>
-            <a:ext cx="676656" cy="384048"/>
-          </a:xfrm>
-          <a:prstGeom prst="rect">
-            <a:avLst>
-              <a:gd name="adj" fmla="val 9524"/>
-            </a:avLst>
-          </a:prstGeom>
-          <a:solidFill>
-            <a:srgbClr val="FFFFFF"/>
-          </a:solidFill>
-          <a:ln w="12700">
-            <a:solidFill>
-              <a:srgbClr val="DB2777"/>
-            </a:solidFill>
-            <a:prstDash val="solid"/>
-          </a:ln>
-        </p:spPr>
-      </p:sp>
-      <p:sp>
-        <p:nvSpPr>
-          <p:cNvPr id="46" name="Text 44"/>
-          <p:cNvSpPr/>
-          <p:nvPr/>
-        </p:nvSpPr>
-        <p:spPr>
-          <a:xfrm>
-            <a:off x="2677363" y="4169664"/>
-            <a:ext cx="676656" cy="384048"/>
-          </a:xfrm>
-          <a:prstGeom prst="rect">
-            <a:avLst/>
-          </a:prstGeom>
-          <a:noFill/>
-          <a:ln/>
-        </p:spPr>
-        <p:txBody>
-          <a:bodyPr wrap="square" lIns="0" tIns="0" rIns="0" bIns="0" rtlCol="0" anchor="ctr"/>
-          <a:lstStyle/>
-          <a:p>
-            <a:pPr algn="ctr" indent="0" marL="0">
-              <a:buNone/>
-            </a:pPr>
-            <a:r>
-              <a:rPr lang="en-US" sz="900" b="1" dirty="0">
-                <a:solidFill>
-                  <a:srgbClr val="9D174D"/>
-                </a:solidFill>
-                <a:latin typeface="Trebuchet MS" pitchFamily="34" charset="0"/>
-                <a:ea typeface="Trebuchet MS" pitchFamily="34" charset="-122"/>
-                <a:cs typeface="Trebuchet MS" pitchFamily="34" charset="-120"/>
-              </a:rPr>
-              <a:t>m</a:t>
-            </a:r>
-            <a:endParaRPr lang="en-US" sz="900" dirty="0"/>
-          </a:p>
-        </p:txBody>
-      </p:sp>
-      <p:sp>
-        <p:nvSpPr>
-          <p:cNvPr id="47" name="Shape 45"/>
-          <p:cNvSpPr/>
-          <p:nvPr/>
-        </p:nvSpPr>
-        <p:spPr>
-          <a:xfrm>
-            <a:off x="3403397" y="4169664"/>
-            <a:ext cx="676656" cy="384048"/>
-          </a:xfrm>
-          <a:prstGeom prst="rect">
-            <a:avLst>
-              <a:gd name="adj" fmla="val 9524"/>
-            </a:avLst>
-          </a:prstGeom>
-          <a:solidFill>
-            <a:srgbClr val="FFFFFF"/>
-          </a:solidFill>
-          <a:ln w="12700">
-            <a:solidFill>
-              <a:srgbClr val="DB2777"/>
-            </a:solidFill>
-            <a:prstDash val="solid"/>
-          </a:ln>
-        </p:spPr>
-      </p:sp>
-      <p:sp>
-        <p:nvSpPr>
-          <p:cNvPr id="48" name="Text 46"/>
-          <p:cNvSpPr/>
-          <p:nvPr/>
-        </p:nvSpPr>
-        <p:spPr>
-          <a:xfrm>
-            <a:off x="3403397" y="4169664"/>
-            <a:ext cx="676656" cy="384048"/>
-          </a:xfrm>
-          <a:prstGeom prst="rect">
-            <a:avLst/>
-          </a:prstGeom>
-          <a:noFill/>
-          <a:ln/>
-        </p:spPr>
-        <p:txBody>
-          <a:bodyPr wrap="square" lIns="0" tIns="0" rIns="0" bIns="0" rtlCol="0" anchor="ctr"/>
-          <a:lstStyle/>
-          <a:p>
-            <a:pPr algn="ctr" indent="0" marL="0">
-              <a:buNone/>
-            </a:pPr>
-            <a:r>
-              <a:rPr lang="en-US" sz="900" b="1" dirty="0">
-                <a:solidFill>
-                  <a:srgbClr val="9D174D"/>
-                </a:solidFill>
-                <a:latin typeface="Trebuchet MS" pitchFamily="34" charset="0"/>
-                <a:ea typeface="Trebuchet MS" pitchFamily="34" charset="-122"/>
-                <a:cs typeface="Trebuchet MS" pitchFamily="34" charset="-120"/>
-              </a:rPr>
-              <a:t>p</a:t>
-            </a:r>
-            <a:endParaRPr lang="en-US" sz="900" dirty="0"/>
-          </a:p>
-        </p:txBody>
-      </p:sp>
-      <p:sp>
-        <p:nvSpPr>
-          <p:cNvPr id="49" name="Shape 47"/>
-          <p:cNvSpPr/>
-          <p:nvPr/>
-        </p:nvSpPr>
-        <p:spPr>
-          <a:xfrm>
-            <a:off x="4129430" y="4169664"/>
-            <a:ext cx="676656" cy="384048"/>
-          </a:xfrm>
-          <a:prstGeom prst="rect">
-            <a:avLst>
-              <a:gd name="adj" fmla="val 9524"/>
-            </a:avLst>
-          </a:prstGeom>
-          <a:solidFill>
-            <a:srgbClr val="FFFFFF"/>
-          </a:solidFill>
-          <a:ln w="12700">
-            <a:solidFill>
-              <a:srgbClr val="DB2777"/>
-            </a:solidFill>
-            <a:prstDash val="solid"/>
-          </a:ln>
-        </p:spPr>
-      </p:sp>
-      <p:sp>
-        <p:nvSpPr>
-          <p:cNvPr id="50" name="Text 48"/>
-          <p:cNvSpPr/>
-          <p:nvPr/>
-        </p:nvSpPr>
-        <p:spPr>
-          <a:xfrm>
-            <a:off x="4129430" y="4169664"/>
-            <a:ext cx="676656" cy="384048"/>
-          </a:xfrm>
-          <a:prstGeom prst="rect">
-            <a:avLst/>
-          </a:prstGeom>
-          <a:noFill/>
-          <a:ln/>
-        </p:spPr>
-        <p:txBody>
-          <a:bodyPr wrap="square" lIns="0" tIns="0" rIns="0" bIns="0" rtlCol="0" anchor="ctr"/>
-          <a:lstStyle/>
-          <a:p>
-            <a:pPr algn="ctr" indent="0" marL="0">
-              <a:buNone/>
-            </a:pPr>
-            <a:r>
-              <a:rPr lang="en-US" sz="900" b="1" dirty="0">
-                <a:solidFill>
-                  <a:srgbClr val="9D174D"/>
-                </a:solidFill>
-                <a:latin typeface="Trebuchet MS" pitchFamily="34" charset="0"/>
-                <a:ea typeface="Trebuchet MS" pitchFamily="34" charset="-122"/>
-                <a:cs typeface="Trebuchet MS" pitchFamily="34" charset="-120"/>
-              </a:rPr>
-              <a:t>or</a:t>
-            </a:r>
-            <a:endParaRPr lang="en-US" sz="900" dirty="0"/>
-          </a:p>
-        </p:txBody>
-      </p:sp>
-      <p:sp>
-        <p:nvSpPr>
-          <p:cNvPr id="51" name="Shape 49"/>
-          <p:cNvSpPr/>
-          <p:nvPr/>
-        </p:nvSpPr>
-        <p:spPr>
-          <a:xfrm>
-            <a:off x="4855464" y="4169664"/>
-            <a:ext cx="676656" cy="384048"/>
-          </a:xfrm>
-          <a:prstGeom prst="rect">
-            <a:avLst>
-              <a:gd name="adj" fmla="val 9524"/>
-            </a:avLst>
-          </a:prstGeom>
-          <a:solidFill>
-            <a:srgbClr val="FFFFFF"/>
-          </a:solidFill>
-          <a:ln w="12700">
-            <a:solidFill>
-              <a:srgbClr val="DB2777"/>
-            </a:solidFill>
-            <a:prstDash val="solid"/>
-          </a:ln>
-        </p:spPr>
-      </p:sp>
-      <p:sp>
-        <p:nvSpPr>
-          <p:cNvPr id="52" name="Text 50"/>
-          <p:cNvSpPr/>
-          <p:nvPr/>
-        </p:nvSpPr>
-        <p:spPr>
-          <a:xfrm>
-            <a:off x="4855464" y="4169664"/>
-            <a:ext cx="676656" cy="384048"/>
-          </a:xfrm>
-          <a:prstGeom prst="rect">
-            <a:avLst/>
-          </a:prstGeom>
-          <a:noFill/>
-          <a:ln/>
-        </p:spPr>
-        <p:txBody>
-          <a:bodyPr wrap="square" lIns="0" tIns="0" rIns="0" bIns="0" rtlCol="0" anchor="ctr"/>
-          <a:lstStyle/>
-          <a:p>
-            <a:pPr algn="ctr" indent="0" marL="0">
-              <a:buNone/>
-            </a:pPr>
-            <a:r>
-              <a:rPr lang="en-US" sz="900" b="1" dirty="0">
-                <a:solidFill>
-                  <a:srgbClr val="9D174D"/>
-                </a:solidFill>
-                <a:latin typeface="Trebuchet MS" pitchFamily="34" charset="0"/>
-                <a:ea typeface="Trebuchet MS" pitchFamily="34" charset="-122"/>
-                <a:cs typeface="Trebuchet MS" pitchFamily="34" charset="-120"/>
-              </a:rPr>
               <a:t>t</a:t>
-            </a:r>
-            <a:endParaRPr lang="en-US" sz="900" dirty="0"/>
-          </a:p>
-        </p:txBody>
-      </p:sp>
-      <p:sp>
-        <p:nvSpPr>
-          <p:cNvPr id="53" name="Shape 51"/>
-          <p:cNvSpPr/>
-          <p:nvPr/>
-        </p:nvSpPr>
-        <p:spPr>
-          <a:xfrm>
-            <a:off x="5581498" y="4169664"/>
-            <a:ext cx="676656" cy="384048"/>
-          </a:xfrm>
-          <a:prstGeom prst="rect">
-            <a:avLst>
-              <a:gd name="adj" fmla="val 9524"/>
-            </a:avLst>
-          </a:prstGeom>
-          <a:solidFill>
-            <a:srgbClr val="FFFFFF"/>
-          </a:solidFill>
-          <a:ln w="12700">
-            <a:solidFill>
-              <a:srgbClr val="DB2777"/>
-            </a:solidFill>
-            <a:prstDash val="solid"/>
-          </a:ln>
-        </p:spPr>
-      </p:sp>
-      <p:sp>
-        <p:nvSpPr>
-          <p:cNvPr id="54" name="Text 52"/>
-          <p:cNvSpPr/>
-          <p:nvPr/>
-        </p:nvSpPr>
-        <p:spPr>
-          <a:xfrm>
-            <a:off x="5581498" y="4169664"/>
-            <a:ext cx="676656" cy="384048"/>
-          </a:xfrm>
-          <a:prstGeom prst="rect">
-            <a:avLst/>
-          </a:prstGeom>
-          <a:noFill/>
-          <a:ln/>
-        </p:spPr>
-        <p:txBody>
-          <a:bodyPr wrap="square" lIns="0" tIns="0" rIns="0" bIns="0" rtlCol="0" anchor="ctr"/>
-          <a:lstStyle/>
-          <a:p>
-            <a:pPr algn="ctr" indent="0" marL="0">
-              <a:buNone/>
-            </a:pPr>
-            <a:r>
-              <a:rPr lang="en-US" sz="900" b="1" dirty="0">
-                <a:solidFill>
-                  <a:srgbClr val="9D174D"/>
-                </a:solidFill>
-                <a:latin typeface="Trebuchet MS" pitchFamily="34" charset="0"/>
-                <a:ea typeface="Trebuchet MS" pitchFamily="34" charset="-122"/>
-                <a:cs typeface="Trebuchet MS" pitchFamily="34" charset="-120"/>
-              </a:rPr>
-              <a:t>a</a:t>
-            </a:r>
-            <a:endParaRPr lang="en-US" sz="900" dirty="0"/>
-          </a:p>
-        </p:txBody>
-      </p:sp>
-      <p:sp>
-        <p:nvSpPr>
-          <p:cNvPr id="55" name="Shape 53"/>
-          <p:cNvSpPr/>
-          <p:nvPr/>
-        </p:nvSpPr>
-        <p:spPr>
-          <a:xfrm>
-            <a:off x="6307531" y="4169664"/>
-            <a:ext cx="676656" cy="384048"/>
-          </a:xfrm>
-          <a:prstGeom prst="rect">
-            <a:avLst>
-              <a:gd name="adj" fmla="val 9524"/>
-            </a:avLst>
-          </a:prstGeom>
-          <a:solidFill>
-            <a:srgbClr val="FFFFFF"/>
-          </a:solidFill>
-          <a:ln w="12700">
-            <a:solidFill>
-              <a:srgbClr val="DB2777"/>
-            </a:solidFill>
-            <a:prstDash val="solid"/>
-          </a:ln>
-        </p:spPr>
-      </p:sp>
-      <p:sp>
-        <p:nvSpPr>
-          <p:cNvPr id="56" name="Text 54"/>
-          <p:cNvSpPr/>
-          <p:nvPr/>
-        </p:nvSpPr>
-        <p:spPr>
-          <a:xfrm>
-            <a:off x="6307531" y="4169664"/>
-            <a:ext cx="676656" cy="384048"/>
-          </a:xfrm>
-          <a:prstGeom prst="rect">
-            <a:avLst/>
-          </a:prstGeom>
-          <a:noFill/>
-          <a:ln/>
-        </p:spPr>
-        <p:txBody>
-          <a:bodyPr wrap="square" lIns="0" tIns="0" rIns="0" bIns="0" rtlCol="0" anchor="ctr"/>
-          <a:lstStyle/>
-          <a:p>
-            <a:pPr algn="ctr" indent="0" marL="0">
-              <a:buNone/>
-            </a:pPr>
-            <a:r>
-              <a:rPr lang="en-US" sz="900" b="1" dirty="0">
-                <a:solidFill>
-                  <a:srgbClr val="9D174D"/>
-                </a:solidFill>
-                <a:latin typeface="Trebuchet MS" pitchFamily="34" charset="0"/>
-                <a:ea typeface="Trebuchet MS" pitchFamily="34" charset="-122"/>
-                <a:cs typeface="Trebuchet MS" pitchFamily="34" charset="-120"/>
-              </a:rPr>
-              <a:t>t</a:t>
-            </a:r>
-            <a:endParaRPr lang="en-US" sz="900" dirty="0"/>
-          </a:p>
-        </p:txBody>
-      </p:sp>
-      <p:sp>
-        <p:nvSpPr>
-          <p:cNvPr id="57" name="Text 55"/>
-          <p:cNvSpPr/>
-          <p:nvPr/>
-        </p:nvSpPr>
-        <p:spPr>
-          <a:xfrm>
-            <a:off x="6307531" y="4572000"/>
-            <a:ext cx="676656" cy="219456"/>
-          </a:xfrm>
-          <a:prstGeom prst="rect">
-            <a:avLst/>
-          </a:prstGeom>
-          <a:noFill/>
-          <a:ln/>
-        </p:spPr>
-        <p:txBody>
-          <a:bodyPr wrap="square" lIns="0" tIns="0" rIns="0" bIns="0" rtlCol="0" anchor="t"/>
-          <a:lstStyle/>
-          <a:p>
-            <a:pPr algn="ctr" indent="0" marL="0">
-              <a:buNone/>
-            </a:pPr>
-            <a:r>
-              <a:rPr lang="en-US" sz="750" i="1" dirty="0">
-                <a:solidFill>
-                  <a:srgbClr val="94A3B8"/>
-                </a:solidFill>
-                <a:latin typeface="Calibri" pitchFamily="34" charset="0"/>
-                <a:ea typeface="Calibri" pitchFamily="34" charset="-122"/>
-                <a:cs typeface="Calibri" pitchFamily="34" charset="-120"/>
-              </a:rPr>
-              <a:t>/sh/</a:t>
-            </a:r>
-            <a:endParaRPr lang="en-US" sz="750" dirty="0"/>
-          </a:p>
-        </p:txBody>
-      </p:sp>
-      <p:sp>
-        <p:nvSpPr>
-          <p:cNvPr id="58" name="Shape 56"/>
-          <p:cNvSpPr/>
-          <p:nvPr/>
-        </p:nvSpPr>
-        <p:spPr>
-          <a:xfrm>
-            <a:off x="7033565" y="4169664"/>
-            <a:ext cx="676656" cy="384048"/>
-          </a:xfrm>
-          <a:prstGeom prst="rect">
-            <a:avLst>
-              <a:gd name="adj" fmla="val 9524"/>
-            </a:avLst>
-          </a:prstGeom>
-          <a:solidFill>
-            <a:srgbClr val="FFFFFF"/>
-          </a:solidFill>
-          <a:ln w="12700">
-            <a:solidFill>
-              <a:srgbClr val="DB2777"/>
-            </a:solidFill>
-            <a:prstDash val="solid"/>
-          </a:ln>
-        </p:spPr>
-      </p:sp>
-      <p:sp>
-        <p:nvSpPr>
-          <p:cNvPr id="59" name="Text 57"/>
-          <p:cNvSpPr/>
-          <p:nvPr/>
-        </p:nvSpPr>
-        <p:spPr>
-          <a:xfrm>
-            <a:off x="7033565" y="4169664"/>
-            <a:ext cx="676656" cy="384048"/>
-          </a:xfrm>
-          <a:prstGeom prst="rect">
-            <a:avLst/>
-          </a:prstGeom>
-          <a:noFill/>
-          <a:ln/>
-        </p:spPr>
-        <p:txBody>
-          <a:bodyPr wrap="square" lIns="0" tIns="0" rIns="0" bIns="0" rtlCol="0" anchor="ctr"/>
-          <a:lstStyle/>
-          <a:p>
-            <a:pPr algn="ctr" indent="0" marL="0">
-              <a:buNone/>
-            </a:pPr>
-            <a:r>
-              <a:rPr lang="en-US" sz="900" b="1" dirty="0">
-                <a:solidFill>
-                  <a:srgbClr val="9D174D"/>
-                </a:solidFill>
-                <a:latin typeface="Trebuchet MS" pitchFamily="34" charset="0"/>
-                <a:ea typeface="Trebuchet MS" pitchFamily="34" charset="-122"/>
-                <a:cs typeface="Trebuchet MS" pitchFamily="34" charset="-120"/>
-              </a:rPr>
-              <a:t>io</a:t>
-            </a:r>
-            <a:endParaRPr lang="en-US" sz="900" dirty="0"/>
-          </a:p>
-        </p:txBody>
-      </p:sp>
-      <p:sp>
-        <p:nvSpPr>
-          <p:cNvPr id="60" name="Shape 58"/>
-          <p:cNvSpPr/>
-          <p:nvPr/>
-        </p:nvSpPr>
-        <p:spPr>
-          <a:xfrm>
-            <a:off x="7759598" y="4169664"/>
-            <a:ext cx="676656" cy="384048"/>
-          </a:xfrm>
-          <a:prstGeom prst="rect">
-            <a:avLst>
-              <a:gd name="adj" fmla="val 9524"/>
-            </a:avLst>
-          </a:prstGeom>
-          <a:solidFill>
-            <a:srgbClr val="FFFFFF"/>
-          </a:solidFill>
-          <a:ln w="12700">
-            <a:solidFill>
-              <a:srgbClr val="DB2777"/>
-            </a:solidFill>
-            <a:prstDash val="solid"/>
-          </a:ln>
-        </p:spPr>
-      </p:sp>
-      <p:sp>
-        <p:nvSpPr>
-          <p:cNvPr id="61" name="Text 59"/>
-          <p:cNvSpPr/>
-          <p:nvPr/>
-        </p:nvSpPr>
-        <p:spPr>
-          <a:xfrm>
-            <a:off x="7759598" y="4169664"/>
-            <a:ext cx="676656" cy="384048"/>
-          </a:xfrm>
-          <a:prstGeom prst="rect">
-            <a:avLst/>
-          </a:prstGeom>
-          <a:noFill/>
-          <a:ln/>
-        </p:spPr>
-        <p:txBody>
-          <a:bodyPr wrap="square" lIns="0" tIns="0" rIns="0" bIns="0" rtlCol="0" anchor="ctr"/>
-          <a:lstStyle/>
-          <a:p>
-            <a:pPr algn="ctr" indent="0" marL="0">
-              <a:buNone/>
-            </a:pPr>
-            <a:r>
-              <a:rPr lang="en-US" sz="900" b="1" dirty="0">
-                <a:solidFill>
-                  <a:srgbClr val="9D174D"/>
-                </a:solidFill>
-                <a:latin typeface="Trebuchet MS" pitchFamily="34" charset="0"/>
-                <a:ea typeface="Trebuchet MS" pitchFamily="34" charset="-122"/>
-                <a:cs typeface="Trebuchet MS" pitchFamily="34" charset="-120"/>
-              </a:rPr>
-              <a:t>n</a:t>
             </a:r>
             <a:endParaRPr lang="en-US" sz="900" dirty="0"/>
           </a:p>
@@ -32760,7 +33288,7 @@
                 <a:ea typeface="Calibri" pitchFamily="34" charset="-122"/>
                 <a:cs typeface="Calibri" pitchFamily="34" charset="-120"/>
               </a:rPr>
-              <a:t>Word Labs  •  wordlabs.app  •  Root: 'port' = carry, bring, transport</a:t>
+              <a:t>Word Labs  •  wordlabs.app  •  Root: 'port' = carry, bring, bear</a:t>
             </a:r>
             <a:endParaRPr lang="en-US" sz="800" dirty="0"/>
           </a:p>
@@ -33929,7 +34457,7 @@
                 <a:ea typeface="Calibri" pitchFamily="34" charset="-122"/>
                 <a:cs typeface="Calibri" pitchFamily="34" charset="-120"/>
               </a:rPr>
-              <a:t>Word Labs  •  wordlabs.app  •  Root: 'port' = carry, bring, transport</a:t>
+              <a:t>Word Labs  •  wordlabs.app  •  Root: 'port' = carry, bring, bear</a:t>
             </a:r>
             <a:endParaRPr lang="en-US" sz="800" dirty="0"/>
           </a:p>
@@ -34230,7 +34758,7 @@
                 <a:ea typeface="Trebuchet MS" pitchFamily="34" charset="-122"/>
                 <a:cs typeface="Trebuchet MS" pitchFamily="34" charset="-120"/>
               </a:rPr>
-              <a:t>trans-</a:t>
+              <a:t>im-</a:t>
             </a:r>
             <a:endParaRPr lang="en-US" sz="1300" dirty="0"/>
           </a:p>
@@ -34358,7 +34886,7 @@
                 <a:ea typeface="Trebuchet MS" pitchFamily="34" charset="-122"/>
                 <a:cs typeface="Trebuchet MS" pitchFamily="34" charset="-120"/>
               </a:rPr>
-              <a:t>-able</a:t>
+              <a:t>-er</a:t>
             </a:r>
             <a:endParaRPr lang="en-US" sz="1300" dirty="0"/>
           </a:p>
@@ -34422,7 +34950,7 @@
                 <a:ea typeface="Trebuchet MS" pitchFamily="34" charset="-122"/>
                 <a:cs typeface="Trebuchet MS" pitchFamily="34" charset="-120"/>
               </a:rPr>
-              <a:t>im-</a:t>
+              <a:t>ex-</a:t>
             </a:r>
             <a:endParaRPr lang="en-US" sz="1300" dirty="0"/>
           </a:p>
@@ -34511,7 +35039,7 @@
                 <a:ea typeface="Trebuchet MS" pitchFamily="34" charset="-122"/>
                 <a:cs typeface="Trebuchet MS" pitchFamily="34" charset="-120"/>
               </a:rPr>
-              <a:t>-er</a:t>
+              <a:t>-able</a:t>
             </a:r>
             <a:endParaRPr lang="en-US" sz="1300" dirty="0"/>
           </a:p>
@@ -34575,7 +35103,7 @@
                 <a:ea typeface="Trebuchet MS" pitchFamily="34" charset="-122"/>
                 <a:cs typeface="Trebuchet MS" pitchFamily="34" charset="-120"/>
               </a:rPr>
-              <a:t>ex-</a:t>
+              <a:t>trans-</a:t>
             </a:r>
             <a:endParaRPr lang="en-US" sz="1300" dirty="0"/>
           </a:p>
@@ -34664,7 +35192,7 @@
                 <a:ea typeface="Trebuchet MS" pitchFamily="34" charset="-122"/>
                 <a:cs typeface="Trebuchet MS" pitchFamily="34" charset="-120"/>
               </a:rPr>
-              <a:t>-ion</a:t>
+              <a:t>-ation</a:t>
             </a:r>
             <a:endParaRPr lang="en-US" sz="1300" dirty="0"/>
           </a:p>
@@ -34728,7 +35256,7 @@
                 <a:ea typeface="Trebuchet MS" pitchFamily="34" charset="-122"/>
                 <a:cs typeface="Trebuchet MS" pitchFamily="34" charset="-120"/>
               </a:rPr>
-              <a:t>sup-</a:t>
+              <a:t>re-</a:t>
             </a:r>
             <a:endParaRPr lang="en-US" sz="1300" dirty="0"/>
           </a:p>
@@ -34881,7 +35409,7 @@
                 <a:ea typeface="Trebuchet MS" pitchFamily="34" charset="-122"/>
                 <a:cs typeface="Trebuchet MS" pitchFamily="34" charset="-120"/>
               </a:rPr>
-              <a:t>re-</a:t>
+              <a:t>sup-</a:t>
             </a:r>
             <a:endParaRPr lang="en-US" sz="1300" dirty="0"/>
           </a:p>
@@ -34970,7 +35498,7 @@
                 <a:ea typeface="Trebuchet MS" pitchFamily="34" charset="-122"/>
                 <a:cs typeface="Trebuchet MS" pitchFamily="34" charset="-120"/>
               </a:rPr>
-              <a:t>-ation</a:t>
+              <a:t>-ly</a:t>
             </a:r>
             <a:endParaRPr lang="en-US" sz="1300" dirty="0"/>
           </a:p>
@@ -35075,7 +35603,7 @@
                 <a:ea typeface="Trebuchet MS" pitchFamily="34" charset="-122"/>
                 <a:cs typeface="Trebuchet MS" pitchFamily="34" charset="-120"/>
               </a:rPr>
-              <a:t>transport</a:t>
+              <a:t>import</a:t>
             </a:r>
             <a:endParaRPr lang="en-US" sz="1200" dirty="0"/>
           </a:p>
@@ -35141,7 +35669,7 @@
                 <a:ea typeface="Trebuchet MS" pitchFamily="34" charset="-122"/>
                 <a:cs typeface="Trebuchet MS" pitchFamily="34" charset="-120"/>
               </a:rPr>
-              <a:t>import</a:t>
+              <a:t>export</a:t>
             </a:r>
             <a:endParaRPr lang="en-US" sz="1200" dirty="0"/>
           </a:p>
@@ -35207,7 +35735,7 @@
                 <a:ea typeface="Trebuchet MS" pitchFamily="34" charset="-122"/>
                 <a:cs typeface="Trebuchet MS" pitchFamily="34" charset="-120"/>
               </a:rPr>
-              <a:t>export</a:t>
+              <a:t>transport</a:t>
             </a:r>
             <a:endParaRPr lang="en-US" sz="1200" dirty="0"/>
           </a:p>
@@ -35405,7 +35933,7 @@
                 <a:ea typeface="Trebuchet MS" pitchFamily="34" charset="-122"/>
                 <a:cs typeface="Trebuchet MS" pitchFamily="34" charset="-120"/>
               </a:rPr>
-              <a:t>portable</a:t>
+              <a:t>porter</a:t>
             </a:r>
             <a:endParaRPr lang="en-US" sz="1200" dirty="0"/>
           </a:p>
@@ -35471,7 +35999,7 @@
                 <a:ea typeface="Trebuchet MS" pitchFamily="34" charset="-122"/>
                 <a:cs typeface="Trebuchet MS" pitchFamily="34" charset="-120"/>
               </a:rPr>
-              <a:t>porter</a:t>
+              <a:t>portable</a:t>
             </a:r>
             <a:endParaRPr lang="en-US" sz="1200" dirty="0"/>
           </a:p>
@@ -35537,7 +36065,7 @@
                 <a:ea typeface="Trebuchet MS" pitchFamily="34" charset="-122"/>
                 <a:cs typeface="Trebuchet MS" pitchFamily="34" charset="-120"/>
               </a:rPr>
-              <a:t>portfolio</a:t>
+              <a:t>transportation</a:t>
             </a:r>
             <a:endParaRPr lang="en-US" sz="1200" dirty="0"/>
           </a:p>
@@ -35829,7 +36357,7 @@
                 <a:ea typeface="Calibri" pitchFamily="34" charset="-122"/>
                 <a:cs typeface="Calibri" pitchFamily="34" charset="-120"/>
               </a:rPr>
-              <a:t>Word Labs  •  wordlabs.app  •  Root: 'port' = carry, bring, transport</a:t>
+              <a:t>Word Labs  •  wordlabs.app  •  Root: 'port' = carry, bring, bear</a:t>
             </a:r>
             <a:endParaRPr lang="en-US" sz="800" dirty="0"/>
           </a:p>
@@ -35993,7 +36521,7 @@
                 <a:ea typeface="Calibri" pitchFamily="34" charset="-122"/>
                 <a:cs typeface="Calibri" pitchFamily="34" charset="-120"/>
               </a:rPr>
-              <a:t>The core part of a word carrying its basic meaning. For example, 'port' means 'carry, bring, transport'.</a:t>
+              <a:t>The core part of a word carrying its basic meaning. For example, 'port' means 'carry, bring, bear'.</a:t>
             </a:r>
             <a:endParaRPr lang="en-US" sz="1350" dirty="0"/>
           </a:p>
@@ -36613,7 +37141,7 @@
                 <a:ea typeface="Calibri" pitchFamily="34" charset="-122"/>
                 <a:cs typeface="Calibri" pitchFamily="34" charset="-120"/>
               </a:rPr>
-              <a:t>Word Labs  •  wordlabs.app  •  Root: 'port' = carry, bring, transport</a:t>
+              <a:t>Word Labs  •  wordlabs.app  •  Root: 'port' = carry, bring, bear</a:t>
             </a:r>
             <a:endParaRPr lang="en-US" sz="800" dirty="0"/>
           </a:p>
@@ -37003,7 +37531,7 @@
                 <a:ea typeface="Calibri" pitchFamily="34" charset="-122"/>
                 <a:cs typeface="Calibri" pitchFamily="34" charset="-120"/>
               </a:rPr>
-              <a:t>3.  A portable device is one that is easy to carry around.</a:t>
+              <a:t>3.  The prefix 'trans' in 'transport' means across or through.</a:t>
             </a:r>
             <a:endParaRPr lang="en-US" sz="1300" dirty="0"/>
           </a:p>
@@ -37142,7 +37670,7 @@
                 <a:ea typeface="Calibri" pitchFamily="34" charset="-122"/>
                 <a:cs typeface="Calibri" pitchFamily="34" charset="-120"/>
               </a:rPr>
-              <a:t>4.  The word 'transport' contains the root 'port' meaning carry.</a:t>
+              <a:t>4.  The root 'port' is originally from a Greek word.</a:t>
             </a:r>
             <a:endParaRPr lang="en-US" sz="1300" dirty="0"/>
           </a:p>
@@ -37165,11 +37693,11 @@
             </a:avLst>
           </a:prstGeom>
           <a:solidFill>
-            <a:srgbClr val="DCFCE7"/>
-          </a:solidFill>
-          <a:ln w="12700">
-            <a:solidFill>
-              <a:srgbClr val="16A34A"/>
+            <a:srgbClr val="FEE2E2"/>
+          </a:solidFill>
+          <a:ln w="12700">
+            <a:solidFill>
+              <a:srgbClr val="DC2626"/>
             </a:solidFill>
             <a:prstDash val="solid"/>
           </a:ln>
@@ -37202,13 +37730,13 @@
             <a:r>
               <a:rPr lang="en-US" sz="1100" b="1" dirty="0">
                 <a:solidFill>
-                  <a:srgbClr val="16A34A"/>
+                  <a:srgbClr val="DC2626"/>
                 </a:solidFill>
                 <a:latin typeface="Trebuchet MS" pitchFamily="34" charset="0"/>
                 <a:ea typeface="Trebuchet MS" pitchFamily="34" charset="-122"/>
                 <a:cs typeface="Trebuchet MS" pitchFamily="34" charset="-120"/>
               </a:rPr>
-              <a:t>TRUE</a:t>
+              <a:t>FALSE</a:t>
             </a:r>
             <a:endParaRPr lang="en-US" sz="1100" dirty="0"/>
           </a:p>
@@ -37281,7 +37809,7 @@
                 <a:ea typeface="Calibri" pitchFamily="34" charset="-122"/>
                 <a:cs typeface="Calibri" pitchFamily="34" charset="-120"/>
               </a:rPr>
-              <a:t>5.  The root 'port' comes from a Greek word meaning to move.</a:t>
+              <a:t>5.  A 'portable' device is one that can be easily carried around.</a:t>
             </a:r>
             <a:endParaRPr lang="en-US" sz="1300" dirty="0"/>
           </a:p>
@@ -37304,11 +37832,11 @@
             </a:avLst>
           </a:prstGeom>
           <a:solidFill>
-            <a:srgbClr val="FEE2E2"/>
-          </a:solidFill>
-          <a:ln w="12700">
-            <a:solidFill>
-              <a:srgbClr val="DC2626"/>
+            <a:srgbClr val="DCFCE7"/>
+          </a:solidFill>
+          <a:ln w="12700">
+            <a:solidFill>
+              <a:srgbClr val="16A34A"/>
             </a:solidFill>
             <a:prstDash val="solid"/>
           </a:ln>
@@ -37341,13 +37869,13 @@
             <a:r>
               <a:rPr lang="en-US" sz="1100" b="1" dirty="0">
                 <a:solidFill>
-                  <a:srgbClr val="DC2626"/>
+                  <a:srgbClr val="16A34A"/>
                 </a:solidFill>
                 <a:latin typeface="Trebuchet MS" pitchFamily="34" charset="0"/>
                 <a:ea typeface="Trebuchet MS" pitchFamily="34" charset="-122"/>
                 <a:cs typeface="Trebuchet MS" pitchFamily="34" charset="-120"/>
               </a:rPr>
-              <a:t>FALSE</a:t>
+              <a:t>TRUE</a:t>
             </a:r>
             <a:endParaRPr lang="en-US" sz="1100" dirty="0"/>
           </a:p>
@@ -37639,7 +38167,7 @@
                 <a:ea typeface="Calibri" pitchFamily="34" charset="-122"/>
                 <a:cs typeface="Calibri" pitchFamily="34" charset="-120"/>
               </a:rPr>
-              <a:t>Word Labs  •  wordlabs.app  •  Root: 'port' = carry, bring, transport</a:t>
+              <a:t>Word Labs  •  wordlabs.app  •  Root: 'port' = carry, bring, bear</a:t>
             </a:r>
             <a:endParaRPr lang="en-US" sz="800" dirty="0"/>
           </a:p>
@@ -37776,7 +38304,7 @@
                 <a:ea typeface="Trebuchet MS" pitchFamily="34" charset="-122"/>
                 <a:cs typeface="Trebuchet MS" pitchFamily="34" charset="-120"/>
               </a:rPr>
-              <a:t>carry, bring, transport</a:t>
+              <a:t>carry, bring, bear</a:t>
             </a:r>
             <a:endParaRPr lang="en-US" sz="2000" dirty="0"/>
           </a:p>
@@ -37920,7 +38448,7 @@
                 <a:ea typeface="Trebuchet MS" pitchFamily="34" charset="-122"/>
                 <a:cs typeface="Trebuchet MS" pitchFamily="34" charset="-120"/>
               </a:rPr>
-              <a:t>transport</a:t>
+              <a:t>import</a:t>
             </a:r>
             <a:endParaRPr lang="en-US" sz="1300" dirty="0"/>
           </a:p>
@@ -37986,7 +38514,7 @@
                 <a:ea typeface="Trebuchet MS" pitchFamily="34" charset="-122"/>
                 <a:cs typeface="Trebuchet MS" pitchFamily="34" charset="-120"/>
               </a:rPr>
-              <a:t>import</a:t>
+              <a:t>export</a:t>
             </a:r>
             <a:endParaRPr lang="en-US" sz="1300" dirty="0"/>
           </a:p>
@@ -38052,7 +38580,7 @@
                 <a:ea typeface="Trebuchet MS" pitchFamily="34" charset="-122"/>
                 <a:cs typeface="Trebuchet MS" pitchFamily="34" charset="-120"/>
               </a:rPr>
-              <a:t>export</a:t>
+              <a:t>transport</a:t>
             </a:r>
             <a:endParaRPr lang="en-US" sz="1300" dirty="0"/>
           </a:p>
@@ -38250,7 +38778,7 @@
                 <a:ea typeface="Trebuchet MS" pitchFamily="34" charset="-122"/>
                 <a:cs typeface="Trebuchet MS" pitchFamily="34" charset="-120"/>
               </a:rPr>
-              <a:t>portable</a:t>
+              <a:t>porter</a:t>
             </a:r>
             <a:endParaRPr lang="en-US" sz="1300" dirty="0"/>
           </a:p>
@@ -38316,7 +38844,7 @@
                 <a:ea typeface="Trebuchet MS" pitchFamily="34" charset="-122"/>
                 <a:cs typeface="Trebuchet MS" pitchFamily="34" charset="-120"/>
               </a:rPr>
-              <a:t>porter</a:t>
+              <a:t>portable</a:t>
             </a:r>
             <a:endParaRPr lang="en-US" sz="1300" dirty="0"/>
           </a:p>
@@ -38608,7 +39136,7 @@
                 <a:ea typeface="Calibri" pitchFamily="34" charset="-122"/>
                 <a:cs typeface="Calibri" pitchFamily="34" charset="-120"/>
               </a:rPr>
-              <a:t>Word Labs  •  wordlabs.app  •  Root: 'port' = carry, bring, transport</a:t>
+              <a:t>Word Labs  •  wordlabs.app  •  Root: 'port' = carry, bring, bear</a:t>
             </a:r>
             <a:endParaRPr lang="en-US" sz="800" dirty="0"/>
           </a:p>
@@ -38909,7 +39437,7 @@
                 <a:ea typeface="Trebuchet MS" pitchFamily="34" charset="-122"/>
                 <a:cs typeface="Trebuchet MS" pitchFamily="34" charset="-120"/>
               </a:rPr>
-              <a:t>trans-</a:t>
+              <a:t>im-</a:t>
             </a:r>
             <a:endParaRPr lang="en-US" sz="1300" dirty="0"/>
           </a:p>
@@ -39037,7 +39565,7 @@
                 <a:ea typeface="Trebuchet MS" pitchFamily="34" charset="-122"/>
                 <a:cs typeface="Trebuchet MS" pitchFamily="34" charset="-120"/>
               </a:rPr>
-              <a:t>-able</a:t>
+              <a:t>-er</a:t>
             </a:r>
             <a:endParaRPr lang="en-US" sz="1300" dirty="0"/>
           </a:p>
@@ -39101,7 +39629,7 @@
                 <a:ea typeface="Trebuchet MS" pitchFamily="34" charset="-122"/>
                 <a:cs typeface="Trebuchet MS" pitchFamily="34" charset="-120"/>
               </a:rPr>
-              <a:t>im-</a:t>
+              <a:t>ex-</a:t>
             </a:r>
             <a:endParaRPr lang="en-US" sz="1300" dirty="0"/>
           </a:p>
@@ -39190,7 +39718,7 @@
                 <a:ea typeface="Trebuchet MS" pitchFamily="34" charset="-122"/>
                 <a:cs typeface="Trebuchet MS" pitchFamily="34" charset="-120"/>
               </a:rPr>
-              <a:t>-er</a:t>
+              <a:t>-able</a:t>
             </a:r>
             <a:endParaRPr lang="en-US" sz="1300" dirty="0"/>
           </a:p>
@@ -39254,7 +39782,7 @@
                 <a:ea typeface="Trebuchet MS" pitchFamily="34" charset="-122"/>
                 <a:cs typeface="Trebuchet MS" pitchFamily="34" charset="-120"/>
               </a:rPr>
-              <a:t>ex-</a:t>
+              <a:t>trans-</a:t>
             </a:r>
             <a:endParaRPr lang="en-US" sz="1300" dirty="0"/>
           </a:p>
@@ -39343,7 +39871,7 @@
                 <a:ea typeface="Trebuchet MS" pitchFamily="34" charset="-122"/>
                 <a:cs typeface="Trebuchet MS" pitchFamily="34" charset="-120"/>
               </a:rPr>
-              <a:t>-ion</a:t>
+              <a:t>-ation</a:t>
             </a:r>
             <a:endParaRPr lang="en-US" sz="1300" dirty="0"/>
           </a:p>
@@ -39407,7 +39935,7 @@
                 <a:ea typeface="Trebuchet MS" pitchFamily="34" charset="-122"/>
                 <a:cs typeface="Trebuchet MS" pitchFamily="34" charset="-120"/>
               </a:rPr>
-              <a:t>sup-</a:t>
+              <a:t>re-</a:t>
             </a:r>
             <a:endParaRPr lang="en-US" sz="1300" dirty="0"/>
           </a:p>
@@ -39560,7 +40088,7 @@
                 <a:ea typeface="Trebuchet MS" pitchFamily="34" charset="-122"/>
                 <a:cs typeface="Trebuchet MS" pitchFamily="34" charset="-120"/>
               </a:rPr>
-              <a:t>re-</a:t>
+              <a:t>sup-</a:t>
             </a:r>
             <a:endParaRPr lang="en-US" sz="1300" dirty="0"/>
           </a:p>
@@ -39649,7 +40177,7 @@
                 <a:ea typeface="Trebuchet MS" pitchFamily="34" charset="-122"/>
                 <a:cs typeface="Trebuchet MS" pitchFamily="34" charset="-120"/>
               </a:rPr>
-              <a:t>-ation</a:t>
+              <a:t>-ly</a:t>
             </a:r>
             <a:endParaRPr lang="en-US" sz="1300" dirty="0"/>
           </a:p>
@@ -39703,7 +40231,7 @@
         <p:spPr>
           <a:xfrm>
             <a:off x="1508760" y="4178808"/>
-            <a:ext cx="1243584" cy="420624"/>
+            <a:ext cx="822960" cy="420624"/>
           </a:xfrm>
           <a:prstGeom prst="rect">
             <a:avLst>
@@ -39737,7 +40265,7 @@
         <p:spPr>
           <a:xfrm>
             <a:off x="1508760" y="4178808"/>
-            <a:ext cx="1243584" cy="420624"/>
+            <a:ext cx="822960" cy="420624"/>
           </a:xfrm>
           <a:prstGeom prst="rect">
             <a:avLst/>
@@ -39761,7 +40289,7 @@
                 <a:ea typeface="Trebuchet MS" pitchFamily="34" charset="-122"/>
                 <a:cs typeface="Trebuchet MS" pitchFamily="34" charset="-120"/>
               </a:rPr>
-              <a:t>trans-</a:t>
+              <a:t>im-</a:t>
             </a:r>
             <a:endParaRPr lang="en-US" sz="1300" dirty="0"/>
           </a:p>
@@ -39775,7 +40303,7 @@
         </p:nvSpPr>
         <p:spPr>
           <a:xfrm>
-            <a:off x="2779776" y="4178808"/>
+            <a:off x="2359152" y="4178808"/>
             <a:ext cx="320040" cy="420624"/>
           </a:xfrm>
           <a:prstGeom prst="rect">
@@ -39814,7 +40342,7 @@
         </p:nvSpPr>
         <p:spPr>
           <a:xfrm>
-            <a:off x="3127248" y="4178808"/>
+            <a:off x="2706624" y="4178808"/>
             <a:ext cx="1243584" cy="420624"/>
           </a:xfrm>
           <a:prstGeom prst="rect">
@@ -39848,7 +40376,7 @@
         </p:nvSpPr>
         <p:spPr>
           <a:xfrm>
-            <a:off x="3127248" y="4178808"/>
+            <a:off x="2706624" y="4178808"/>
             <a:ext cx="1243584" cy="420624"/>
           </a:xfrm>
           <a:prstGeom prst="rect">
@@ -39887,7 +40415,7 @@
         </p:nvSpPr>
         <p:spPr>
           <a:xfrm>
-            <a:off x="4398264" y="4178808"/>
+            <a:off x="3977640" y="4178808"/>
             <a:ext cx="320040" cy="420624"/>
           </a:xfrm>
           <a:prstGeom prst="rect">
@@ -39926,8 +40454,8 @@
         </p:nvSpPr>
         <p:spPr>
           <a:xfrm>
-            <a:off x="4745736" y="4178808"/>
-            <a:ext cx="1097280" cy="420624"/>
+            <a:off x="4325112" y="4178808"/>
+            <a:ext cx="822960" cy="420624"/>
           </a:xfrm>
           <a:prstGeom prst="rect">
             <a:avLst>
@@ -39960,8 +40488,8 @@
         </p:nvSpPr>
         <p:spPr>
           <a:xfrm>
-            <a:off x="4745736" y="4178808"/>
-            <a:ext cx="1097280" cy="420624"/>
+            <a:off x="4325112" y="4178808"/>
+            <a:ext cx="822960" cy="420624"/>
           </a:xfrm>
           <a:prstGeom prst="rect">
             <a:avLst/>
@@ -39985,7 +40513,7 @@
                 <a:ea typeface="Trebuchet MS" pitchFamily="34" charset="-122"/>
                 <a:cs typeface="Trebuchet MS" pitchFamily="34" charset="-120"/>
               </a:rPr>
-              <a:t>-able</a:t>
+              <a:t>-er</a:t>
             </a:r>
             <a:endParaRPr lang="en-US" sz="1300" dirty="0"/>
           </a:p>
@@ -39999,7 +40527,7 @@
         </p:nvSpPr>
         <p:spPr>
           <a:xfrm>
-            <a:off x="5916168" y="4178808"/>
+            <a:off x="5221224" y="4178808"/>
             <a:ext cx="365760" cy="420624"/>
           </a:xfrm>
           <a:prstGeom prst="rect">
@@ -40038,7 +40566,7 @@
         </p:nvSpPr>
         <p:spPr>
           <a:xfrm>
-            <a:off x="6327648" y="4178808"/>
+            <a:off x="5632704" y="4178808"/>
             <a:ext cx="2194560" cy="420624"/>
           </a:xfrm>
           <a:prstGeom prst="rect">
@@ -40065,7 +40593,7 @@
         </p:nvSpPr>
         <p:spPr>
           <a:xfrm>
-            <a:off x="6327648" y="4178808"/>
+            <a:off x="5632704" y="4178808"/>
             <a:ext cx="2194560" cy="420624"/>
           </a:xfrm>
           <a:prstGeom prst="rect">
@@ -40090,7 +40618,7 @@
                 <a:ea typeface="Trebuchet MS" pitchFamily="34" charset="-122"/>
                 <a:cs typeface="Trebuchet MS" pitchFamily="34" charset="-120"/>
               </a:rPr>
-              <a:t>transport</a:t>
+              <a:t>import</a:t>
             </a:r>
             <a:endParaRPr lang="en-US" sz="1400" dirty="0"/>
           </a:p>
@@ -40382,7 +40910,7 @@
                 <a:ea typeface="Calibri" pitchFamily="34" charset="-122"/>
                 <a:cs typeface="Calibri" pitchFamily="34" charset="-120"/>
               </a:rPr>
-              <a:t>Word Labs  •  wordlabs.app  •  Root: 'port' = carry, bring, transport</a:t>
+              <a:t>Word Labs  •  wordlabs.app  •  Root: 'port' = carry, bring, bear</a:t>
             </a:r>
             <a:endParaRPr lang="en-US" sz="800" dirty="0"/>
           </a:p>
@@ -40494,7 +41022,7 @@
                 <a:ea typeface="Trebuchet MS" pitchFamily="34" charset="-122"/>
                 <a:cs typeface="Trebuchet MS" pitchFamily="34" charset="-120"/>
               </a:rPr>
-              <a:t>transport</a:t>
+              <a:t>import</a:t>
             </a:r>
             <a:endParaRPr lang="en-US" sz="1200" dirty="0"/>
           </a:p>
@@ -40560,7 +41088,7 @@
                 <a:ea typeface="Calibri" pitchFamily="34" charset="-122"/>
                 <a:cs typeface="Calibri" pitchFamily="34" charset="-120"/>
               </a:rPr>
-              <a:t>To send goods out of a country to be sold elsewhere.</a:t>
+              <a:t>To carry people or things from one place to another.</a:t>
             </a:r>
             <a:endParaRPr lang="en-US" sz="1200" dirty="0"/>
           </a:p>
@@ -40633,7 +41161,7 @@
                 <a:ea typeface="Trebuchet MS" pitchFamily="34" charset="-122"/>
                 <a:cs typeface="Trebuchet MS" pitchFamily="34" charset="-120"/>
               </a:rPr>
-              <a:t>import</a:t>
+              <a:t>export</a:t>
             </a:r>
             <a:endParaRPr lang="en-US" sz="1200" dirty="0"/>
           </a:p>
@@ -40699,7 +41227,7 @@
                 <a:ea typeface="Calibri" pitchFamily="34" charset="-122"/>
                 <a:cs typeface="Calibri" pitchFamily="34" charset="-120"/>
               </a:rPr>
-              <a:t>To hold something or someone up and help them.</a:t>
+              <a:t>To hold something up or help someone through a difficult time.</a:t>
             </a:r>
             <a:endParaRPr lang="en-US" sz="1200" dirty="0"/>
           </a:p>
@@ -40772,7 +41300,7 @@
                 <a:ea typeface="Trebuchet MS" pitchFamily="34" charset="-122"/>
                 <a:cs typeface="Trebuchet MS" pitchFamily="34" charset="-120"/>
               </a:rPr>
-              <a:t>export</a:t>
+              <a:t>transport</a:t>
             </a:r>
             <a:endParaRPr lang="en-US" sz="1200" dirty="0"/>
           </a:p>
@@ -40838,7 +41366,7 @@
                 <a:ea typeface="Calibri" pitchFamily="34" charset="-122"/>
                 <a:cs typeface="Calibri" pitchFamily="34" charset="-120"/>
               </a:rPr>
-              <a:t>To carry people or goods from one place to another.</a:t>
+              <a:t>To bring goods into a country from another place.</a:t>
             </a:r>
             <a:endParaRPr lang="en-US" sz="1200" dirty="0"/>
           </a:p>
@@ -40977,7 +41505,7 @@
                 <a:ea typeface="Calibri" pitchFamily="34" charset="-122"/>
                 <a:cs typeface="Calibri" pitchFamily="34" charset="-120"/>
               </a:rPr>
-              <a:t>Easy to carry around because it is light or small.</a:t>
+              <a:t>A person who carries luggage or heavy loads for others.</a:t>
             </a:r>
             <a:endParaRPr lang="en-US" sz="1200" dirty="0"/>
           </a:p>
@@ -41116,7 +41644,7 @@
                 <a:ea typeface="Calibri" pitchFamily="34" charset="-122"/>
                 <a:cs typeface="Calibri" pitchFamily="34" charset="-120"/>
               </a:rPr>
-              <a:t>A person whose job is to carry luggage or heavy loads.</a:t>
+              <a:t>Something that is easy to carry because it is light or small.</a:t>
             </a:r>
             <a:endParaRPr lang="en-US" sz="1200" dirty="0"/>
           </a:p>
@@ -41189,7 +41717,7 @@
                 <a:ea typeface="Trebuchet MS" pitchFamily="34" charset="-122"/>
                 <a:cs typeface="Trebuchet MS" pitchFamily="34" charset="-120"/>
               </a:rPr>
-              <a:t>portable</a:t>
+              <a:t>porter</a:t>
             </a:r>
             <a:endParaRPr lang="en-US" sz="1200" dirty="0"/>
           </a:p>
@@ -41255,7 +41783,7 @@
                 <a:ea typeface="Calibri" pitchFamily="34" charset="-122"/>
                 <a:cs typeface="Calibri" pitchFamily="34" charset="-120"/>
               </a:rPr>
-              <a:t>To carry information back and share it with others.</a:t>
+              <a:t>To carry information back by telling or writing about something.</a:t>
             </a:r>
             <a:endParaRPr lang="en-US" sz="1200" dirty="0"/>
           </a:p>
@@ -41328,7 +41856,7 @@
                 <a:ea typeface="Trebuchet MS" pitchFamily="34" charset="-122"/>
                 <a:cs typeface="Trebuchet MS" pitchFamily="34" charset="-120"/>
               </a:rPr>
-              <a:t>porter</a:t>
+              <a:t>portable</a:t>
             </a:r>
             <a:endParaRPr lang="en-US" sz="1200" dirty="0"/>
           </a:p>
@@ -41394,7 +41922,7 @@
                 <a:ea typeface="Calibri" pitchFamily="34" charset="-122"/>
                 <a:cs typeface="Calibri" pitchFamily="34" charset="-120"/>
               </a:rPr>
-              <a:t>To bring goods into a country from another country.</a:t>
+              <a:t>To send goods out of a country to sell somewhere else.</a:t>
             </a:r>
             <a:endParaRPr lang="en-US" sz="1200" dirty="0"/>
           </a:p>
@@ -41686,7 +42214,7 @@
                 <a:ea typeface="Calibri" pitchFamily="34" charset="-122"/>
                 <a:cs typeface="Calibri" pitchFamily="34" charset="-120"/>
               </a:rPr>
-              <a:t>Word Labs  •  wordlabs.app  •  Root: 'port' = carry, bring, transport</a:t>
+              <a:t>Word Labs  •  wordlabs.app  •  Root: 'port' = carry, bring, bear</a:t>
             </a:r>
             <a:endParaRPr lang="en-US" sz="800" dirty="0"/>
           </a:p>
@@ -41889,7 +42417,7 @@
                 <a:ea typeface="Calibri" pitchFamily="34" charset="-122"/>
                 <a:cs typeface="Calibri" pitchFamily="34" charset="-120"/>
               </a:rPr>
-              <a:t>We use transport such as trains, buses, and cars to carry us from place to place.</a:t>
+              <a:t>Australia likes to export wool and wheat to many countries around the world.</a:t>
             </a:r>
             <a:endParaRPr lang="en-US" sz="1500" dirty="0"/>
           </a:p>
@@ -42053,7 +42581,7 @@
                 <a:ea typeface="Calibri" pitchFamily="34" charset="-122"/>
                 <a:cs typeface="Calibri" pitchFamily="34" charset="-120"/>
               </a:rPr>
-              <a:t>Australia likes to export goods like wool and wheat to other countries around the world.</a:t>
+              <a:t>We need to transport all the camping gear to the campsite before it gets dark.</a:t>
             </a:r>
             <a:endParaRPr lang="en-US" sz="1500" dirty="0"/>
           </a:p>
@@ -42217,7 +42745,7 @@
                 <a:ea typeface="Calibri" pitchFamily="34" charset="-122"/>
                 <a:cs typeface="Calibri" pitchFamily="34" charset="-120"/>
               </a:rPr>
-              <a:t>A portable speaker is handy because you can carry it with you wherever you go.</a:t>
+              <a:t>The student wrote a detailed report about the water cycle for her science class.</a:t>
             </a:r>
             <a:endParaRPr lang="en-US" sz="1500" dirty="0"/>
           </a:p>
